--- a/preview_v7/cn/l-cn-bs-u3-5.pptx
+++ b/preview_v7/cn/l-cn-bs-u3-5.pptx
@@ -3142,14 +3142,102 @@
       </p:sp>
       <p:sp>
         <p:nvSpPr>
-          <p:cNvPr id="3" name="TextBox 2"/>
+          <p:cNvPr id="3" name="Rectangle 2"/>
+          <p:cNvSpPr/>
+          <p:nvPr/>
+        </p:nvSpPr>
+        <p:spPr>
+          <a:xfrm>
+            <a:off x="0" y="0"/>
+            <a:ext cx="12191695" cy="1371600"/>
+          </a:xfrm>
+          <a:prstGeom prst="rect">
+            <a:avLst/>
+          </a:prstGeom>
+          <a:solidFill>
+            <a:srgbClr val="1C2A33"/>
+          </a:solidFill>
+          <a:ln>
+            <a:noFill/>
+          </a:ln>
+          <a:effectLst/>
+        </p:spPr>
+        <p:style>
+          <a:lnRef idx="1">
+            <a:schemeClr val="accent1"/>
+          </a:lnRef>
+          <a:fillRef idx="3">
+            <a:schemeClr val="accent1"/>
+          </a:fillRef>
+          <a:effectRef idx="2">
+            <a:schemeClr val="accent1"/>
+          </a:effectRef>
+          <a:fontRef idx="minor">
+            <a:schemeClr val="lt1"/>
+          </a:fontRef>
+        </p:style>
+        <p:txBody>
+          <a:bodyPr rtlCol="0" anchor="ctr"/>
+          <a:lstStyle/>
+          <a:p>
+            <a:pPr algn="ctr"/>
+          </a:p>
+        </p:txBody>
+      </p:sp>
+      <p:sp>
+        <p:nvSpPr>
+          <p:cNvPr id="4" name="Rectangle 3"/>
+          <p:cNvSpPr/>
+          <p:nvPr/>
+        </p:nvSpPr>
+        <p:spPr>
+          <a:xfrm>
+            <a:off x="640080" y="365760"/>
+            <a:ext cx="822960" cy="38100"/>
+          </a:xfrm>
+          <a:prstGeom prst="rect">
+            <a:avLst/>
+          </a:prstGeom>
+          <a:solidFill>
+            <a:srgbClr val="C8A86B"/>
+          </a:solidFill>
+          <a:ln>
+            <a:noFill/>
+          </a:ln>
+          <a:effectLst/>
+        </p:spPr>
+        <p:style>
+          <a:lnRef idx="1">
+            <a:schemeClr val="accent1"/>
+          </a:lnRef>
+          <a:fillRef idx="3">
+            <a:schemeClr val="accent1"/>
+          </a:fillRef>
+          <a:effectRef idx="2">
+            <a:schemeClr val="accent1"/>
+          </a:effectRef>
+          <a:fontRef idx="minor">
+            <a:schemeClr val="lt1"/>
+          </a:fontRef>
+        </p:style>
+        <p:txBody>
+          <a:bodyPr rtlCol="0" anchor="ctr"/>
+          <a:lstStyle/>
+          <a:p>
+            <a:pPr algn="ctr"/>
+          </a:p>
+        </p:txBody>
+      </p:sp>
+      <p:sp>
+        <p:nvSpPr>
+          <p:cNvPr id="5" name="TextBox 4"/>
           <p:cNvSpPr txBox="1"/>
           <p:nvPr/>
         </p:nvSpPr>
         <p:spPr>
           <a:xfrm>
-            <a:off x="640080" y="640080"/>
-            <a:ext cx="10911535" cy="502920"/>
+            <a:off x="640080" y="475488"/>
+            <a:ext cx="10911535" cy="457200"/>
           </a:xfrm>
           <a:prstGeom prst="rect">
             <a:avLst/>
@@ -3163,34 +3251,169 @@
           <a:lstStyle/>
           <a:p>
             <a:pPr algn="l">
+              <a:lnSpc>
+                <a:spcPct val="145000"/>
+              </a:lnSpc>
               <a:spcAft>
-                <a:spcPts val="0"/>
+                <a:spcPts val="400"/>
               </a:spcAft>
             </a:pPr>
             <a:r>
-              <a:rPr sz="1200" b="1">
-                <a:solidFill>
-                  <a:srgbClr val="B23A2A"/>
+              <a:rPr sz="1400" b="1">
+                <a:solidFill>
+                  <a:srgbClr val="C8A86B"/>
                 </a:solidFill>
                 <a:latin typeface="微软雅黑"/>
                 <a:ea typeface="微软雅黑"/>
                 <a:cs typeface="微软雅黑"/>
               </a:rPr>
-              <a:t>语文 · 必修上册 · 第3单元 生命的诗意</a:t>
-            </a:r>
-          </a:p>
-        </p:txBody>
-      </p:sp>
-      <p:sp>
-        <p:nvSpPr>
-          <p:cNvPr id="4" name="Rectangle 3"/>
+              <a:t>语文 · 必修上册 · 第3单元（生命的诗意）</a:t>
+            </a:r>
+          </a:p>
+        </p:txBody>
+      </p:sp>
+      <p:sp>
+        <p:nvSpPr>
+          <p:cNvPr id="6" name="TextBox 5"/>
+          <p:cNvSpPr txBox="1"/>
+          <p:nvPr/>
+        </p:nvSpPr>
+        <p:spPr>
+          <a:xfrm>
+            <a:off x="640080" y="914400"/>
+            <a:ext cx="10911535" cy="411480"/>
+          </a:xfrm>
+          <a:prstGeom prst="rect">
+            <a:avLst/>
+          </a:prstGeom>
+          <a:noFill/>
+        </p:spPr>
+        <p:txBody>
+          <a:bodyPr wrap="square" anchor="t" lIns="0" rIns="0" tIns="0" bIns="0">
+            <a:spAutoFit/>
+          </a:bodyPr>
+          <a:lstStyle/>
+          <a:p>
+            <a:pPr algn="l">
+              <a:lnSpc>
+                <a:spcPct val="145000"/>
+              </a:lnSpc>
+              <a:spcAft>
+                <a:spcPts val="400"/>
+              </a:spcAft>
+            </a:pPr>
+            <a:r>
+              <a:rPr sz="1300" b="0">
+                <a:solidFill>
+                  <a:srgbClr val="FFFFFF"/>
+                </a:solidFill>
+                <a:latin typeface="微软雅黑"/>
+                <a:ea typeface="微软雅黑"/>
+                <a:cs typeface="微软雅黑"/>
+              </a:rPr>
+              <a:t>第5课时 · 群文阅读</a:t>
+            </a:r>
+          </a:p>
+        </p:txBody>
+      </p:sp>
+      <p:sp>
+        <p:nvSpPr>
+          <p:cNvPr id="7" name="Rectangle 6"/>
           <p:cNvSpPr/>
           <p:nvPr/>
         </p:nvSpPr>
         <p:spPr>
           <a:xfrm>
-            <a:off x="640080" y="1207008"/>
-            <a:ext cx="822960" cy="30480"/>
+            <a:off x="11185855" y="320040"/>
+            <a:ext cx="640080" cy="640080"/>
+          </a:xfrm>
+          <a:prstGeom prst="rect">
+            <a:avLst/>
+          </a:prstGeom>
+          <a:solidFill>
+            <a:srgbClr val="2E7D6B"/>
+          </a:solidFill>
+          <a:ln>
+            <a:noFill/>
+          </a:ln>
+          <a:effectLst/>
+        </p:spPr>
+        <p:style>
+          <a:lnRef idx="1">
+            <a:schemeClr val="accent1"/>
+          </a:lnRef>
+          <a:fillRef idx="3">
+            <a:schemeClr val="accent1"/>
+          </a:fillRef>
+          <a:effectRef idx="2">
+            <a:schemeClr val="accent1"/>
+          </a:effectRef>
+          <a:fontRef idx="minor">
+            <a:schemeClr val="lt1"/>
+          </a:fontRef>
+        </p:style>
+        <p:txBody>
+          <a:bodyPr rtlCol="0" anchor="ctr"/>
+          <a:lstStyle/>
+          <a:p>
+            <a:pPr algn="ctr"/>
+          </a:p>
+        </p:txBody>
+      </p:sp>
+      <p:sp>
+        <p:nvSpPr>
+          <p:cNvPr id="8" name="TextBox 7"/>
+          <p:cNvSpPr txBox="1"/>
+          <p:nvPr/>
+        </p:nvSpPr>
+        <p:spPr>
+          <a:xfrm>
+            <a:off x="640080" y="1965960"/>
+            <a:ext cx="10911535" cy="2377440"/>
+          </a:xfrm>
+          <a:prstGeom prst="rect">
+            <a:avLst/>
+          </a:prstGeom>
+          <a:noFill/>
+        </p:spPr>
+        <p:txBody>
+          <a:bodyPr wrap="square" anchor="t" lIns="0" rIns="0" tIns="0" bIns="0">
+            <a:spAutoFit/>
+          </a:bodyPr>
+          <a:lstStyle/>
+          <a:p>
+            <a:pPr algn="l">
+              <a:lnSpc>
+                <a:spcPct val="125000"/>
+              </a:lnSpc>
+              <a:spcAft>
+                <a:spcPts val="400"/>
+              </a:spcAft>
+            </a:pPr>
+            <a:r>
+              <a:rPr sz="3400" b="1">
+                <a:solidFill>
+                  <a:srgbClr val="1C2A33"/>
+                </a:solidFill>
+                <a:latin typeface="楷体"/>
+                <a:ea typeface="楷体"/>
+                <a:cs typeface="楷体"/>
+              </a:rPr>
+              <a:t>永遇乐·京口北固亭怀古 / 声声慢 群文——豪放与婉约的对话</a:t>
+            </a:r>
+          </a:p>
+        </p:txBody>
+      </p:sp>
+      <p:sp>
+        <p:nvSpPr>
+          <p:cNvPr id="9" name="Rectangle 8"/>
+          <p:cNvSpPr/>
+          <p:nvPr/>
+        </p:nvSpPr>
+        <p:spPr>
+          <a:xfrm>
+            <a:off x="640080" y="4343400"/>
+            <a:ext cx="822960" cy="38100"/>
           </a:xfrm>
           <a:prstGeom prst="rect">
             <a:avLst/>
@@ -3227,14 +3450,14 @@
       </p:sp>
       <p:sp>
         <p:nvSpPr>
-          <p:cNvPr id="5" name="TextBox 4"/>
+          <p:cNvPr id="10" name="TextBox 9"/>
           <p:cNvSpPr txBox="1"/>
           <p:nvPr/>
         </p:nvSpPr>
         <p:spPr>
           <a:xfrm>
-            <a:off x="640080" y="1737360"/>
-            <a:ext cx="10911535" cy="2011680"/>
+            <a:off x="640080" y="4572000"/>
+            <a:ext cx="10911535" cy="1005840"/>
           </a:xfrm>
           <a:prstGeom prst="rect">
             <a:avLst/>
@@ -3249,76 +3472,42 @@
           <a:p>
             <a:pPr algn="l">
               <a:lnSpc>
-                <a:spcPct val="115000"/>
+                <a:spcPct val="145000"/>
               </a:lnSpc>
+              <a:spcAft>
+                <a:spcPts val="400"/>
+              </a:spcAft>
             </a:pPr>
             <a:r>
-              <a:rPr sz="4000" b="1">
-                <a:solidFill>
-                  <a:srgbClr val="1C2A33"/>
+              <a:rPr sz="1700" b="0">
+                <a:solidFill>
+                  <a:srgbClr val="6B6258"/>
                 </a:solidFill>
                 <a:latin typeface="楷体"/>
                 <a:ea typeface="楷体"/>
                 <a:cs typeface="楷体"/>
               </a:rPr>
-              <a:t>永遇乐·京口北固亭怀古 / 声声慢 群文——豪放与婉约的对话</a:t>
-            </a:r>
-          </a:p>
-        </p:txBody>
-      </p:sp>
-      <p:sp>
-        <p:nvSpPr>
-          <p:cNvPr id="6" name="TextBox 5"/>
-          <p:cNvSpPr txBox="1"/>
-          <p:nvPr/>
-        </p:nvSpPr>
-        <p:spPr>
-          <a:xfrm>
-            <a:off x="640080" y="3840480"/>
-            <a:ext cx="10911535" cy="457200"/>
-          </a:xfrm>
-          <a:prstGeom prst="rect">
-            <a:avLst/>
-          </a:prstGeom>
-          <a:noFill/>
-        </p:spPr>
-        <p:txBody>
-          <a:bodyPr wrap="square" anchor="t" lIns="0" rIns="0" tIns="0" bIns="0">
-            <a:spAutoFit/>
-          </a:bodyPr>
-          <a:lstStyle/>
-          <a:p>
-            <a:pPr algn="l"/>
-            <a:r>
-              <a:rPr sz="1700" b="1">
-                <a:solidFill>
-                  <a:srgbClr val="B23A2A"/>
-                </a:solidFill>
-                <a:latin typeface="微软雅黑"/>
-                <a:ea typeface="微软雅黑"/>
-                <a:cs typeface="微软雅黑"/>
-              </a:rPr>
-              <a:t>群文阅读  ·  第5课时  ·  45分钟</a:t>
-            </a:r>
-          </a:p>
-        </p:txBody>
-      </p:sp>
-      <p:sp>
-        <p:nvSpPr>
-          <p:cNvPr id="7" name="Rectangle 6"/>
+              <a:t>八首诗词，八种生命的姿态与回响。</a:t>
+            </a:r>
+          </a:p>
+        </p:txBody>
+      </p:sp>
+      <p:sp>
+        <p:nvSpPr>
+          <p:cNvPr id="11" name="Rectangle 10"/>
           <p:cNvSpPr/>
           <p:nvPr/>
         </p:nvSpPr>
         <p:spPr>
           <a:xfrm>
-            <a:off x="640080" y="5394960"/>
-            <a:ext cx="2011680" cy="33020"/>
+            <a:off x="0" y="6656832"/>
+            <a:ext cx="12191695" cy="201168"/>
           </a:xfrm>
           <a:prstGeom prst="rect">
             <a:avLst/>
           </a:prstGeom>
           <a:solidFill>
-            <a:srgbClr val="C8A86B"/>
+            <a:srgbClr val="B23A2A"/>
           </a:solidFill>
           <a:ln>
             <a:noFill/>
@@ -3349,14 +3538,14 @@
       </p:sp>
       <p:sp>
         <p:nvSpPr>
-          <p:cNvPr id="8" name="TextBox 7"/>
+          <p:cNvPr id="12" name="TextBox 11"/>
           <p:cNvSpPr txBox="1"/>
           <p:nvPr/>
         </p:nvSpPr>
         <p:spPr>
           <a:xfrm>
-            <a:off x="640080" y="5623560"/>
-            <a:ext cx="10911535" cy="548640"/>
+            <a:off x="640080" y="6400800"/>
+            <a:ext cx="10911535" cy="274320"/>
           </a:xfrm>
           <a:prstGeom prst="rect">
             <a:avLst/>
@@ -3369,9 +3558,16 @@
           </a:bodyPr>
           <a:lstStyle/>
           <a:p>
-            <a:pPr algn="l"/>
-            <a:r>
-              <a:rPr sz="1400" b="0">
+            <a:pPr algn="l">
+              <a:lnSpc>
+                <a:spcPct val="145000"/>
+              </a:lnSpc>
+              <a:spcAft>
+                <a:spcPts val="400"/>
+              </a:spcAft>
+            </a:pPr>
+            <a:r>
+              <a:rPr sz="1100" b="0">
                 <a:solidFill>
                   <a:srgbClr val="6B6258"/>
                 </a:solidFill>
@@ -3379,14 +3575,14 @@
                 <a:ea typeface="微软雅黑"/>
                 <a:cs typeface="微软雅黑"/>
               </a:rPr>
-              <a:t>学习任务群：文学阅读与写作    |    年级：高一</a:t>
-            </a:r>
-          </a:p>
-        </p:txBody>
-      </p:sp>
-      <p:sp>
-        <p:nvSpPr>
-          <p:cNvPr id="9" name="TextBox 8"/>
+              <a:t>本课件未使用无关配图 · 学科色块兜底</a:t>
+            </a:r>
+          </a:p>
+        </p:txBody>
+      </p:sp>
+      <p:sp>
+        <p:nvSpPr>
+          <p:cNvPr id="13" name="TextBox 12"/>
           <p:cNvSpPr txBox="1"/>
           <p:nvPr/>
         </p:nvSpPr>
@@ -3570,14 +3766,58 @@
       </p:sp>
       <p:sp>
         <p:nvSpPr>
-          <p:cNvPr id="5" name="Rounded Rectangle 4"/>
+          <p:cNvPr id="5" name="TextBox 4"/>
+          <p:cNvSpPr txBox="1"/>
+          <p:nvPr/>
+        </p:nvSpPr>
+        <p:spPr>
+          <a:xfrm>
+            <a:off x="640080" y="1325880"/>
+            <a:ext cx="10911535" cy="640080"/>
+          </a:xfrm>
+          <a:prstGeom prst="rect">
+            <a:avLst/>
+          </a:prstGeom>
+          <a:noFill/>
+        </p:spPr>
+        <p:txBody>
+          <a:bodyPr wrap="square" anchor="t" lIns="0" rIns="0" tIns="0" bIns="0">
+            <a:spAutoFit/>
+          </a:bodyPr>
+          <a:lstStyle/>
+          <a:p>
+            <a:pPr algn="l">
+              <a:lnSpc>
+                <a:spcPct val="145000"/>
+              </a:lnSpc>
+              <a:spcAft>
+                <a:spcPts val="400"/>
+              </a:spcAft>
+            </a:pPr>
+            <a:r>
+              <a:rPr sz="3000" b="1">
+                <a:solidFill>
+                  <a:srgbClr val="1C2A33"/>
+                </a:solidFill>
+                <a:latin typeface="楷体"/>
+                <a:ea typeface="楷体"/>
+                <a:cs typeface="楷体"/>
+              </a:rPr>
+              <a:t>四向学习目标</a:t>
+            </a:r>
+          </a:p>
+        </p:txBody>
+      </p:sp>
+      <p:sp>
+        <p:nvSpPr>
+          <p:cNvPr id="6" name="Rounded Rectangle 5"/>
           <p:cNvSpPr/>
           <p:nvPr/>
         </p:nvSpPr>
         <p:spPr>
           <a:xfrm>
-            <a:off x="640080" y="1417320"/>
-            <a:ext cx="5349240" cy="2057400"/>
+            <a:off x="640080" y="2377440"/>
+            <a:ext cx="2453563" cy="3566160"/>
           </a:xfrm>
           <a:prstGeom prst="roundRect">
             <a:avLst/>
@@ -3585,7 +3825,7 @@
           <a:solidFill>
             <a:srgbClr val="FFFFFF"/>
           </a:solidFill>
-          <a:ln w="22860">
+          <a:ln w="20320">
             <a:solidFill>
               <a:srgbClr val="B23A2A"/>
             </a:solidFill>
@@ -3616,23 +3856,113 @@
       </p:sp>
       <p:sp>
         <p:nvSpPr>
-          <p:cNvPr id="6" name="Oval 5"/>
+          <p:cNvPr id="7" name="TextBox 6"/>
+          <p:cNvSpPr txBox="1"/>
+          <p:nvPr/>
+        </p:nvSpPr>
+        <p:spPr>
+          <a:xfrm>
+            <a:off x="914400" y="2578608"/>
+            <a:ext cx="1950643" cy="822960"/>
+          </a:xfrm>
+          <a:prstGeom prst="rect">
+            <a:avLst/>
+          </a:prstGeom>
+          <a:noFill/>
+        </p:spPr>
+        <p:txBody>
+          <a:bodyPr wrap="square" anchor="t" lIns="0" rIns="0" tIns="0" bIns="0">
+            <a:spAutoFit/>
+          </a:bodyPr>
+          <a:lstStyle/>
+          <a:p>
+            <a:pPr algn="l">
+              <a:lnSpc>
+                <a:spcPct val="130000"/>
+              </a:lnSpc>
+              <a:spcAft>
+                <a:spcPts val="400"/>
+              </a:spcAft>
+            </a:pPr>
+            <a:r>
+              <a:rPr sz="1600" b="1">
+                <a:solidFill>
+                  <a:srgbClr val="B23A2A"/>
+                </a:solidFill>
+                <a:latin typeface="微软雅黑"/>
+                <a:ea typeface="微软雅黑"/>
+                <a:cs typeface="微软雅黑"/>
+              </a:rPr>
+              <a:t>语言能力</a:t>
+            </a:r>
+          </a:p>
+        </p:txBody>
+      </p:sp>
+      <p:sp>
+        <p:nvSpPr>
+          <p:cNvPr id="8" name="TextBox 7"/>
+          <p:cNvSpPr txBox="1"/>
+          <p:nvPr/>
+        </p:nvSpPr>
+        <p:spPr>
+          <a:xfrm>
+            <a:off x="868680" y="3337560"/>
+            <a:ext cx="1996363" cy="2423160"/>
+          </a:xfrm>
+          <a:prstGeom prst="rect">
+            <a:avLst/>
+          </a:prstGeom>
+          <a:noFill/>
+        </p:spPr>
+        <p:txBody>
+          <a:bodyPr wrap="square" anchor="t" lIns="0" rIns="0" tIns="0" bIns="0">
+            <a:spAutoFit/>
+          </a:bodyPr>
+          <a:lstStyle/>
+          <a:p>
+            <a:pPr algn="l">
+              <a:lnSpc>
+                <a:spcPct val="145000"/>
+              </a:lnSpc>
+              <a:spcAft>
+                <a:spcPts val="400"/>
+              </a:spcAft>
+            </a:pPr>
+            <a:r>
+              <a:rPr sz="1250" b="0">
+                <a:solidFill>
+                  <a:srgbClr val="1C2A33"/>
+                </a:solidFill>
+                <a:latin typeface="楷体"/>
+                <a:ea typeface="楷体"/>
+                <a:cs typeface="楷体"/>
+              </a:rPr>
+              <a:t>背诵《声声慢》，概括《永遇乐》五处用典所指；说出两词核心情感与手法。</a:t>
+            </a:r>
+          </a:p>
+        </p:txBody>
+      </p:sp>
+      <p:sp>
+        <p:nvSpPr>
+          <p:cNvPr id="9" name="Rounded Rectangle 8"/>
           <p:cNvSpPr/>
           <p:nvPr/>
         </p:nvSpPr>
         <p:spPr>
           <a:xfrm>
-            <a:off x="804672" y="1581912"/>
-            <a:ext cx="457200" cy="457200"/>
-          </a:xfrm>
-          <a:prstGeom prst="ellipse">
+            <a:off x="3459403" y="2377440"/>
+            <a:ext cx="2453563" cy="3566160"/>
+          </a:xfrm>
+          <a:prstGeom prst="roundRect">
             <a:avLst/>
           </a:prstGeom>
           <a:solidFill>
-            <a:srgbClr val="B23A2A"/>
+            <a:srgbClr val="FFFFFF"/>
           </a:solidFill>
-          <a:ln>
-            <a:noFill/>
+          <a:ln w="20320">
+            <a:solidFill>
+              <a:srgbClr val="2E7D6B"/>
+            </a:solidFill>
           </a:ln>
           <a:effectLst/>
         </p:spPr>
@@ -3660,14 +3990,14 @@
       </p:sp>
       <p:sp>
         <p:nvSpPr>
-          <p:cNvPr id="7" name="TextBox 6"/>
+          <p:cNvPr id="10" name="TextBox 9"/>
           <p:cNvSpPr txBox="1"/>
           <p:nvPr/>
         </p:nvSpPr>
         <p:spPr>
           <a:xfrm>
-            <a:off x="804672" y="1636776"/>
-            <a:ext cx="457200" cy="384048"/>
+            <a:off x="3733723" y="2578608"/>
+            <a:ext cx="1950643" cy="822960"/>
           </a:xfrm>
           <a:prstGeom prst="rect">
             <a:avLst/>
@@ -3680,31 +4010,38 @@
           </a:bodyPr>
           <a:lstStyle/>
           <a:p>
-            <a:pPr algn="ctr"/>
+            <a:pPr algn="l">
+              <a:lnSpc>
+                <a:spcPct val="130000"/>
+              </a:lnSpc>
+              <a:spcAft>
+                <a:spcPts val="400"/>
+              </a:spcAft>
+            </a:pPr>
             <a:r>
               <a:rPr sz="1600" b="1">
                 <a:solidFill>
-                  <a:srgbClr val="FFFFFF"/>
+                  <a:srgbClr val="2E7D6B"/>
                 </a:solidFill>
                 <a:latin typeface="微软雅黑"/>
                 <a:ea typeface="微软雅黑"/>
                 <a:cs typeface="微软雅黑"/>
               </a:rPr>
-              <a:t>1</a:t>
-            </a:r>
-          </a:p>
-        </p:txBody>
-      </p:sp>
-      <p:sp>
-        <p:nvSpPr>
-          <p:cNvPr id="8" name="TextBox 7"/>
+              <a:t>文化意识</a:t>
+            </a:r>
+          </a:p>
+        </p:txBody>
+      </p:sp>
+      <p:sp>
+        <p:nvSpPr>
+          <p:cNvPr id="11" name="TextBox 10"/>
           <p:cNvSpPr txBox="1"/>
           <p:nvPr/>
         </p:nvSpPr>
         <p:spPr>
           <a:xfrm>
-            <a:off x="1371600" y="1527048"/>
-            <a:ext cx="4434840" cy="457200"/>
+            <a:off x="3688003" y="3337560"/>
+            <a:ext cx="1996363" cy="2423160"/>
           </a:xfrm>
           <a:prstGeom prst="rect">
             <a:avLst/>
@@ -3719,52 +4056,14 @@
           <a:p>
             <a:pPr algn="l">
               <a:lnSpc>
-                <a:spcPct val="110000"/>
+                <a:spcPct val="145000"/>
               </a:lnSpc>
+              <a:spcAft>
+                <a:spcPts val="400"/>
+              </a:spcAft>
             </a:pPr>
             <a:r>
-              <a:rPr sz="1600" b="1">
-                <a:solidFill>
-                  <a:srgbClr val="1C2A33"/>
-                </a:solidFill>
-                <a:latin typeface="微软雅黑"/>
-                <a:ea typeface="微软雅黑"/>
-                <a:cs typeface="微软雅黑"/>
-              </a:rPr>
-              <a:t>目标</a:t>
-            </a:r>
-          </a:p>
-        </p:txBody>
-      </p:sp>
-      <p:sp>
-        <p:nvSpPr>
-          <p:cNvPr id="9" name="TextBox 8"/>
-          <p:cNvSpPr txBox="1"/>
-          <p:nvPr/>
-        </p:nvSpPr>
-        <p:spPr>
-          <a:xfrm>
-            <a:off x="1371600" y="1965960"/>
-            <a:ext cx="4434840" cy="1417320"/>
-          </a:xfrm>
-          <a:prstGeom prst="rect">
-            <a:avLst/>
-          </a:prstGeom>
-          <a:noFill/>
-        </p:spPr>
-        <p:txBody>
-          <a:bodyPr wrap="square" anchor="t" lIns="0" rIns="0" tIns="0" bIns="0">
-            <a:spAutoFit/>
-          </a:bodyPr>
-          <a:lstStyle/>
-          <a:p>
-            <a:pPr algn="l">
-              <a:lnSpc>
-                <a:spcPct val="128000"/>
-              </a:lnSpc>
-            </a:pPr>
-            <a:r>
-              <a:rPr sz="1400" b="0">
+              <a:rPr sz="1250" b="0">
                 <a:solidFill>
                   <a:srgbClr val="1C2A33"/>
                 </a:solidFill>
@@ -3772,21 +4071,21 @@
                 <a:ea typeface="楷体"/>
                 <a:cs typeface="楷体"/>
               </a:rPr>
-              <a:t>语言能力：背诵《声声慢》，概括《永遇乐》五处用典所指；说出两词核心情感与手法。</a:t>
-            </a:r>
-          </a:p>
-        </p:txBody>
-      </p:sp>
-      <p:sp>
-        <p:nvSpPr>
-          <p:cNvPr id="10" name="Rounded Rectangle 9"/>
+              <a:t>理解辛弃疾的家国襟怀与李清照的乱世孤怀，体会宋词双峰的精神气象。</a:t>
+            </a:r>
+          </a:p>
+        </p:txBody>
+      </p:sp>
+      <p:sp>
+        <p:nvSpPr>
+          <p:cNvPr id="12" name="Rounded Rectangle 11"/>
           <p:cNvSpPr/>
           <p:nvPr/>
         </p:nvSpPr>
         <p:spPr>
           <a:xfrm>
-            <a:off x="6263640" y="1417320"/>
-            <a:ext cx="5349240" cy="2057400"/>
+            <a:off x="6278727" y="2377440"/>
+            <a:ext cx="2453563" cy="3566160"/>
           </a:xfrm>
           <a:prstGeom prst="roundRect">
             <a:avLst/>
@@ -3794,9 +4093,9 @@
           <a:solidFill>
             <a:srgbClr val="FFFFFF"/>
           </a:solidFill>
-          <a:ln w="22860">
+          <a:ln w="20320">
             <a:solidFill>
-              <a:srgbClr val="B23A2A"/>
+              <a:srgbClr val="C8A86B"/>
             </a:solidFill>
           </a:ln>
           <a:effectLst/>
@@ -3825,23 +4124,113 @@
       </p:sp>
       <p:sp>
         <p:nvSpPr>
-          <p:cNvPr id="11" name="Oval 10"/>
+          <p:cNvPr id="13" name="TextBox 12"/>
+          <p:cNvSpPr txBox="1"/>
+          <p:nvPr/>
+        </p:nvSpPr>
+        <p:spPr>
+          <a:xfrm>
+            <a:off x="6553047" y="2578608"/>
+            <a:ext cx="1950643" cy="822960"/>
+          </a:xfrm>
+          <a:prstGeom prst="rect">
+            <a:avLst/>
+          </a:prstGeom>
+          <a:noFill/>
+        </p:spPr>
+        <p:txBody>
+          <a:bodyPr wrap="square" anchor="t" lIns="0" rIns="0" tIns="0" bIns="0">
+            <a:spAutoFit/>
+          </a:bodyPr>
+          <a:lstStyle/>
+          <a:p>
+            <a:pPr algn="l">
+              <a:lnSpc>
+                <a:spcPct val="130000"/>
+              </a:lnSpc>
+              <a:spcAft>
+                <a:spcPts val="400"/>
+              </a:spcAft>
+            </a:pPr>
+            <a:r>
+              <a:rPr sz="1600" b="1">
+                <a:solidFill>
+                  <a:srgbClr val="C8A86B"/>
+                </a:solidFill>
+                <a:latin typeface="微软雅黑"/>
+                <a:ea typeface="微软雅黑"/>
+                <a:cs typeface="微软雅黑"/>
+              </a:rPr>
+              <a:t>思维品质</a:t>
+            </a:r>
+          </a:p>
+        </p:txBody>
+      </p:sp>
+      <p:sp>
+        <p:nvSpPr>
+          <p:cNvPr id="14" name="TextBox 13"/>
+          <p:cNvSpPr txBox="1"/>
+          <p:nvPr/>
+        </p:nvSpPr>
+        <p:spPr>
+          <a:xfrm>
+            <a:off x="6507327" y="3337560"/>
+            <a:ext cx="1996363" cy="2423160"/>
+          </a:xfrm>
+          <a:prstGeom prst="rect">
+            <a:avLst/>
+          </a:prstGeom>
+          <a:noFill/>
+        </p:spPr>
+        <p:txBody>
+          <a:bodyPr wrap="square" anchor="t" lIns="0" rIns="0" tIns="0" bIns="0">
+            <a:spAutoFit/>
+          </a:bodyPr>
+          <a:lstStyle/>
+          <a:p>
+            <a:pPr algn="l">
+              <a:lnSpc>
+                <a:spcPct val="145000"/>
+              </a:lnSpc>
+              <a:spcAft>
+                <a:spcPts val="400"/>
+              </a:spcAft>
+            </a:pPr>
+            <a:r>
+              <a:rPr sz="1250" b="0">
+                <a:solidFill>
+                  <a:srgbClr val="1C2A33"/>
+                </a:solidFill>
+                <a:latin typeface="楷体"/>
+                <a:ea typeface="楷体"/>
+                <a:cs typeface="楷体"/>
+              </a:rPr>
+              <a:t>通过比较豪放与婉约，培养避免二元对立、看见风格交融的辩证思维。</a:t>
+            </a:r>
+          </a:p>
+        </p:txBody>
+      </p:sp>
+      <p:sp>
+        <p:nvSpPr>
+          <p:cNvPr id="15" name="Rounded Rectangle 14"/>
           <p:cNvSpPr/>
           <p:nvPr/>
         </p:nvSpPr>
         <p:spPr>
           <a:xfrm>
-            <a:off x="6428232" y="1581912"/>
-            <a:ext cx="457200" cy="457200"/>
-          </a:xfrm>
-          <a:prstGeom prst="ellipse">
+            <a:off x="9098051" y="2377440"/>
+            <a:ext cx="2453563" cy="3566160"/>
+          </a:xfrm>
+          <a:prstGeom prst="roundRect">
             <a:avLst/>
           </a:prstGeom>
           <a:solidFill>
-            <a:srgbClr val="B23A2A"/>
+            <a:srgbClr val="FFFFFF"/>
           </a:solidFill>
-          <a:ln>
-            <a:noFill/>
+          <a:ln w="20320">
+            <a:solidFill>
+              <a:srgbClr val="6B6258"/>
+            </a:solidFill>
           </a:ln>
           <a:effectLst/>
         </p:spPr>
@@ -3869,14 +4258,14 @@
       </p:sp>
       <p:sp>
         <p:nvSpPr>
-          <p:cNvPr id="12" name="TextBox 11"/>
+          <p:cNvPr id="16" name="TextBox 15"/>
           <p:cNvSpPr txBox="1"/>
           <p:nvPr/>
         </p:nvSpPr>
         <p:spPr>
           <a:xfrm>
-            <a:off x="6428232" y="1636776"/>
-            <a:ext cx="457200" cy="384048"/>
+            <a:off x="9372371" y="2578608"/>
+            <a:ext cx="1950643" cy="822960"/>
           </a:xfrm>
           <a:prstGeom prst="rect">
             <a:avLst/>
@@ -3889,31 +4278,38 @@
           </a:bodyPr>
           <a:lstStyle/>
           <a:p>
-            <a:pPr algn="ctr"/>
+            <a:pPr algn="l">
+              <a:lnSpc>
+                <a:spcPct val="130000"/>
+              </a:lnSpc>
+              <a:spcAft>
+                <a:spcPts val="400"/>
+              </a:spcAft>
+            </a:pPr>
             <a:r>
               <a:rPr sz="1600" b="1">
                 <a:solidFill>
-                  <a:srgbClr val="FFFFFF"/>
+                  <a:srgbClr val="6B6258"/>
                 </a:solidFill>
                 <a:latin typeface="微软雅黑"/>
                 <a:ea typeface="微软雅黑"/>
                 <a:cs typeface="微软雅黑"/>
               </a:rPr>
-              <a:t>2</a:t>
-            </a:r>
-          </a:p>
-        </p:txBody>
-      </p:sp>
-      <p:sp>
-        <p:nvSpPr>
-          <p:cNvPr id="13" name="TextBox 12"/>
+              <a:t>学习能力</a:t>
+            </a:r>
+          </a:p>
+        </p:txBody>
+      </p:sp>
+      <p:sp>
+        <p:nvSpPr>
+          <p:cNvPr id="17" name="TextBox 16"/>
           <p:cNvSpPr txBox="1"/>
           <p:nvPr/>
         </p:nvSpPr>
         <p:spPr>
           <a:xfrm>
-            <a:off x="6995160" y="1527048"/>
-            <a:ext cx="4434840" cy="457200"/>
+            <a:off x="9326651" y="3337560"/>
+            <a:ext cx="1996363" cy="2423160"/>
           </a:xfrm>
           <a:prstGeom prst="rect">
             <a:avLst/>
@@ -3928,52 +4324,14 @@
           <a:p>
             <a:pPr algn="l">
               <a:lnSpc>
-                <a:spcPct val="110000"/>
+                <a:spcPct val="145000"/>
               </a:lnSpc>
+              <a:spcAft>
+                <a:spcPts val="400"/>
+              </a:spcAft>
             </a:pPr>
             <a:r>
-              <a:rPr sz="1600" b="1">
-                <a:solidFill>
-                  <a:srgbClr val="1C2A33"/>
-                </a:solidFill>
-                <a:latin typeface="微软雅黑"/>
-                <a:ea typeface="微软雅黑"/>
-                <a:cs typeface="微软雅黑"/>
-              </a:rPr>
-              <a:t>目标</a:t>
-            </a:r>
-          </a:p>
-        </p:txBody>
-      </p:sp>
-      <p:sp>
-        <p:nvSpPr>
-          <p:cNvPr id="14" name="TextBox 13"/>
-          <p:cNvSpPr txBox="1"/>
-          <p:nvPr/>
-        </p:nvSpPr>
-        <p:spPr>
-          <a:xfrm>
-            <a:off x="6995160" y="1965960"/>
-            <a:ext cx="4434840" cy="1417320"/>
-          </a:xfrm>
-          <a:prstGeom prst="rect">
-            <a:avLst/>
-          </a:prstGeom>
-          <a:noFill/>
-        </p:spPr>
-        <p:txBody>
-          <a:bodyPr wrap="square" anchor="t" lIns="0" rIns="0" tIns="0" bIns="0">
-            <a:spAutoFit/>
-          </a:bodyPr>
-          <a:lstStyle/>
-          <a:p>
-            <a:pPr algn="l">
-              <a:lnSpc>
-                <a:spcPct val="128000"/>
-              </a:lnSpc>
-            </a:pPr>
-            <a:r>
-              <a:rPr sz="1400" b="0">
+              <a:rPr sz="1250" b="0">
                 <a:solidFill>
                   <a:srgbClr val="1C2A33"/>
                 </a:solidFill>
@@ -3981,134 +4339,7 @@
                 <a:ea typeface="楷体"/>
                 <a:cs typeface="楷体"/>
               </a:rPr>
-              <a:t>文化意识：理解辛弃疾的家国襟怀与李清照的乱世孤怀，体会宋词双峰的精神气象。</a:t>
-            </a:r>
-          </a:p>
-        </p:txBody>
-      </p:sp>
-      <p:sp>
-        <p:nvSpPr>
-          <p:cNvPr id="15" name="Rounded Rectangle 14"/>
-          <p:cNvSpPr/>
-          <p:nvPr/>
-        </p:nvSpPr>
-        <p:spPr>
-          <a:xfrm>
-            <a:off x="640080" y="3703320"/>
-            <a:ext cx="5349240" cy="2057400"/>
-          </a:xfrm>
-          <a:prstGeom prst="roundRect">
-            <a:avLst/>
-          </a:prstGeom>
-          <a:solidFill>
-            <a:srgbClr val="FFFFFF"/>
-          </a:solidFill>
-          <a:ln w="22860">
-            <a:solidFill>
-              <a:srgbClr val="B23A2A"/>
-            </a:solidFill>
-          </a:ln>
-          <a:effectLst/>
-        </p:spPr>
-        <p:style>
-          <a:lnRef idx="1">
-            <a:schemeClr val="accent1"/>
-          </a:lnRef>
-          <a:fillRef idx="3">
-            <a:schemeClr val="accent1"/>
-          </a:fillRef>
-          <a:effectRef idx="2">
-            <a:schemeClr val="accent1"/>
-          </a:effectRef>
-          <a:fontRef idx="minor">
-            <a:schemeClr val="lt1"/>
-          </a:fontRef>
-        </p:style>
-        <p:txBody>
-          <a:bodyPr rtlCol="0" anchor="ctr"/>
-          <a:lstStyle/>
-          <a:p>
-            <a:pPr algn="ctr"/>
-          </a:p>
-        </p:txBody>
-      </p:sp>
-      <p:sp>
-        <p:nvSpPr>
-          <p:cNvPr id="16" name="Oval 15"/>
-          <p:cNvSpPr/>
-          <p:nvPr/>
-        </p:nvSpPr>
-        <p:spPr>
-          <a:xfrm>
-            <a:off x="804672" y="3867912"/>
-            <a:ext cx="457200" cy="457200"/>
-          </a:xfrm>
-          <a:prstGeom prst="ellipse">
-            <a:avLst/>
-          </a:prstGeom>
-          <a:solidFill>
-            <a:srgbClr val="B23A2A"/>
-          </a:solidFill>
-          <a:ln>
-            <a:noFill/>
-          </a:ln>
-          <a:effectLst/>
-        </p:spPr>
-        <p:style>
-          <a:lnRef idx="1">
-            <a:schemeClr val="accent1"/>
-          </a:lnRef>
-          <a:fillRef idx="3">
-            <a:schemeClr val="accent1"/>
-          </a:fillRef>
-          <a:effectRef idx="2">
-            <a:schemeClr val="accent1"/>
-          </a:effectRef>
-          <a:fontRef idx="minor">
-            <a:schemeClr val="lt1"/>
-          </a:fontRef>
-        </p:style>
-        <p:txBody>
-          <a:bodyPr rtlCol="0" anchor="ctr"/>
-          <a:lstStyle/>
-          <a:p>
-            <a:pPr algn="ctr"/>
-          </a:p>
-        </p:txBody>
-      </p:sp>
-      <p:sp>
-        <p:nvSpPr>
-          <p:cNvPr id="17" name="TextBox 16"/>
-          <p:cNvSpPr txBox="1"/>
-          <p:nvPr/>
-        </p:nvSpPr>
-        <p:spPr>
-          <a:xfrm>
-            <a:off x="804672" y="3922776"/>
-            <a:ext cx="457200" cy="384048"/>
-          </a:xfrm>
-          <a:prstGeom prst="rect">
-            <a:avLst/>
-          </a:prstGeom>
-          <a:noFill/>
-        </p:spPr>
-        <p:txBody>
-          <a:bodyPr wrap="square" anchor="t" lIns="0" rIns="0" tIns="0" bIns="0">
-            <a:spAutoFit/>
-          </a:bodyPr>
-          <a:lstStyle/>
-          <a:p>
-            <a:pPr algn="ctr"/>
-            <a:r>
-              <a:rPr sz="1600" b="1">
-                <a:solidFill>
-                  <a:srgbClr val="FFFFFF"/>
-                </a:solidFill>
-                <a:latin typeface="微软雅黑"/>
-                <a:ea typeface="微软雅黑"/>
-                <a:cs typeface="微软雅黑"/>
-              </a:rPr>
-              <a:t>3</a:t>
+              <a:t>掌握「知人论世+抓典故/叠字→辨风格」的词作读法。</a:t>
             </a:r>
           </a:p>
         </p:txBody>
@@ -4116,297 +4347,6 @@
       <p:sp>
         <p:nvSpPr>
           <p:cNvPr id="18" name="TextBox 17"/>
-          <p:cNvSpPr txBox="1"/>
-          <p:nvPr/>
-        </p:nvSpPr>
-        <p:spPr>
-          <a:xfrm>
-            <a:off x="1371600" y="3813048"/>
-            <a:ext cx="4434840" cy="457200"/>
-          </a:xfrm>
-          <a:prstGeom prst="rect">
-            <a:avLst/>
-          </a:prstGeom>
-          <a:noFill/>
-        </p:spPr>
-        <p:txBody>
-          <a:bodyPr wrap="square" anchor="t" lIns="0" rIns="0" tIns="0" bIns="0">
-            <a:spAutoFit/>
-          </a:bodyPr>
-          <a:lstStyle/>
-          <a:p>
-            <a:pPr algn="l">
-              <a:lnSpc>
-                <a:spcPct val="110000"/>
-              </a:lnSpc>
-            </a:pPr>
-            <a:r>
-              <a:rPr sz="1600" b="1">
-                <a:solidFill>
-                  <a:srgbClr val="1C2A33"/>
-                </a:solidFill>
-                <a:latin typeface="微软雅黑"/>
-                <a:ea typeface="微软雅黑"/>
-                <a:cs typeface="微软雅黑"/>
-              </a:rPr>
-              <a:t>目标</a:t>
-            </a:r>
-          </a:p>
-        </p:txBody>
-      </p:sp>
-      <p:sp>
-        <p:nvSpPr>
-          <p:cNvPr id="19" name="TextBox 18"/>
-          <p:cNvSpPr txBox="1"/>
-          <p:nvPr/>
-        </p:nvSpPr>
-        <p:spPr>
-          <a:xfrm>
-            <a:off x="1371600" y="4251960"/>
-            <a:ext cx="4434840" cy="1417320"/>
-          </a:xfrm>
-          <a:prstGeom prst="rect">
-            <a:avLst/>
-          </a:prstGeom>
-          <a:noFill/>
-        </p:spPr>
-        <p:txBody>
-          <a:bodyPr wrap="square" anchor="t" lIns="0" rIns="0" tIns="0" bIns="0">
-            <a:spAutoFit/>
-          </a:bodyPr>
-          <a:lstStyle/>
-          <a:p>
-            <a:pPr algn="l">
-              <a:lnSpc>
-                <a:spcPct val="128000"/>
-              </a:lnSpc>
-            </a:pPr>
-            <a:r>
-              <a:rPr sz="1400" b="0">
-                <a:solidFill>
-                  <a:srgbClr val="1C2A33"/>
-                </a:solidFill>
-                <a:latin typeface="楷体"/>
-                <a:ea typeface="楷体"/>
-                <a:cs typeface="楷体"/>
-              </a:rPr>
-              <a:t>思维品质：通过比较豪放与婉约，培养避免二元对立、看见风格交融的辩证思维。</a:t>
-            </a:r>
-          </a:p>
-        </p:txBody>
-      </p:sp>
-      <p:sp>
-        <p:nvSpPr>
-          <p:cNvPr id="20" name="Rounded Rectangle 19"/>
-          <p:cNvSpPr/>
-          <p:nvPr/>
-        </p:nvSpPr>
-        <p:spPr>
-          <a:xfrm>
-            <a:off x="6263640" y="3703320"/>
-            <a:ext cx="5349240" cy="2057400"/>
-          </a:xfrm>
-          <a:prstGeom prst="roundRect">
-            <a:avLst/>
-          </a:prstGeom>
-          <a:solidFill>
-            <a:srgbClr val="FFFFFF"/>
-          </a:solidFill>
-          <a:ln w="22860">
-            <a:solidFill>
-              <a:srgbClr val="B23A2A"/>
-            </a:solidFill>
-          </a:ln>
-          <a:effectLst/>
-        </p:spPr>
-        <p:style>
-          <a:lnRef idx="1">
-            <a:schemeClr val="accent1"/>
-          </a:lnRef>
-          <a:fillRef idx="3">
-            <a:schemeClr val="accent1"/>
-          </a:fillRef>
-          <a:effectRef idx="2">
-            <a:schemeClr val="accent1"/>
-          </a:effectRef>
-          <a:fontRef idx="minor">
-            <a:schemeClr val="lt1"/>
-          </a:fontRef>
-        </p:style>
-        <p:txBody>
-          <a:bodyPr rtlCol="0" anchor="ctr"/>
-          <a:lstStyle/>
-          <a:p>
-            <a:pPr algn="ctr"/>
-          </a:p>
-        </p:txBody>
-      </p:sp>
-      <p:sp>
-        <p:nvSpPr>
-          <p:cNvPr id="21" name="Oval 20"/>
-          <p:cNvSpPr/>
-          <p:nvPr/>
-        </p:nvSpPr>
-        <p:spPr>
-          <a:xfrm>
-            <a:off x="6428232" y="3867912"/>
-            <a:ext cx="457200" cy="457200"/>
-          </a:xfrm>
-          <a:prstGeom prst="ellipse">
-            <a:avLst/>
-          </a:prstGeom>
-          <a:solidFill>
-            <a:srgbClr val="B23A2A"/>
-          </a:solidFill>
-          <a:ln>
-            <a:noFill/>
-          </a:ln>
-          <a:effectLst/>
-        </p:spPr>
-        <p:style>
-          <a:lnRef idx="1">
-            <a:schemeClr val="accent1"/>
-          </a:lnRef>
-          <a:fillRef idx="3">
-            <a:schemeClr val="accent1"/>
-          </a:fillRef>
-          <a:effectRef idx="2">
-            <a:schemeClr val="accent1"/>
-          </a:effectRef>
-          <a:fontRef idx="minor">
-            <a:schemeClr val="lt1"/>
-          </a:fontRef>
-        </p:style>
-        <p:txBody>
-          <a:bodyPr rtlCol="0" anchor="ctr"/>
-          <a:lstStyle/>
-          <a:p>
-            <a:pPr algn="ctr"/>
-          </a:p>
-        </p:txBody>
-      </p:sp>
-      <p:sp>
-        <p:nvSpPr>
-          <p:cNvPr id="22" name="TextBox 21"/>
-          <p:cNvSpPr txBox="1"/>
-          <p:nvPr/>
-        </p:nvSpPr>
-        <p:spPr>
-          <a:xfrm>
-            <a:off x="6428232" y="3922776"/>
-            <a:ext cx="457200" cy="384048"/>
-          </a:xfrm>
-          <a:prstGeom prst="rect">
-            <a:avLst/>
-          </a:prstGeom>
-          <a:noFill/>
-        </p:spPr>
-        <p:txBody>
-          <a:bodyPr wrap="square" anchor="t" lIns="0" rIns="0" tIns="0" bIns="0">
-            <a:spAutoFit/>
-          </a:bodyPr>
-          <a:lstStyle/>
-          <a:p>
-            <a:pPr algn="ctr"/>
-            <a:r>
-              <a:rPr sz="1600" b="1">
-                <a:solidFill>
-                  <a:srgbClr val="FFFFFF"/>
-                </a:solidFill>
-                <a:latin typeface="微软雅黑"/>
-                <a:ea typeface="微软雅黑"/>
-                <a:cs typeface="微软雅黑"/>
-              </a:rPr>
-              <a:t>4</a:t>
-            </a:r>
-          </a:p>
-        </p:txBody>
-      </p:sp>
-      <p:sp>
-        <p:nvSpPr>
-          <p:cNvPr id="23" name="TextBox 22"/>
-          <p:cNvSpPr txBox="1"/>
-          <p:nvPr/>
-        </p:nvSpPr>
-        <p:spPr>
-          <a:xfrm>
-            <a:off x="6995160" y="3813048"/>
-            <a:ext cx="4434840" cy="457200"/>
-          </a:xfrm>
-          <a:prstGeom prst="rect">
-            <a:avLst/>
-          </a:prstGeom>
-          <a:noFill/>
-        </p:spPr>
-        <p:txBody>
-          <a:bodyPr wrap="square" anchor="t" lIns="0" rIns="0" tIns="0" bIns="0">
-            <a:spAutoFit/>
-          </a:bodyPr>
-          <a:lstStyle/>
-          <a:p>
-            <a:pPr algn="l">
-              <a:lnSpc>
-                <a:spcPct val="110000"/>
-              </a:lnSpc>
-            </a:pPr>
-            <a:r>
-              <a:rPr sz="1600" b="1">
-                <a:solidFill>
-                  <a:srgbClr val="1C2A33"/>
-                </a:solidFill>
-                <a:latin typeface="微软雅黑"/>
-                <a:ea typeface="微软雅黑"/>
-                <a:cs typeface="微软雅黑"/>
-              </a:rPr>
-              <a:t>目标</a:t>
-            </a:r>
-          </a:p>
-        </p:txBody>
-      </p:sp>
-      <p:sp>
-        <p:nvSpPr>
-          <p:cNvPr id="24" name="TextBox 23"/>
-          <p:cNvSpPr txBox="1"/>
-          <p:nvPr/>
-        </p:nvSpPr>
-        <p:spPr>
-          <a:xfrm>
-            <a:off x="6995160" y="4251960"/>
-            <a:ext cx="4434840" cy="1417320"/>
-          </a:xfrm>
-          <a:prstGeom prst="rect">
-            <a:avLst/>
-          </a:prstGeom>
-          <a:noFill/>
-        </p:spPr>
-        <p:txBody>
-          <a:bodyPr wrap="square" anchor="t" lIns="0" rIns="0" tIns="0" bIns="0">
-            <a:spAutoFit/>
-          </a:bodyPr>
-          <a:lstStyle/>
-          <a:p>
-            <a:pPr algn="l">
-              <a:lnSpc>
-                <a:spcPct val="128000"/>
-              </a:lnSpc>
-            </a:pPr>
-            <a:r>
-              <a:rPr sz="1400" b="0">
-                <a:solidFill>
-                  <a:srgbClr val="1C2A33"/>
-                </a:solidFill>
-                <a:latin typeface="楷体"/>
-                <a:ea typeface="楷体"/>
-                <a:cs typeface="楷体"/>
-              </a:rPr>
-              <a:t>学习能力：掌握「知人论世+抓典故/叠字→辨风格」的词作读法。</a:t>
-            </a:r>
-          </a:p>
-        </p:txBody>
-      </p:sp>
-      <p:sp>
-        <p:nvSpPr>
-          <p:cNvPr id="25" name="TextBox 24"/>
           <p:cNvSpPr txBox="1"/>
           <p:nvPr/>
         </p:nvSpPr>
@@ -4533,13 +4473,13 @@
             <a:r>
               <a:rPr sz="1300" b="1">
                 <a:solidFill>
-                  <a:srgbClr val="2E7D6B"/>
+                  <a:srgbClr val="B23A2A"/>
                 </a:solidFill>
                 <a:latin typeface="微软雅黑"/>
                 <a:ea typeface="微软雅黑"/>
                 <a:cs typeface="微软雅黑"/>
               </a:rPr>
-              <a:t>课文背景</a:t>
+              <a:t>背景 · 权威调研</a:t>
             </a:r>
           </a:p>
         </p:txBody>
@@ -4559,7 +4499,7 @@
             <a:avLst/>
           </a:prstGeom>
           <a:solidFill>
-            <a:srgbClr val="2E7D6B"/>
+            <a:srgbClr val="B23A2A"/>
           </a:solidFill>
           <a:ln>
             <a:noFill/>
@@ -4596,8 +4536,52 @@
         </p:nvSpPr>
         <p:spPr>
           <a:xfrm>
-            <a:off x="640080" y="1508760"/>
-            <a:ext cx="6766560" cy="4572000"/>
+            <a:off x="640080" y="1325880"/>
+            <a:ext cx="10911535" cy="548640"/>
+          </a:xfrm>
+          <a:prstGeom prst="rect">
+            <a:avLst/>
+          </a:prstGeom>
+          <a:noFill/>
+        </p:spPr>
+        <p:txBody>
+          <a:bodyPr wrap="square" anchor="t" lIns="0" rIns="0" tIns="0" bIns="0">
+            <a:spAutoFit/>
+          </a:bodyPr>
+          <a:lstStyle/>
+          <a:p>
+            <a:pPr algn="l">
+              <a:lnSpc>
+                <a:spcPct val="145000"/>
+              </a:lnSpc>
+              <a:spcAft>
+                <a:spcPts val="400"/>
+              </a:spcAft>
+            </a:pPr>
+            <a:r>
+              <a:rPr sz="2600" b="1">
+                <a:solidFill>
+                  <a:srgbClr val="1C2A33"/>
+                </a:solidFill>
+                <a:latin typeface="楷体"/>
+                <a:ea typeface="楷体"/>
+                <a:cs typeface="楷体"/>
+              </a:rPr>
+              <a:t>课文定位与资料来源</a:t>
+            </a:r>
+          </a:p>
+        </p:txBody>
+      </p:sp>
+      <p:sp>
+        <p:nvSpPr>
+          <p:cNvPr id="6" name="TextBox 5"/>
+          <p:cNvSpPr txBox="1"/>
+          <p:nvPr/>
+        </p:nvSpPr>
+        <p:spPr>
+          <a:xfrm>
+            <a:off x="640080" y="2011680"/>
+            <a:ext cx="5227167" cy="4480560"/>
           </a:xfrm>
           <a:prstGeom prst="rect">
             <a:avLst/>
@@ -4615,11 +4599,11 @@
                 <a:spcPct val="150000"/>
               </a:lnSpc>
               <a:spcAft>
-                <a:spcPts val="600"/>
+                <a:spcPts val="800"/>
               </a:spcAft>
             </a:pPr>
             <a:r>
-              <a:rPr sz="1600" b="0">
+              <a:rPr sz="1300" b="0">
                 <a:solidFill>
                   <a:srgbClr val="1C2A33"/>
                 </a:solidFill>
@@ -4627,46 +4611,104 @@
                 <a:ea typeface="楷体"/>
                 <a:cs typeface="楷体"/>
               </a:rPr>
-              <a:t>本课群文阅读辛弃疾《永遇乐·京口北固亭怀古》与李清照《声声慢》。辛词写于镇江知府任上，借京口历史人物（孙权、刘裕、刘义隆、拓跋焘、廉颇）讽谏南宋草率北伐，慷慨悲凉，属豪放词；李词写于南渡后孤寂晚年，「寻寻觅觅，冷冷清清」起笔，叠字七组写尽凄苦，属婉约词。两词一豪放一婉约，一家国一自我，构成宋词双峰对话，适合作者身份、题材、风格的群文比较。</a:t>
-            </a:r>
-          </a:p>
-        </p:txBody>
-      </p:sp>
-      <p:pic>
-        <p:nvPicPr>
-          <p:cNvPr id="6" name="Picture 5" descr="typewriter.jpg"/>
-          <p:cNvPicPr>
-            <a:picLocks noChangeAspect="1"/>
-          </p:cNvPicPr>
-          <p:nvPr/>
-        </p:nvPicPr>
-        <p:blipFill>
-          <a:blip r:embed="rId2"/>
-          <a:srcRect l="5860" r="5860"/>
-          <a:stretch>
-            <a:fillRect/>
-          </a:stretch>
-        </p:blipFill>
-        <p:spPr>
-          <a:xfrm>
-            <a:off x="8046720" y="1508760"/>
-            <a:ext cx="4114800" cy="3108960"/>
-          </a:xfrm>
-          <a:prstGeom prst="rect">
-            <a:avLst/>
-          </a:prstGeom>
-        </p:spPr>
-      </p:pic>
-      <p:sp>
-        <p:nvSpPr>
-          <p:cNvPr id="7" name="TextBox 6"/>
+              <a:t>本课群文阅读辛弃疾《永遇乐·京口北固亭怀古》与李清照《声声慢》。</a:t>
+            </a:r>
+          </a:p>
+          <a:p>
+            <a:pPr algn="l">
+              <a:lnSpc>
+                <a:spcPct val="150000"/>
+              </a:lnSpc>
+              <a:spcAft>
+                <a:spcPts val="800"/>
+              </a:spcAft>
+            </a:pPr>
+            <a:r>
+              <a:rPr sz="1300" b="0">
+                <a:solidFill>
+                  <a:srgbClr val="1C2A33"/>
+                </a:solidFill>
+                <a:latin typeface="楷体"/>
+                <a:ea typeface="楷体"/>
+                <a:cs typeface="楷体"/>
+              </a:rPr>
+              <a:t>辛词写于镇江知府任上，借京口历史人物（孙权、刘裕、刘义隆、拓跋焘、廉颇）讽谏南宋草率北伐，慷慨悲凉，属豪放词；李词写于南渡后孤寂晚年，「寻寻觅觅，冷冷清清」起笔，叠字七组写尽凄苦，属婉约词。</a:t>
+            </a:r>
+          </a:p>
+          <a:p>
+            <a:pPr algn="l">
+              <a:lnSpc>
+                <a:spcPct val="150000"/>
+              </a:lnSpc>
+              <a:spcAft>
+                <a:spcPts val="800"/>
+              </a:spcAft>
+            </a:pPr>
+            <a:r>
+              <a:rPr sz="1300" b="0">
+                <a:solidFill>
+                  <a:srgbClr val="1C2A33"/>
+                </a:solidFill>
+                <a:latin typeface="楷体"/>
+                <a:ea typeface="楷体"/>
+                <a:cs typeface="楷体"/>
+              </a:rPr>
+              <a:t>两词一豪放一婉约，一家国一自我，构成宋词双峰对话，适合作者身份、题材、风格的群文比较。</a:t>
+            </a:r>
+          </a:p>
+        </p:txBody>
+      </p:sp>
+      <p:sp>
+        <p:nvSpPr>
+          <p:cNvPr id="7" name="Rounded Rectangle 6"/>
+          <p:cNvSpPr/>
+          <p:nvPr/>
+        </p:nvSpPr>
+        <p:spPr>
+          <a:xfrm>
+            <a:off x="6324447" y="2011680"/>
+            <a:ext cx="5227167" cy="4480560"/>
+          </a:xfrm>
+          <a:prstGeom prst="roundRect">
+            <a:avLst/>
+          </a:prstGeom>
+          <a:solidFill>
+            <a:srgbClr val="1C2A33"/>
+          </a:solidFill>
+          <a:effectLst/>
+        </p:spPr>
+        <p:style>
+          <a:lnRef idx="1">
+            <a:schemeClr val="accent1"/>
+          </a:lnRef>
+          <a:fillRef idx="3">
+            <a:schemeClr val="accent1"/>
+          </a:fillRef>
+          <a:effectRef idx="2">
+            <a:schemeClr val="accent1"/>
+          </a:effectRef>
+          <a:fontRef idx="minor">
+            <a:schemeClr val="lt1"/>
+          </a:fontRef>
+        </p:style>
+        <p:txBody>
+          <a:bodyPr rtlCol="0" anchor="ctr"/>
+          <a:lstStyle/>
+          <a:p>
+            <a:pPr algn="ctr"/>
+          </a:p>
+        </p:txBody>
+      </p:sp>
+      <p:sp>
+        <p:nvSpPr>
+          <p:cNvPr id="8" name="TextBox 7"/>
           <p:cNvSpPr txBox="1"/>
           <p:nvPr/>
         </p:nvSpPr>
         <p:spPr>
           <a:xfrm>
-            <a:off x="8046720" y="4663440"/>
-            <a:ext cx="4114800" cy="365760"/>
+            <a:off x="6598767" y="2194560"/>
+            <a:ext cx="4678527" cy="457200"/>
           </a:xfrm>
           <a:prstGeom prst="rect">
             <a:avLst/>
@@ -4679,24 +4721,140 @@
           </a:bodyPr>
           <a:lstStyle/>
           <a:p>
-            <a:pPr algn="ctr"/>
-            <a:r>
-              <a:rPr sz="1100" b="0">
-                <a:solidFill>
-                  <a:srgbClr val="6B6258"/>
+            <a:pPr algn="l">
+              <a:lnSpc>
+                <a:spcPct val="145000"/>
+              </a:lnSpc>
+              <a:spcAft>
+                <a:spcPts val="400"/>
+              </a:spcAft>
+            </a:pPr>
+            <a:r>
+              <a:rPr sz="1500" b="1">
+                <a:solidFill>
+                  <a:srgbClr val="C8A86B"/>
+                </a:solidFill>
+                <a:latin typeface="楷体"/>
+                <a:ea typeface="楷体"/>
+                <a:cs typeface="楷体"/>
+              </a:rPr>
+              <a:t>资料来源（WebSearch 核实）</a:t>
+            </a:r>
+          </a:p>
+        </p:txBody>
+      </p:sp>
+      <p:sp>
+        <p:nvSpPr>
+          <p:cNvPr id="9" name="TextBox 8"/>
+          <p:cNvSpPr txBox="1"/>
+          <p:nvPr/>
+        </p:nvSpPr>
+        <p:spPr>
+          <a:xfrm>
+            <a:off x="6598767" y="2697480"/>
+            <a:ext cx="4678527" cy="2743200"/>
+          </a:xfrm>
+          <a:prstGeom prst="rect">
+            <a:avLst/>
+          </a:prstGeom>
+          <a:noFill/>
+        </p:spPr>
+        <p:txBody>
+          <a:bodyPr wrap="square" anchor="t" lIns="0" rIns="0" tIns="0" bIns="0">
+            <a:spAutoFit/>
+          </a:bodyPr>
+          <a:lstStyle/>
+          <a:p>
+            <a:pPr algn="l">
+              <a:lnSpc>
+                <a:spcPct val="140000"/>
+              </a:lnSpc>
+              <a:spcAft>
+                <a:spcPts val="900"/>
+              </a:spcAft>
+            </a:pPr>
+            <a:r>
+              <a:rPr sz="1250" b="0">
+                <a:solidFill>
+                  <a:srgbClr val="FFFFFF"/>
+                </a:solidFill>
+                <a:latin typeface="楷体"/>
+                <a:ea typeface="楷体"/>
+                <a:cs typeface="楷体"/>
+              </a:rPr>
+              <a:t>· 21世纪教育网《永遇乐》《声声慢》联读（zy.21cnjy.com/17860108）</a:t>
+            </a:r>
+          </a:p>
+          <a:p>
+            <a:pPr algn="l">
+              <a:lnSpc>
+                <a:spcPct val="140000"/>
+              </a:lnSpc>
+              <a:spcAft>
+                <a:spcPts val="900"/>
+              </a:spcAft>
+            </a:pPr>
+            <a:r>
+              <a:rPr sz="1250" b="0">
+                <a:solidFill>
+                  <a:srgbClr val="FFFFFF"/>
+                </a:solidFill>
+                <a:latin typeface="楷体"/>
+                <a:ea typeface="楷体"/>
+                <a:cs typeface="楷体"/>
+              </a:rPr>
+              <a:t>· 张綖《诗余图谱》豪放婉约之分（zxxk.com/soft/47154341）</a:t>
+            </a:r>
+          </a:p>
+        </p:txBody>
+      </p:sp>
+      <p:sp>
+        <p:nvSpPr>
+          <p:cNvPr id="10" name="TextBox 9"/>
+          <p:cNvSpPr txBox="1"/>
+          <p:nvPr/>
+        </p:nvSpPr>
+        <p:spPr>
+          <a:xfrm>
+            <a:off x="6598767" y="5715000"/>
+            <a:ext cx="4678527" cy="640080"/>
+          </a:xfrm>
+          <a:prstGeom prst="rect">
+            <a:avLst/>
+          </a:prstGeom>
+          <a:noFill/>
+        </p:spPr>
+        <p:txBody>
+          <a:bodyPr wrap="square" anchor="t" lIns="0" rIns="0" tIns="0" bIns="0">
+            <a:spAutoFit/>
+          </a:bodyPr>
+          <a:lstStyle/>
+          <a:p>
+            <a:pPr algn="l">
+              <a:lnSpc>
+                <a:spcPct val="145000"/>
+              </a:lnSpc>
+              <a:spcAft>
+                <a:spcPts val="400"/>
+              </a:spcAft>
+            </a:pPr>
+            <a:r>
+              <a:rPr sz="1200" b="0">
+                <a:solidFill>
+                  <a:srgbClr val="E7DFD2"/>
                 </a:solidFill>
                 <a:latin typeface="微软雅黑"/>
                 <a:ea typeface="微软雅黑"/>
                 <a:cs typeface="微软雅黑"/>
               </a:rPr>
-              <a:t>资料图（自由授权，复用 typewriter.jpg）</a:t>
-            </a:r>
-          </a:p>
-        </p:txBody>
-      </p:sp>
-      <p:sp>
-        <p:nvSpPr>
-          <p:cNvPr id="8" name="TextBox 7"/>
+              <a:t>本课件未使用无关配图 · 学科色块兜底</a:t>
+            </a:r>
+          </a:p>
+        </p:txBody>
+      </p:sp>
+      <p:sp>
+        <p:nvSpPr>
+          <p:cNvPr id="11" name="TextBox 10"/>
           <p:cNvSpPr txBox="1"/>
           <p:nvPr/>
         </p:nvSpPr>
@@ -4829,7 +4987,7 @@
                 <a:ea typeface="微软雅黑"/>
                 <a:cs typeface="微软雅黑"/>
               </a:rPr>
-              <a:t>学习重点</a:t>
+              <a:t>重点</a:t>
             </a:r>
           </a:p>
         </p:txBody>
@@ -4880,14 +5038,58 @@
       </p:sp>
       <p:sp>
         <p:nvSpPr>
-          <p:cNvPr id="5" name="Rounded Rectangle 4"/>
+          <p:cNvPr id="5" name="TextBox 4"/>
+          <p:cNvSpPr txBox="1"/>
+          <p:nvPr/>
+        </p:nvSpPr>
+        <p:spPr>
+          <a:xfrm>
+            <a:off x="640080" y="1325880"/>
+            <a:ext cx="10911535" cy="548640"/>
+          </a:xfrm>
+          <a:prstGeom prst="rect">
+            <a:avLst/>
+          </a:prstGeom>
+          <a:noFill/>
+        </p:spPr>
+        <p:txBody>
+          <a:bodyPr wrap="square" anchor="t" lIns="0" rIns="0" tIns="0" bIns="0">
+            <a:spAutoFit/>
+          </a:bodyPr>
+          <a:lstStyle/>
+          <a:p>
+            <a:pPr algn="l">
+              <a:lnSpc>
+                <a:spcPct val="145000"/>
+              </a:lnSpc>
+              <a:spcAft>
+                <a:spcPts val="400"/>
+              </a:spcAft>
+            </a:pPr>
+            <a:r>
+              <a:rPr sz="2600" b="1">
+                <a:solidFill>
+                  <a:srgbClr val="1C2A33"/>
+                </a:solidFill>
+                <a:latin typeface="楷体"/>
+                <a:ea typeface="楷体"/>
+                <a:cs typeface="楷体"/>
+              </a:rPr>
+              <a:t>本课重点</a:t>
+            </a:r>
+          </a:p>
+        </p:txBody>
+      </p:sp>
+      <p:sp>
+        <p:nvSpPr>
+          <p:cNvPr id="6" name="Rounded Rectangle 5"/>
           <p:cNvSpPr/>
           <p:nvPr/>
         </p:nvSpPr>
         <p:spPr>
           <a:xfrm>
-            <a:off x="640080" y="1371600"/>
-            <a:ext cx="10911535" cy="1597152"/>
+            <a:off x="640080" y="2194560"/>
+            <a:ext cx="3393338" cy="3931920"/>
           </a:xfrm>
           <a:prstGeom prst="roundRect">
             <a:avLst/>
@@ -4895,7 +5097,451 @@
           <a:solidFill>
             <a:srgbClr val="FFFFFF"/>
           </a:solidFill>
-          <a:ln w="22860">
+          <a:ln w="20320">
+            <a:solidFill>
+              <a:srgbClr val="B23A2A"/>
+            </a:solidFill>
+          </a:ln>
+          <a:effectLst/>
+        </p:spPr>
+        <p:style>
+          <a:lnRef idx="1">
+            <a:schemeClr val="accent1"/>
+          </a:lnRef>
+          <a:fillRef idx="3">
+            <a:schemeClr val="accent1"/>
+          </a:fillRef>
+          <a:effectRef idx="2">
+            <a:schemeClr val="accent1"/>
+          </a:effectRef>
+          <a:fontRef idx="minor">
+            <a:schemeClr val="lt1"/>
+          </a:fontRef>
+        </p:style>
+        <p:txBody>
+          <a:bodyPr rtlCol="0" anchor="ctr"/>
+          <a:lstStyle/>
+          <a:p>
+            <a:pPr algn="ctr"/>
+          </a:p>
+        </p:txBody>
+      </p:sp>
+      <p:sp>
+        <p:nvSpPr>
+          <p:cNvPr id="7" name="Oval 6"/>
+          <p:cNvSpPr/>
+          <p:nvPr/>
+        </p:nvSpPr>
+        <p:spPr>
+          <a:xfrm>
+            <a:off x="822960" y="2377440"/>
+            <a:ext cx="502920" cy="502920"/>
+          </a:xfrm>
+          <a:prstGeom prst="ellipse">
+            <a:avLst/>
+          </a:prstGeom>
+          <a:solidFill>
+            <a:srgbClr val="B23A2A"/>
+          </a:solidFill>
+          <a:ln>
+            <a:noFill/>
+          </a:ln>
+          <a:effectLst/>
+        </p:spPr>
+        <p:style>
+          <a:lnRef idx="1">
+            <a:schemeClr val="accent1"/>
+          </a:lnRef>
+          <a:fillRef idx="3">
+            <a:schemeClr val="accent1"/>
+          </a:fillRef>
+          <a:effectRef idx="2">
+            <a:schemeClr val="accent1"/>
+          </a:effectRef>
+          <a:fontRef idx="minor">
+            <a:schemeClr val="lt1"/>
+          </a:fontRef>
+        </p:style>
+        <p:txBody>
+          <a:bodyPr rtlCol="0" anchor="ctr"/>
+          <a:lstStyle/>
+          <a:p>
+            <a:pPr algn="ctr"/>
+          </a:p>
+        </p:txBody>
+      </p:sp>
+      <p:sp>
+        <p:nvSpPr>
+          <p:cNvPr id="8" name="TextBox 7"/>
+          <p:cNvSpPr txBox="1"/>
+          <p:nvPr/>
+        </p:nvSpPr>
+        <p:spPr>
+          <a:xfrm>
+            <a:off x="822960" y="2450592"/>
+            <a:ext cx="502920" cy="384048"/>
+          </a:xfrm>
+          <a:prstGeom prst="rect">
+            <a:avLst/>
+          </a:prstGeom>
+          <a:noFill/>
+        </p:spPr>
+        <p:txBody>
+          <a:bodyPr wrap="square" anchor="t" lIns="0" rIns="0" tIns="0" bIns="0">
+            <a:spAutoFit/>
+          </a:bodyPr>
+          <a:lstStyle/>
+          <a:p>
+            <a:pPr algn="ctr">
+              <a:lnSpc>
+                <a:spcPct val="145000"/>
+              </a:lnSpc>
+              <a:spcAft>
+                <a:spcPts val="400"/>
+              </a:spcAft>
+            </a:pPr>
+            <a:r>
+              <a:rPr sz="1800" b="1">
+                <a:solidFill>
+                  <a:srgbClr val="FFFFFF"/>
+                </a:solidFill>
+                <a:latin typeface="微软雅黑"/>
+                <a:ea typeface="微软雅黑"/>
+                <a:cs typeface="微软雅黑"/>
+              </a:rPr>
+              <a:t>①</a:t>
+            </a:r>
+          </a:p>
+        </p:txBody>
+      </p:sp>
+      <p:sp>
+        <p:nvSpPr>
+          <p:cNvPr id="9" name="TextBox 8"/>
+          <p:cNvSpPr txBox="1"/>
+          <p:nvPr/>
+        </p:nvSpPr>
+        <p:spPr>
+          <a:xfrm>
+            <a:off x="1508760" y="2395728"/>
+            <a:ext cx="2296058" cy="822960"/>
+          </a:xfrm>
+          <a:prstGeom prst="rect">
+            <a:avLst/>
+          </a:prstGeom>
+          <a:noFill/>
+        </p:spPr>
+        <p:txBody>
+          <a:bodyPr wrap="square" anchor="t" lIns="0" rIns="0" tIns="0" bIns="0">
+            <a:spAutoFit/>
+          </a:bodyPr>
+          <a:lstStyle/>
+          <a:p>
+            <a:pPr algn="l">
+              <a:lnSpc>
+                <a:spcPct val="130000"/>
+              </a:lnSpc>
+              <a:spcAft>
+                <a:spcPts val="400"/>
+              </a:spcAft>
+            </a:pPr>
+            <a:r>
+              <a:rPr sz="1600" b="1">
+                <a:solidFill>
+                  <a:srgbClr val="B23A2A"/>
+                </a:solidFill>
+                <a:latin typeface="微软雅黑"/>
+                <a:ea typeface="微软雅黑"/>
+                <a:cs typeface="微软雅黑"/>
+              </a:rPr>
+              <a:t>《永遇乐》五典</a:t>
+            </a:r>
+          </a:p>
+        </p:txBody>
+      </p:sp>
+      <p:sp>
+        <p:nvSpPr>
+          <p:cNvPr id="10" name="TextBox 9"/>
+          <p:cNvSpPr txBox="1"/>
+          <p:nvPr/>
+        </p:nvSpPr>
+        <p:spPr>
+          <a:xfrm>
+            <a:off x="868680" y="3154680"/>
+            <a:ext cx="2936138" cy="2788920"/>
+          </a:xfrm>
+          <a:prstGeom prst="rect">
+            <a:avLst/>
+          </a:prstGeom>
+          <a:noFill/>
+        </p:spPr>
+        <p:txBody>
+          <a:bodyPr wrap="square" anchor="t" lIns="0" rIns="0" tIns="0" bIns="0">
+            <a:spAutoFit/>
+          </a:bodyPr>
+          <a:lstStyle/>
+          <a:p>
+            <a:pPr algn="l">
+              <a:lnSpc>
+                <a:spcPct val="145000"/>
+              </a:lnSpc>
+              <a:spcAft>
+                <a:spcPts val="400"/>
+              </a:spcAft>
+            </a:pPr>
+            <a:r>
+              <a:rPr sz="1350" b="0">
+                <a:solidFill>
+                  <a:srgbClr val="1C2A33"/>
+                </a:solidFill>
+                <a:latin typeface="楷体"/>
+                <a:ea typeface="楷体"/>
+                <a:cs typeface="楷体"/>
+              </a:rPr>
+              <a:t>孙权（英雄）、刘裕（北伐功业）、刘义隆（草率败北）、拓跋焘（敌踪）、廉颇（老当益壮）——借古讽今。</a:t>
+            </a:r>
+          </a:p>
+        </p:txBody>
+      </p:sp>
+      <p:sp>
+        <p:nvSpPr>
+          <p:cNvPr id="11" name="Rounded Rectangle 10"/>
+          <p:cNvSpPr/>
+          <p:nvPr/>
+        </p:nvSpPr>
+        <p:spPr>
+          <a:xfrm>
+            <a:off x="4399178" y="2194560"/>
+            <a:ext cx="3393338" cy="3931920"/>
+          </a:xfrm>
+          <a:prstGeom prst="roundRect">
+            <a:avLst/>
+          </a:prstGeom>
+          <a:solidFill>
+            <a:srgbClr val="FFFFFF"/>
+          </a:solidFill>
+          <a:ln w="20320">
+            <a:solidFill>
+              <a:srgbClr val="2E7D6B"/>
+            </a:solidFill>
+          </a:ln>
+          <a:effectLst/>
+        </p:spPr>
+        <p:style>
+          <a:lnRef idx="1">
+            <a:schemeClr val="accent1"/>
+          </a:lnRef>
+          <a:fillRef idx="3">
+            <a:schemeClr val="accent1"/>
+          </a:fillRef>
+          <a:effectRef idx="2">
+            <a:schemeClr val="accent1"/>
+          </a:effectRef>
+          <a:fontRef idx="minor">
+            <a:schemeClr val="lt1"/>
+          </a:fontRef>
+        </p:style>
+        <p:txBody>
+          <a:bodyPr rtlCol="0" anchor="ctr"/>
+          <a:lstStyle/>
+          <a:p>
+            <a:pPr algn="ctr"/>
+          </a:p>
+        </p:txBody>
+      </p:sp>
+      <p:sp>
+        <p:nvSpPr>
+          <p:cNvPr id="12" name="Oval 11"/>
+          <p:cNvSpPr/>
+          <p:nvPr/>
+        </p:nvSpPr>
+        <p:spPr>
+          <a:xfrm>
+            <a:off x="4582058" y="2377440"/>
+            <a:ext cx="502920" cy="502920"/>
+          </a:xfrm>
+          <a:prstGeom prst="ellipse">
+            <a:avLst/>
+          </a:prstGeom>
+          <a:solidFill>
+            <a:srgbClr val="2E7D6B"/>
+          </a:solidFill>
+          <a:ln>
+            <a:noFill/>
+          </a:ln>
+          <a:effectLst/>
+        </p:spPr>
+        <p:style>
+          <a:lnRef idx="1">
+            <a:schemeClr val="accent1"/>
+          </a:lnRef>
+          <a:fillRef idx="3">
+            <a:schemeClr val="accent1"/>
+          </a:fillRef>
+          <a:effectRef idx="2">
+            <a:schemeClr val="accent1"/>
+          </a:effectRef>
+          <a:fontRef idx="minor">
+            <a:schemeClr val="lt1"/>
+          </a:fontRef>
+        </p:style>
+        <p:txBody>
+          <a:bodyPr rtlCol="0" anchor="ctr"/>
+          <a:lstStyle/>
+          <a:p>
+            <a:pPr algn="ctr"/>
+          </a:p>
+        </p:txBody>
+      </p:sp>
+      <p:sp>
+        <p:nvSpPr>
+          <p:cNvPr id="13" name="TextBox 12"/>
+          <p:cNvSpPr txBox="1"/>
+          <p:nvPr/>
+        </p:nvSpPr>
+        <p:spPr>
+          <a:xfrm>
+            <a:off x="4582058" y="2450592"/>
+            <a:ext cx="502920" cy="384048"/>
+          </a:xfrm>
+          <a:prstGeom prst="rect">
+            <a:avLst/>
+          </a:prstGeom>
+          <a:noFill/>
+        </p:spPr>
+        <p:txBody>
+          <a:bodyPr wrap="square" anchor="t" lIns="0" rIns="0" tIns="0" bIns="0">
+            <a:spAutoFit/>
+          </a:bodyPr>
+          <a:lstStyle/>
+          <a:p>
+            <a:pPr algn="ctr">
+              <a:lnSpc>
+                <a:spcPct val="145000"/>
+              </a:lnSpc>
+              <a:spcAft>
+                <a:spcPts val="400"/>
+              </a:spcAft>
+            </a:pPr>
+            <a:r>
+              <a:rPr sz="1800" b="1">
+                <a:solidFill>
+                  <a:srgbClr val="FFFFFF"/>
+                </a:solidFill>
+                <a:latin typeface="微软雅黑"/>
+                <a:ea typeface="微软雅黑"/>
+                <a:cs typeface="微软雅黑"/>
+              </a:rPr>
+              <a:t>②</a:t>
+            </a:r>
+          </a:p>
+        </p:txBody>
+      </p:sp>
+      <p:sp>
+        <p:nvSpPr>
+          <p:cNvPr id="14" name="TextBox 13"/>
+          <p:cNvSpPr txBox="1"/>
+          <p:nvPr/>
+        </p:nvSpPr>
+        <p:spPr>
+          <a:xfrm>
+            <a:off x="5267858" y="2395728"/>
+            <a:ext cx="2296058" cy="822960"/>
+          </a:xfrm>
+          <a:prstGeom prst="rect">
+            <a:avLst/>
+          </a:prstGeom>
+          <a:noFill/>
+        </p:spPr>
+        <p:txBody>
+          <a:bodyPr wrap="square" anchor="t" lIns="0" rIns="0" tIns="0" bIns="0">
+            <a:spAutoFit/>
+          </a:bodyPr>
+          <a:lstStyle/>
+          <a:p>
+            <a:pPr algn="l">
+              <a:lnSpc>
+                <a:spcPct val="130000"/>
+              </a:lnSpc>
+              <a:spcAft>
+                <a:spcPts val="400"/>
+              </a:spcAft>
+            </a:pPr>
+            <a:r>
+              <a:rPr sz="1600" b="1">
+                <a:solidFill>
+                  <a:srgbClr val="2E7D6B"/>
+                </a:solidFill>
+                <a:latin typeface="微软雅黑"/>
+                <a:ea typeface="微软雅黑"/>
+                <a:cs typeface="微软雅黑"/>
+              </a:rPr>
+              <a:t>《声声慢》叠字</a:t>
+            </a:r>
+          </a:p>
+        </p:txBody>
+      </p:sp>
+      <p:sp>
+        <p:nvSpPr>
+          <p:cNvPr id="15" name="TextBox 14"/>
+          <p:cNvSpPr txBox="1"/>
+          <p:nvPr/>
+        </p:nvSpPr>
+        <p:spPr>
+          <a:xfrm>
+            <a:off x="4627778" y="3154680"/>
+            <a:ext cx="2936138" cy="2788920"/>
+          </a:xfrm>
+          <a:prstGeom prst="rect">
+            <a:avLst/>
+          </a:prstGeom>
+          <a:noFill/>
+        </p:spPr>
+        <p:txBody>
+          <a:bodyPr wrap="square" anchor="t" lIns="0" rIns="0" tIns="0" bIns="0">
+            <a:spAutoFit/>
+          </a:bodyPr>
+          <a:lstStyle/>
+          <a:p>
+            <a:pPr algn="l">
+              <a:lnSpc>
+                <a:spcPct val="145000"/>
+              </a:lnSpc>
+              <a:spcAft>
+                <a:spcPts val="400"/>
+              </a:spcAft>
+            </a:pPr>
+            <a:r>
+              <a:rPr sz="1350" b="0">
+                <a:solidFill>
+                  <a:srgbClr val="1C2A33"/>
+                </a:solidFill>
+                <a:latin typeface="楷体"/>
+                <a:ea typeface="楷体"/>
+                <a:cs typeface="楷体"/>
+              </a:rPr>
+              <a:t>寻寻觅觅/冷冷清清/凄凄惨惨戚戚——七组叠字写愁之递进。</a:t>
+            </a:r>
+          </a:p>
+        </p:txBody>
+      </p:sp>
+      <p:sp>
+        <p:nvSpPr>
+          <p:cNvPr id="16" name="Rounded Rectangle 15"/>
+          <p:cNvSpPr/>
+          <p:nvPr/>
+        </p:nvSpPr>
+        <p:spPr>
+          <a:xfrm>
+            <a:off x="8158276" y="2194560"/>
+            <a:ext cx="3393338" cy="3931920"/>
+          </a:xfrm>
+          <a:prstGeom prst="roundRect">
+            <a:avLst/>
+          </a:prstGeom>
+          <a:solidFill>
+            <a:srgbClr val="FFFFFF"/>
+          </a:solidFill>
+          <a:ln w="20320">
             <a:solidFill>
               <a:srgbClr val="C8A86B"/>
             </a:solidFill>
@@ -4926,107 +5572,23 @@
       </p:sp>
       <p:sp>
         <p:nvSpPr>
-          <p:cNvPr id="6" name="TextBox 5"/>
-          <p:cNvSpPr txBox="1"/>
-          <p:nvPr/>
-        </p:nvSpPr>
-        <p:spPr>
-          <a:xfrm>
-            <a:off x="1371600" y="1481328"/>
-            <a:ext cx="9997135" cy="457200"/>
-          </a:xfrm>
-          <a:prstGeom prst="rect">
-            <a:avLst/>
-          </a:prstGeom>
-          <a:noFill/>
-        </p:spPr>
-        <p:txBody>
-          <a:bodyPr wrap="square" anchor="t" lIns="0" rIns="0" tIns="0" bIns="0">
-            <a:spAutoFit/>
-          </a:bodyPr>
-          <a:lstStyle/>
-          <a:p>
-            <a:pPr algn="l">
-              <a:lnSpc>
-                <a:spcPct val="110000"/>
-              </a:lnSpc>
-            </a:pPr>
-            <a:r>
-              <a:rPr sz="1600" b="1">
-                <a:solidFill>
-                  <a:srgbClr val="1C2A33"/>
-                </a:solidFill>
-                <a:latin typeface="微软雅黑"/>
-                <a:ea typeface="微软雅黑"/>
-                <a:cs typeface="微软雅黑"/>
-              </a:rPr>
-              <a:t/>
-            </a:r>
-          </a:p>
-        </p:txBody>
-      </p:sp>
-      <p:sp>
-        <p:nvSpPr>
-          <p:cNvPr id="7" name="TextBox 6"/>
-          <p:cNvSpPr txBox="1"/>
-          <p:nvPr/>
-        </p:nvSpPr>
-        <p:spPr>
-          <a:xfrm>
-            <a:off x="1371600" y="1920240"/>
-            <a:ext cx="9997135" cy="957072"/>
-          </a:xfrm>
-          <a:prstGeom prst="rect">
-            <a:avLst/>
-          </a:prstGeom>
-          <a:noFill/>
-        </p:spPr>
-        <p:txBody>
-          <a:bodyPr wrap="square" anchor="t" lIns="0" rIns="0" tIns="0" bIns="0">
-            <a:spAutoFit/>
-          </a:bodyPr>
-          <a:lstStyle/>
-          <a:p>
-            <a:pPr algn="l">
-              <a:lnSpc>
-                <a:spcPct val="128000"/>
-              </a:lnSpc>
-            </a:pPr>
-            <a:r>
-              <a:rPr sz="1200" b="0">
-                <a:solidFill>
-                  <a:srgbClr val="1C2A33"/>
-                </a:solidFill>
-                <a:latin typeface="楷体"/>
-                <a:ea typeface="楷体"/>
-                <a:cs typeface="楷体"/>
-              </a:rPr>
-              <a:t>① 《永遇乐》五典：孙权（英雄）、刘裕（北伐功业）、刘义隆（草率败北）、拓跋焘（敌踪）、廉颇（老当益壮）——借古讽今。</a:t>
-            </a:r>
-          </a:p>
-        </p:txBody>
-      </p:sp>
-      <p:sp>
-        <p:nvSpPr>
-          <p:cNvPr id="8" name="Rounded Rectangle 7"/>
+          <p:cNvPr id="17" name="Oval 16"/>
           <p:cNvSpPr/>
           <p:nvPr/>
         </p:nvSpPr>
         <p:spPr>
           <a:xfrm>
-            <a:off x="640080" y="3078480"/>
-            <a:ext cx="10911535" cy="1597152"/>
-          </a:xfrm>
-          <a:prstGeom prst="roundRect">
+            <a:off x="8341156" y="2377440"/>
+            <a:ext cx="502920" cy="502920"/>
+          </a:xfrm>
+          <a:prstGeom prst="ellipse">
             <a:avLst/>
           </a:prstGeom>
           <a:solidFill>
-            <a:srgbClr val="FFFFFF"/>
+            <a:srgbClr val="C8A86B"/>
           </a:solidFill>
-          <a:ln w="22860">
-            <a:solidFill>
-              <a:srgbClr val="C8A86B"/>
-            </a:solidFill>
+          <a:ln>
+            <a:noFill/>
           </a:ln>
           <a:effectLst/>
         </p:spPr>
@@ -5054,14 +5616,14 @@
       </p:sp>
       <p:sp>
         <p:nvSpPr>
-          <p:cNvPr id="9" name="TextBox 8"/>
+          <p:cNvPr id="18" name="TextBox 17"/>
           <p:cNvSpPr txBox="1"/>
           <p:nvPr/>
         </p:nvSpPr>
         <p:spPr>
           <a:xfrm>
-            <a:off x="1371600" y="3188208"/>
-            <a:ext cx="9997135" cy="457200"/>
+            <a:off x="8341156" y="2450592"/>
+            <a:ext cx="502920" cy="384048"/>
           </a:xfrm>
           <a:prstGeom prst="rect">
             <a:avLst/>
@@ -5074,35 +5636,38 @@
           </a:bodyPr>
           <a:lstStyle/>
           <a:p>
-            <a:pPr algn="l">
+            <a:pPr algn="ctr">
               <a:lnSpc>
-                <a:spcPct val="110000"/>
+                <a:spcPct val="145000"/>
               </a:lnSpc>
+              <a:spcAft>
+                <a:spcPts val="400"/>
+              </a:spcAft>
             </a:pPr>
             <a:r>
-              <a:rPr sz="1600" b="1">
-                <a:solidFill>
-                  <a:srgbClr val="1C2A33"/>
+              <a:rPr sz="1800" b="1">
+                <a:solidFill>
+                  <a:srgbClr val="FFFFFF"/>
                 </a:solidFill>
                 <a:latin typeface="微软雅黑"/>
                 <a:ea typeface="微软雅黑"/>
                 <a:cs typeface="微软雅黑"/>
               </a:rPr>
-              <a:t/>
-            </a:r>
-          </a:p>
-        </p:txBody>
-      </p:sp>
-      <p:sp>
-        <p:nvSpPr>
-          <p:cNvPr id="10" name="TextBox 9"/>
+              <a:t>③</a:t>
+            </a:r>
+          </a:p>
+        </p:txBody>
+      </p:sp>
+      <p:sp>
+        <p:nvSpPr>
+          <p:cNvPr id="19" name="TextBox 18"/>
           <p:cNvSpPr txBox="1"/>
           <p:nvPr/>
         </p:nvSpPr>
         <p:spPr>
           <a:xfrm>
-            <a:off x="1371600" y="3627120"/>
-            <a:ext cx="9997135" cy="957072"/>
+            <a:off x="9026956" y="2395728"/>
+            <a:ext cx="2296058" cy="822960"/>
           </a:xfrm>
           <a:prstGeom prst="rect">
             <a:avLst/>
@@ -5117,11 +5682,58 @@
           <a:p>
             <a:pPr algn="l">
               <a:lnSpc>
-                <a:spcPct val="128000"/>
+                <a:spcPct val="130000"/>
               </a:lnSpc>
+              <a:spcAft>
+                <a:spcPts val="400"/>
+              </a:spcAft>
             </a:pPr>
             <a:r>
-              <a:rPr sz="1300" b="0">
+              <a:rPr sz="1600" b="1">
+                <a:solidFill>
+                  <a:srgbClr val="C8A86B"/>
+                </a:solidFill>
+                <a:latin typeface="微软雅黑"/>
+                <a:ea typeface="微软雅黑"/>
+                <a:cs typeface="微软雅黑"/>
+              </a:rPr>
+              <a:t>风格对话</a:t>
+            </a:r>
+          </a:p>
+        </p:txBody>
+      </p:sp>
+      <p:sp>
+        <p:nvSpPr>
+          <p:cNvPr id="20" name="TextBox 19"/>
+          <p:cNvSpPr txBox="1"/>
+          <p:nvPr/>
+        </p:nvSpPr>
+        <p:spPr>
+          <a:xfrm>
+            <a:off x="8386876" y="3154680"/>
+            <a:ext cx="2936138" cy="2788920"/>
+          </a:xfrm>
+          <a:prstGeom prst="rect">
+            <a:avLst/>
+          </a:prstGeom>
+          <a:noFill/>
+        </p:spPr>
+        <p:txBody>
+          <a:bodyPr wrap="square" anchor="t" lIns="0" rIns="0" tIns="0" bIns="0">
+            <a:spAutoFit/>
+          </a:bodyPr>
+          <a:lstStyle/>
+          <a:p>
+            <a:pPr algn="l">
+              <a:lnSpc>
+                <a:spcPct val="145000"/>
+              </a:lnSpc>
+              <a:spcAft>
+                <a:spcPts val="400"/>
+              </a:spcAft>
+            </a:pPr>
+            <a:r>
+              <a:rPr sz="1350" b="0">
                 <a:solidFill>
                   <a:srgbClr val="1C2A33"/>
                 </a:solidFill>
@@ -5129,142 +5741,14 @@
                 <a:ea typeface="楷体"/>
                 <a:cs typeface="楷体"/>
               </a:rPr>
-              <a:t>② 《声声慢》叠字：寻寻觅觅/冷冷清清/凄凄惨惨戚戚——七组叠字写愁之递进。</a:t>
-            </a:r>
-          </a:p>
-        </p:txBody>
-      </p:sp>
-      <p:sp>
-        <p:nvSpPr>
-          <p:cNvPr id="11" name="Rounded Rectangle 10"/>
-          <p:cNvSpPr/>
-          <p:nvPr/>
-        </p:nvSpPr>
-        <p:spPr>
-          <a:xfrm>
-            <a:off x="640080" y="4785360"/>
-            <a:ext cx="10911535" cy="1597152"/>
-          </a:xfrm>
-          <a:prstGeom prst="roundRect">
-            <a:avLst/>
-          </a:prstGeom>
-          <a:solidFill>
-            <a:srgbClr val="FFFFFF"/>
-          </a:solidFill>
-          <a:ln w="22860">
-            <a:solidFill>
-              <a:srgbClr val="C8A86B"/>
-            </a:solidFill>
-          </a:ln>
-          <a:effectLst/>
-        </p:spPr>
-        <p:style>
-          <a:lnRef idx="1">
-            <a:schemeClr val="accent1"/>
-          </a:lnRef>
-          <a:fillRef idx="3">
-            <a:schemeClr val="accent1"/>
-          </a:fillRef>
-          <a:effectRef idx="2">
-            <a:schemeClr val="accent1"/>
-          </a:effectRef>
-          <a:fontRef idx="minor">
-            <a:schemeClr val="lt1"/>
-          </a:fontRef>
-        </p:style>
-        <p:txBody>
-          <a:bodyPr rtlCol="0" anchor="ctr"/>
-          <a:lstStyle/>
-          <a:p>
-            <a:pPr algn="ctr"/>
-          </a:p>
-        </p:txBody>
-      </p:sp>
-      <p:sp>
-        <p:nvSpPr>
-          <p:cNvPr id="12" name="TextBox 11"/>
-          <p:cNvSpPr txBox="1"/>
-          <p:nvPr/>
-        </p:nvSpPr>
-        <p:spPr>
-          <a:xfrm>
-            <a:off x="1371600" y="4895088"/>
-            <a:ext cx="9997135" cy="457200"/>
-          </a:xfrm>
-          <a:prstGeom prst="rect">
-            <a:avLst/>
-          </a:prstGeom>
-          <a:noFill/>
-        </p:spPr>
-        <p:txBody>
-          <a:bodyPr wrap="square" anchor="t" lIns="0" rIns="0" tIns="0" bIns="0">
-            <a:spAutoFit/>
-          </a:bodyPr>
-          <a:lstStyle/>
-          <a:p>
-            <a:pPr algn="l">
-              <a:lnSpc>
-                <a:spcPct val="110000"/>
-              </a:lnSpc>
-            </a:pPr>
-            <a:r>
-              <a:rPr sz="1600" b="1">
-                <a:solidFill>
-                  <a:srgbClr val="1C2A33"/>
-                </a:solidFill>
-                <a:latin typeface="微软雅黑"/>
-                <a:ea typeface="微软雅黑"/>
-                <a:cs typeface="微软雅黑"/>
-              </a:rPr>
-              <a:t/>
-            </a:r>
-          </a:p>
-        </p:txBody>
-      </p:sp>
-      <p:sp>
-        <p:nvSpPr>
-          <p:cNvPr id="13" name="TextBox 12"/>
-          <p:cNvSpPr txBox="1"/>
-          <p:nvPr/>
-        </p:nvSpPr>
-        <p:spPr>
-          <a:xfrm>
-            <a:off x="1371600" y="5334000"/>
-            <a:ext cx="9997135" cy="957072"/>
-          </a:xfrm>
-          <a:prstGeom prst="rect">
-            <a:avLst/>
-          </a:prstGeom>
-          <a:noFill/>
-        </p:spPr>
-        <p:txBody>
-          <a:bodyPr wrap="square" anchor="t" lIns="0" rIns="0" tIns="0" bIns="0">
-            <a:spAutoFit/>
-          </a:bodyPr>
-          <a:lstStyle/>
-          <a:p>
-            <a:pPr algn="l">
-              <a:lnSpc>
-                <a:spcPct val="128000"/>
-              </a:lnSpc>
-            </a:pPr>
-            <a:r>
-              <a:rPr sz="1200" b="0">
-                <a:solidFill>
-                  <a:srgbClr val="1C2A33"/>
-                </a:solidFill>
-                <a:latin typeface="楷体"/>
-                <a:ea typeface="楷体"/>
-                <a:cs typeface="楷体"/>
-              </a:rPr>
-              <a:t>③ 风格对话：豪放（家国·用典·悲凉）vs婉约（自我·白描·凄婉）；但并非绝对对立。</a:t>
-            </a:r>
-          </a:p>
-        </p:txBody>
-      </p:sp>
-      <p:sp>
-        <p:nvSpPr>
-          <p:cNvPr id="14" name="TextBox 13"/>
+              <a:t>豪放（家国·用典·悲凉）vs婉约（自我·白描·凄婉）；但并非绝对对立。</a:t>
+            </a:r>
+          </a:p>
+        </p:txBody>
+      </p:sp>
+      <p:sp>
+        <p:nvSpPr>
+          <p:cNvPr id="21" name="TextBox 20"/>
           <p:cNvSpPr txBox="1"/>
           <p:nvPr/>
         </p:nvSpPr>
@@ -5391,13 +5875,13 @@
             <a:r>
               <a:rPr sz="1300" b="1">
                 <a:solidFill>
-                  <a:srgbClr val="2E7D6B"/>
+                  <a:srgbClr val="B23A2A"/>
                 </a:solidFill>
                 <a:latin typeface="微软雅黑"/>
                 <a:ea typeface="微软雅黑"/>
                 <a:cs typeface="微软雅黑"/>
               </a:rPr>
-              <a:t>学习路径</a:t>
+              <a:t>方法</a:t>
             </a:r>
           </a:p>
         </p:txBody>
@@ -5414,6 +5898,362 @@
             <a:ext cx="822960" cy="30480"/>
           </a:xfrm>
           <a:prstGeom prst="rect">
+            <a:avLst/>
+          </a:prstGeom>
+          <a:solidFill>
+            <a:srgbClr val="B23A2A"/>
+          </a:solidFill>
+          <a:ln>
+            <a:noFill/>
+          </a:ln>
+          <a:effectLst/>
+        </p:spPr>
+        <p:style>
+          <a:lnRef idx="1">
+            <a:schemeClr val="accent1"/>
+          </a:lnRef>
+          <a:fillRef idx="3">
+            <a:schemeClr val="accent1"/>
+          </a:fillRef>
+          <a:effectRef idx="2">
+            <a:schemeClr val="accent1"/>
+          </a:effectRef>
+          <a:fontRef idx="minor">
+            <a:schemeClr val="lt1"/>
+          </a:fontRef>
+        </p:style>
+        <p:txBody>
+          <a:bodyPr rtlCol="0" anchor="ctr"/>
+          <a:lstStyle/>
+          <a:p>
+            <a:pPr algn="ctr"/>
+          </a:p>
+        </p:txBody>
+      </p:sp>
+      <p:sp>
+        <p:nvSpPr>
+          <p:cNvPr id="5" name="TextBox 4"/>
+          <p:cNvSpPr txBox="1"/>
+          <p:nvPr/>
+        </p:nvSpPr>
+        <p:spPr>
+          <a:xfrm>
+            <a:off x="640080" y="1325880"/>
+            <a:ext cx="10911535" cy="548640"/>
+          </a:xfrm>
+          <a:prstGeom prst="rect">
+            <a:avLst/>
+          </a:prstGeom>
+          <a:noFill/>
+        </p:spPr>
+        <p:txBody>
+          <a:bodyPr wrap="square" anchor="t" lIns="0" rIns="0" tIns="0" bIns="0">
+            <a:spAutoFit/>
+          </a:bodyPr>
+          <a:lstStyle/>
+          <a:p>
+            <a:pPr algn="l">
+              <a:lnSpc>
+                <a:spcPct val="145000"/>
+              </a:lnSpc>
+              <a:spcAft>
+                <a:spcPts val="400"/>
+              </a:spcAft>
+            </a:pPr>
+            <a:r>
+              <a:rPr sz="2600" b="1">
+                <a:solidFill>
+                  <a:srgbClr val="1C2A33"/>
+                </a:solidFill>
+                <a:latin typeface="楷体"/>
+                <a:ea typeface="楷体"/>
+                <a:cs typeface="楷体"/>
+              </a:rPr>
+              <a:t>学习路径 · 方法</a:t>
+            </a:r>
+          </a:p>
+        </p:txBody>
+      </p:sp>
+      <p:sp>
+        <p:nvSpPr>
+          <p:cNvPr id="6" name="Rounded Rectangle 5"/>
+          <p:cNvSpPr/>
+          <p:nvPr/>
+        </p:nvSpPr>
+        <p:spPr>
+          <a:xfrm>
+            <a:off x="640080" y="2194560"/>
+            <a:ext cx="2453563" cy="3931920"/>
+          </a:xfrm>
+          <a:prstGeom prst="roundRect">
+            <a:avLst/>
+          </a:prstGeom>
+          <a:solidFill>
+            <a:srgbClr val="FFFFFF"/>
+          </a:solidFill>
+          <a:ln w="20320">
+            <a:solidFill>
+              <a:srgbClr val="B23A2A"/>
+            </a:solidFill>
+          </a:ln>
+          <a:effectLst/>
+        </p:spPr>
+        <p:style>
+          <a:lnRef idx="1">
+            <a:schemeClr val="accent1"/>
+          </a:lnRef>
+          <a:fillRef idx="3">
+            <a:schemeClr val="accent1"/>
+          </a:fillRef>
+          <a:effectRef idx="2">
+            <a:schemeClr val="accent1"/>
+          </a:effectRef>
+          <a:fontRef idx="minor">
+            <a:schemeClr val="lt1"/>
+          </a:fontRef>
+        </p:style>
+        <p:txBody>
+          <a:bodyPr rtlCol="0" anchor="ctr"/>
+          <a:lstStyle/>
+          <a:p>
+            <a:pPr algn="ctr"/>
+          </a:p>
+        </p:txBody>
+      </p:sp>
+      <p:sp>
+        <p:nvSpPr>
+          <p:cNvPr id="7" name="Oval 6"/>
+          <p:cNvSpPr/>
+          <p:nvPr/>
+        </p:nvSpPr>
+        <p:spPr>
+          <a:xfrm>
+            <a:off x="822960" y="2377440"/>
+            <a:ext cx="502920" cy="502920"/>
+          </a:xfrm>
+          <a:prstGeom prst="ellipse">
+            <a:avLst/>
+          </a:prstGeom>
+          <a:solidFill>
+            <a:srgbClr val="B23A2A"/>
+          </a:solidFill>
+          <a:ln>
+            <a:noFill/>
+          </a:ln>
+          <a:effectLst/>
+        </p:spPr>
+        <p:style>
+          <a:lnRef idx="1">
+            <a:schemeClr val="accent1"/>
+          </a:lnRef>
+          <a:fillRef idx="3">
+            <a:schemeClr val="accent1"/>
+          </a:fillRef>
+          <a:effectRef idx="2">
+            <a:schemeClr val="accent1"/>
+          </a:effectRef>
+          <a:fontRef idx="minor">
+            <a:schemeClr val="lt1"/>
+          </a:fontRef>
+        </p:style>
+        <p:txBody>
+          <a:bodyPr rtlCol="0" anchor="ctr"/>
+          <a:lstStyle/>
+          <a:p>
+            <a:pPr algn="ctr"/>
+          </a:p>
+        </p:txBody>
+      </p:sp>
+      <p:sp>
+        <p:nvSpPr>
+          <p:cNvPr id="8" name="TextBox 7"/>
+          <p:cNvSpPr txBox="1"/>
+          <p:nvPr/>
+        </p:nvSpPr>
+        <p:spPr>
+          <a:xfrm>
+            <a:off x="822960" y="2450592"/>
+            <a:ext cx="502920" cy="384048"/>
+          </a:xfrm>
+          <a:prstGeom prst="rect">
+            <a:avLst/>
+          </a:prstGeom>
+          <a:noFill/>
+        </p:spPr>
+        <p:txBody>
+          <a:bodyPr wrap="square" anchor="t" lIns="0" rIns="0" tIns="0" bIns="0">
+            <a:spAutoFit/>
+          </a:bodyPr>
+          <a:lstStyle/>
+          <a:p>
+            <a:pPr algn="ctr">
+              <a:lnSpc>
+                <a:spcPct val="145000"/>
+              </a:lnSpc>
+              <a:spcAft>
+                <a:spcPts val="400"/>
+              </a:spcAft>
+            </a:pPr>
+            <a:r>
+              <a:rPr sz="1800" b="1">
+                <a:solidFill>
+                  <a:srgbClr val="FFFFFF"/>
+                </a:solidFill>
+                <a:latin typeface="微软雅黑"/>
+                <a:ea typeface="微软雅黑"/>
+                <a:cs typeface="微软雅黑"/>
+              </a:rPr>
+              <a:t>①</a:t>
+            </a:r>
+          </a:p>
+        </p:txBody>
+      </p:sp>
+      <p:sp>
+        <p:nvSpPr>
+          <p:cNvPr id="9" name="TextBox 8"/>
+          <p:cNvSpPr txBox="1"/>
+          <p:nvPr/>
+        </p:nvSpPr>
+        <p:spPr>
+          <a:xfrm>
+            <a:off x="1508760" y="2395728"/>
+            <a:ext cx="1356283" cy="822960"/>
+          </a:xfrm>
+          <a:prstGeom prst="rect">
+            <a:avLst/>
+          </a:prstGeom>
+          <a:noFill/>
+        </p:spPr>
+        <p:txBody>
+          <a:bodyPr wrap="square" anchor="t" lIns="0" rIns="0" tIns="0" bIns="0">
+            <a:spAutoFit/>
+          </a:bodyPr>
+          <a:lstStyle/>
+          <a:p>
+            <a:pPr algn="l">
+              <a:lnSpc>
+                <a:spcPct val="130000"/>
+              </a:lnSpc>
+              <a:spcAft>
+                <a:spcPts val="400"/>
+              </a:spcAft>
+            </a:pPr>
+            <a:r>
+              <a:rPr sz="1500" b="1">
+                <a:solidFill>
+                  <a:srgbClr val="B23A2A"/>
+                </a:solidFill>
+                <a:latin typeface="微软雅黑"/>
+                <a:ea typeface="微软雅黑"/>
+                <a:cs typeface="微软雅黑"/>
+              </a:rPr>
+              <a:t>知人论世法</a:t>
+            </a:r>
+          </a:p>
+        </p:txBody>
+      </p:sp>
+      <p:sp>
+        <p:nvSpPr>
+          <p:cNvPr id="10" name="TextBox 9"/>
+          <p:cNvSpPr txBox="1"/>
+          <p:nvPr/>
+        </p:nvSpPr>
+        <p:spPr>
+          <a:xfrm>
+            <a:off x="868680" y="3154680"/>
+            <a:ext cx="1996363" cy="2788920"/>
+          </a:xfrm>
+          <a:prstGeom prst="rect">
+            <a:avLst/>
+          </a:prstGeom>
+          <a:noFill/>
+        </p:spPr>
+        <p:txBody>
+          <a:bodyPr wrap="square" anchor="t" lIns="0" rIns="0" tIns="0" bIns="0">
+            <a:spAutoFit/>
+          </a:bodyPr>
+          <a:lstStyle/>
+          <a:p>
+            <a:pPr algn="l">
+              <a:lnSpc>
+                <a:spcPct val="145000"/>
+              </a:lnSpc>
+              <a:spcAft>
+                <a:spcPts val="400"/>
+              </a:spcAft>
+            </a:pPr>
+            <a:r>
+              <a:rPr sz="1300" b="0">
+                <a:solidFill>
+                  <a:srgbClr val="1C2A33"/>
+                </a:solidFill>
+                <a:latin typeface="楷体"/>
+                <a:ea typeface="楷体"/>
+                <a:cs typeface="楷体"/>
+              </a:rPr>
+              <a:t>补辛弃疾（抗金志士）、李清照（南渡孤老）生平。</a:t>
+            </a:r>
+          </a:p>
+        </p:txBody>
+      </p:sp>
+      <p:sp>
+        <p:nvSpPr>
+          <p:cNvPr id="11" name="Rounded Rectangle 10"/>
+          <p:cNvSpPr/>
+          <p:nvPr/>
+        </p:nvSpPr>
+        <p:spPr>
+          <a:xfrm>
+            <a:off x="3459403" y="2194560"/>
+            <a:ext cx="2453563" cy="3931920"/>
+          </a:xfrm>
+          <a:prstGeom prst="roundRect">
+            <a:avLst/>
+          </a:prstGeom>
+          <a:solidFill>
+            <a:srgbClr val="FFFFFF"/>
+          </a:solidFill>
+          <a:ln w="20320">
+            <a:solidFill>
+              <a:srgbClr val="2E7D6B"/>
+            </a:solidFill>
+          </a:ln>
+          <a:effectLst/>
+        </p:spPr>
+        <p:style>
+          <a:lnRef idx="1">
+            <a:schemeClr val="accent1"/>
+          </a:lnRef>
+          <a:fillRef idx="3">
+            <a:schemeClr val="accent1"/>
+          </a:fillRef>
+          <a:effectRef idx="2">
+            <a:schemeClr val="accent1"/>
+          </a:effectRef>
+          <a:fontRef idx="minor">
+            <a:schemeClr val="lt1"/>
+          </a:fontRef>
+        </p:style>
+        <p:txBody>
+          <a:bodyPr rtlCol="0" anchor="ctr"/>
+          <a:lstStyle/>
+          <a:p>
+            <a:pPr algn="ctr"/>
+          </a:p>
+        </p:txBody>
+      </p:sp>
+      <p:sp>
+        <p:nvSpPr>
+          <p:cNvPr id="12" name="Oval 11"/>
+          <p:cNvSpPr/>
+          <p:nvPr/>
+        </p:nvSpPr>
+        <p:spPr>
+          <a:xfrm>
+            <a:off x="3642283" y="2377440"/>
+            <a:ext cx="502920" cy="502920"/>
+          </a:xfrm>
+          <a:prstGeom prst="ellipse">
             <a:avLst/>
           </a:prstGeom>
           <a:solidFill>
@@ -5448,14 +6288,146 @@
       </p:sp>
       <p:sp>
         <p:nvSpPr>
-          <p:cNvPr id="5" name="Rounded Rectangle 4"/>
+          <p:cNvPr id="13" name="TextBox 12"/>
+          <p:cNvSpPr txBox="1"/>
+          <p:nvPr/>
+        </p:nvSpPr>
+        <p:spPr>
+          <a:xfrm>
+            <a:off x="3642283" y="2450592"/>
+            <a:ext cx="502920" cy="384048"/>
+          </a:xfrm>
+          <a:prstGeom prst="rect">
+            <a:avLst/>
+          </a:prstGeom>
+          <a:noFill/>
+        </p:spPr>
+        <p:txBody>
+          <a:bodyPr wrap="square" anchor="t" lIns="0" rIns="0" tIns="0" bIns="0">
+            <a:spAutoFit/>
+          </a:bodyPr>
+          <a:lstStyle/>
+          <a:p>
+            <a:pPr algn="ctr">
+              <a:lnSpc>
+                <a:spcPct val="145000"/>
+              </a:lnSpc>
+              <a:spcAft>
+                <a:spcPts val="400"/>
+              </a:spcAft>
+            </a:pPr>
+            <a:r>
+              <a:rPr sz="1800" b="1">
+                <a:solidFill>
+                  <a:srgbClr val="FFFFFF"/>
+                </a:solidFill>
+                <a:latin typeface="微软雅黑"/>
+                <a:ea typeface="微软雅黑"/>
+                <a:cs typeface="微软雅黑"/>
+              </a:rPr>
+              <a:t>②</a:t>
+            </a:r>
+          </a:p>
+        </p:txBody>
+      </p:sp>
+      <p:sp>
+        <p:nvSpPr>
+          <p:cNvPr id="14" name="TextBox 13"/>
+          <p:cNvSpPr txBox="1"/>
+          <p:nvPr/>
+        </p:nvSpPr>
+        <p:spPr>
+          <a:xfrm>
+            <a:off x="4328083" y="2395728"/>
+            <a:ext cx="1356283" cy="822960"/>
+          </a:xfrm>
+          <a:prstGeom prst="rect">
+            <a:avLst/>
+          </a:prstGeom>
+          <a:noFill/>
+        </p:spPr>
+        <p:txBody>
+          <a:bodyPr wrap="square" anchor="t" lIns="0" rIns="0" tIns="0" bIns="0">
+            <a:spAutoFit/>
+          </a:bodyPr>
+          <a:lstStyle/>
+          <a:p>
+            <a:pPr algn="l">
+              <a:lnSpc>
+                <a:spcPct val="130000"/>
+              </a:lnSpc>
+              <a:spcAft>
+                <a:spcPts val="400"/>
+              </a:spcAft>
+            </a:pPr>
+            <a:r>
+              <a:rPr sz="1500" b="1">
+                <a:solidFill>
+                  <a:srgbClr val="2E7D6B"/>
+                </a:solidFill>
+                <a:latin typeface="微软雅黑"/>
+                <a:ea typeface="微软雅黑"/>
+                <a:cs typeface="微软雅黑"/>
+              </a:rPr>
+              <a:t>典故串讲法</a:t>
+            </a:r>
+          </a:p>
+        </p:txBody>
+      </p:sp>
+      <p:sp>
+        <p:nvSpPr>
+          <p:cNvPr id="15" name="TextBox 14"/>
+          <p:cNvSpPr txBox="1"/>
+          <p:nvPr/>
+        </p:nvSpPr>
+        <p:spPr>
+          <a:xfrm>
+            <a:off x="3688003" y="3154680"/>
+            <a:ext cx="1996363" cy="2788920"/>
+          </a:xfrm>
+          <a:prstGeom prst="rect">
+            <a:avLst/>
+          </a:prstGeom>
+          <a:noFill/>
+        </p:spPr>
+        <p:txBody>
+          <a:bodyPr wrap="square" anchor="t" lIns="0" rIns="0" tIns="0" bIns="0">
+            <a:spAutoFit/>
+          </a:bodyPr>
+          <a:lstStyle/>
+          <a:p>
+            <a:pPr algn="l">
+              <a:lnSpc>
+                <a:spcPct val="145000"/>
+              </a:lnSpc>
+              <a:spcAft>
+                <a:spcPts val="400"/>
+              </a:spcAft>
+            </a:pPr>
+            <a:r>
+              <a:rPr sz="1300" b="0">
+                <a:solidFill>
+                  <a:srgbClr val="1C2A33"/>
+                </a:solidFill>
+                <a:latin typeface="楷体"/>
+                <a:ea typeface="楷体"/>
+                <a:cs typeface="楷体"/>
+              </a:rPr>
+              <a:t>《永遇乐》五典用时间线串讲。</a:t>
+            </a:r>
+          </a:p>
+        </p:txBody>
+      </p:sp>
+      <p:sp>
+        <p:nvSpPr>
+          <p:cNvPr id="16" name="Rounded Rectangle 15"/>
           <p:cNvSpPr/>
           <p:nvPr/>
         </p:nvSpPr>
         <p:spPr>
           <a:xfrm>
-            <a:off x="640080" y="1371600"/>
-            <a:ext cx="10911535" cy="685800"/>
+            <a:off x="6278727" y="2194560"/>
+            <a:ext cx="2453563" cy="3931920"/>
           </a:xfrm>
           <a:prstGeom prst="roundRect">
             <a:avLst/>
@@ -5463,9 +6435,9 @@
           <a:solidFill>
             <a:srgbClr val="FFFFFF"/>
           </a:solidFill>
-          <a:ln w="22860">
+          <a:ln w="20320">
             <a:solidFill>
-              <a:srgbClr val="2E7D6B"/>
+              <a:srgbClr val="C8A86B"/>
             </a:solidFill>
           </a:ln>
           <a:effectLst/>
@@ -5494,20 +6466,20 @@
       </p:sp>
       <p:sp>
         <p:nvSpPr>
-          <p:cNvPr id="6" name="Oval 5"/>
+          <p:cNvPr id="17" name="Oval 16"/>
           <p:cNvSpPr/>
           <p:nvPr/>
         </p:nvSpPr>
         <p:spPr>
           <a:xfrm>
-            <a:off x="804672" y="1536192"/>
-            <a:ext cx="457200" cy="457200"/>
+            <a:off x="6461607" y="2377440"/>
+            <a:ext cx="502920" cy="502920"/>
           </a:xfrm>
           <a:prstGeom prst="ellipse">
             <a:avLst/>
           </a:prstGeom>
           <a:solidFill>
-            <a:srgbClr val="2E7D6B"/>
+            <a:srgbClr val="C8A86B"/>
           </a:solidFill>
           <a:ln>
             <a:noFill/>
@@ -5538,14 +6510,14 @@
       </p:sp>
       <p:sp>
         <p:nvSpPr>
-          <p:cNvPr id="7" name="TextBox 6"/>
+          <p:cNvPr id="18" name="TextBox 17"/>
           <p:cNvSpPr txBox="1"/>
           <p:nvPr/>
         </p:nvSpPr>
         <p:spPr>
           <a:xfrm>
-            <a:off x="804672" y="1591056"/>
-            <a:ext cx="457200" cy="384048"/>
+            <a:off x="6461607" y="2450592"/>
+            <a:ext cx="502920" cy="384048"/>
           </a:xfrm>
           <a:prstGeom prst="rect">
             <a:avLst/>
@@ -5558,9 +6530,16 @@
           </a:bodyPr>
           <a:lstStyle/>
           <a:p>
-            <a:pPr algn="ctr"/>
-            <a:r>
-              <a:rPr sz="1600" b="1">
+            <a:pPr algn="ctr">
+              <a:lnSpc>
+                <a:spcPct val="145000"/>
+              </a:lnSpc>
+              <a:spcAft>
+                <a:spcPts val="400"/>
+              </a:spcAft>
+            </a:pPr>
+            <a:r>
+              <a:rPr sz="1800" b="1">
                 <a:solidFill>
                   <a:srgbClr val="FFFFFF"/>
                 </a:solidFill>
@@ -5568,21 +6547,21 @@
                 <a:ea typeface="微软雅黑"/>
                 <a:cs typeface="微软雅黑"/>
               </a:rPr>
-              <a:t>1</a:t>
-            </a:r>
-          </a:p>
-        </p:txBody>
-      </p:sp>
-      <p:sp>
-        <p:nvSpPr>
-          <p:cNvPr id="8" name="TextBox 7"/>
+              <a:t>③</a:t>
+            </a:r>
+          </a:p>
+        </p:txBody>
+      </p:sp>
+      <p:sp>
+        <p:nvSpPr>
+          <p:cNvPr id="19" name="TextBox 18"/>
           <p:cNvSpPr txBox="1"/>
           <p:nvPr/>
         </p:nvSpPr>
         <p:spPr>
           <a:xfrm>
-            <a:off x="1371600" y="1481328"/>
-            <a:ext cx="9997135" cy="484632"/>
+            <a:off x="7147407" y="2395728"/>
+            <a:ext cx="1356283" cy="822960"/>
           </a:xfrm>
           <a:prstGeom prst="rect">
             <a:avLst/>
@@ -5597,33 +6576,80 @@
           <a:p>
             <a:pPr algn="l">
               <a:lnSpc>
-                <a:spcPct val="110000"/>
+                <a:spcPct val="130000"/>
               </a:lnSpc>
+              <a:spcAft>
+                <a:spcPts val="400"/>
+              </a:spcAft>
             </a:pPr>
             <a:r>
-              <a:rPr sz="1600" b="1">
-                <a:solidFill>
-                  <a:srgbClr val="1C2A33"/>
+              <a:rPr sz="1500" b="1">
+                <a:solidFill>
+                  <a:srgbClr val="C8A86B"/>
                 </a:solidFill>
                 <a:latin typeface="微软雅黑"/>
                 <a:ea typeface="微软雅黑"/>
                 <a:cs typeface="微软雅黑"/>
               </a:rPr>
-              <a:t>Step 1 导入</a:t>
-            </a:r>
-          </a:p>
-        </p:txBody>
-      </p:sp>
-      <p:sp>
-        <p:nvSpPr>
-          <p:cNvPr id="9" name="Rounded Rectangle 8"/>
+              <a:t>诵读品鉴法</a:t>
+            </a:r>
+          </a:p>
+        </p:txBody>
+      </p:sp>
+      <p:sp>
+        <p:nvSpPr>
+          <p:cNvPr id="20" name="TextBox 19"/>
+          <p:cNvSpPr txBox="1"/>
+          <p:nvPr/>
+        </p:nvSpPr>
+        <p:spPr>
+          <a:xfrm>
+            <a:off x="6507327" y="3154680"/>
+            <a:ext cx="1996363" cy="2788920"/>
+          </a:xfrm>
+          <a:prstGeom prst="rect">
+            <a:avLst/>
+          </a:prstGeom>
+          <a:noFill/>
+        </p:spPr>
+        <p:txBody>
+          <a:bodyPr wrap="square" anchor="t" lIns="0" rIns="0" tIns="0" bIns="0">
+            <a:spAutoFit/>
+          </a:bodyPr>
+          <a:lstStyle/>
+          <a:p>
+            <a:pPr algn="l">
+              <a:lnSpc>
+                <a:spcPct val="145000"/>
+              </a:lnSpc>
+              <a:spcAft>
+                <a:spcPts val="400"/>
+              </a:spcAft>
+            </a:pPr>
+            <a:r>
+              <a:rPr sz="1300" b="0">
+                <a:solidFill>
+                  <a:srgbClr val="1C2A33"/>
+                </a:solidFill>
+                <a:latin typeface="楷体"/>
+                <a:ea typeface="楷体"/>
+                <a:cs typeface="楷体"/>
+              </a:rPr>
+              <a:t>《声声慢》慢读叠字，体会声情。</a:t>
+            </a:r>
+          </a:p>
+        </p:txBody>
+      </p:sp>
+      <p:sp>
+        <p:nvSpPr>
+          <p:cNvPr id="21" name="Rounded Rectangle 20"/>
           <p:cNvSpPr/>
           <p:nvPr/>
         </p:nvSpPr>
         <p:spPr>
           <a:xfrm>
-            <a:off x="640080" y="2194560"/>
-            <a:ext cx="10911535" cy="685800"/>
+            <a:off x="9098051" y="2194560"/>
+            <a:ext cx="2453563" cy="3931920"/>
           </a:xfrm>
           <a:prstGeom prst="roundRect">
             <a:avLst/>
@@ -5631,9 +6657,9 @@
           <a:solidFill>
             <a:srgbClr val="FFFFFF"/>
           </a:solidFill>
-          <a:ln w="22860">
+          <a:ln w="20320">
             <a:solidFill>
-              <a:srgbClr val="2E7D6B"/>
+              <a:srgbClr val="6B6258"/>
             </a:solidFill>
           </a:ln>
           <a:effectLst/>
@@ -5662,20 +6688,20 @@
       </p:sp>
       <p:sp>
         <p:nvSpPr>
-          <p:cNvPr id="10" name="Oval 9"/>
+          <p:cNvPr id="22" name="Oval 21"/>
           <p:cNvSpPr/>
           <p:nvPr/>
         </p:nvSpPr>
         <p:spPr>
           <a:xfrm>
-            <a:off x="804672" y="2359152"/>
-            <a:ext cx="457200" cy="457200"/>
+            <a:off x="9280931" y="2377440"/>
+            <a:ext cx="502920" cy="502920"/>
           </a:xfrm>
           <a:prstGeom prst="ellipse">
             <a:avLst/>
           </a:prstGeom>
           <a:solidFill>
-            <a:srgbClr val="2E7D6B"/>
+            <a:srgbClr val="6B6258"/>
           </a:solidFill>
           <a:ln>
             <a:noFill/>
@@ -5706,14 +6732,14 @@
       </p:sp>
       <p:sp>
         <p:nvSpPr>
-          <p:cNvPr id="11" name="TextBox 10"/>
+          <p:cNvPr id="23" name="TextBox 22"/>
           <p:cNvSpPr txBox="1"/>
           <p:nvPr/>
         </p:nvSpPr>
         <p:spPr>
           <a:xfrm>
-            <a:off x="804672" y="2414016"/>
-            <a:ext cx="457200" cy="384048"/>
+            <a:off x="9280931" y="2450592"/>
+            <a:ext cx="502920" cy="384048"/>
           </a:xfrm>
           <a:prstGeom prst="rect">
             <a:avLst/>
@@ -5726,9 +6752,16 @@
           </a:bodyPr>
           <a:lstStyle/>
           <a:p>
-            <a:pPr algn="ctr"/>
-            <a:r>
-              <a:rPr sz="1600" b="1">
+            <a:pPr algn="ctr">
+              <a:lnSpc>
+                <a:spcPct val="145000"/>
+              </a:lnSpc>
+              <a:spcAft>
+                <a:spcPts val="400"/>
+              </a:spcAft>
+            </a:pPr>
+            <a:r>
+              <a:rPr sz="1800" b="1">
                 <a:solidFill>
                   <a:srgbClr val="FFFFFF"/>
                 </a:solidFill>
@@ -5736,21 +6769,21 @@
                 <a:ea typeface="微软雅黑"/>
                 <a:cs typeface="微软雅黑"/>
               </a:rPr>
-              <a:t>2</a:t>
-            </a:r>
-          </a:p>
-        </p:txBody>
-      </p:sp>
-      <p:sp>
-        <p:nvSpPr>
-          <p:cNvPr id="12" name="TextBox 11"/>
+              <a:t>④</a:t>
+            </a:r>
+          </a:p>
+        </p:txBody>
+      </p:sp>
+      <p:sp>
+        <p:nvSpPr>
+          <p:cNvPr id="24" name="TextBox 23"/>
           <p:cNvSpPr txBox="1"/>
           <p:nvPr/>
         </p:nvSpPr>
         <p:spPr>
           <a:xfrm>
-            <a:off x="1371600" y="2304288"/>
-            <a:ext cx="9997135" cy="484632"/>
+            <a:off x="9966731" y="2395728"/>
+            <a:ext cx="1356283" cy="822960"/>
           </a:xfrm>
           <a:prstGeom prst="rect">
             <a:avLst/>
@@ -5765,123 +6798,36 @@
           <a:p>
             <a:pPr algn="l">
               <a:lnSpc>
-                <a:spcPct val="110000"/>
+                <a:spcPct val="130000"/>
               </a:lnSpc>
+              <a:spcAft>
+                <a:spcPts val="400"/>
+              </a:spcAft>
             </a:pPr>
             <a:r>
-              <a:rPr sz="1600" b="1">
-                <a:solidFill>
-                  <a:srgbClr val="1C2A33"/>
+              <a:rPr sz="1500" b="1">
+                <a:solidFill>
+                  <a:srgbClr val="6B6258"/>
                 </a:solidFill>
                 <a:latin typeface="微软雅黑"/>
                 <a:ea typeface="微软雅黑"/>
                 <a:cs typeface="微软雅黑"/>
               </a:rPr>
-              <a:t>Step 2 永遇乐</a:t>
-            </a:r>
-          </a:p>
-        </p:txBody>
-      </p:sp>
-      <p:sp>
-        <p:nvSpPr>
-          <p:cNvPr id="13" name="Rounded Rectangle 12"/>
-          <p:cNvSpPr/>
-          <p:nvPr/>
-        </p:nvSpPr>
-        <p:spPr>
-          <a:xfrm>
-            <a:off x="640080" y="3017520"/>
-            <a:ext cx="10911535" cy="685800"/>
-          </a:xfrm>
-          <a:prstGeom prst="roundRect">
-            <a:avLst/>
-          </a:prstGeom>
-          <a:solidFill>
-            <a:srgbClr val="FFFFFF"/>
-          </a:solidFill>
-          <a:ln w="22860">
-            <a:solidFill>
-              <a:srgbClr val="2E7D6B"/>
-            </a:solidFill>
-          </a:ln>
-          <a:effectLst/>
-        </p:spPr>
-        <p:style>
-          <a:lnRef idx="1">
-            <a:schemeClr val="accent1"/>
-          </a:lnRef>
-          <a:fillRef idx="3">
-            <a:schemeClr val="accent1"/>
-          </a:fillRef>
-          <a:effectRef idx="2">
-            <a:schemeClr val="accent1"/>
-          </a:effectRef>
-          <a:fontRef idx="minor">
-            <a:schemeClr val="lt1"/>
-          </a:fontRef>
-        </p:style>
-        <p:txBody>
-          <a:bodyPr rtlCol="0" anchor="ctr"/>
-          <a:lstStyle/>
-          <a:p>
-            <a:pPr algn="ctr"/>
-          </a:p>
-        </p:txBody>
-      </p:sp>
-      <p:sp>
-        <p:nvSpPr>
-          <p:cNvPr id="14" name="Oval 13"/>
-          <p:cNvSpPr/>
-          <p:nvPr/>
-        </p:nvSpPr>
-        <p:spPr>
-          <a:xfrm>
-            <a:off x="804672" y="3182112"/>
-            <a:ext cx="457200" cy="457200"/>
-          </a:xfrm>
-          <a:prstGeom prst="ellipse">
-            <a:avLst/>
-          </a:prstGeom>
-          <a:solidFill>
-            <a:srgbClr val="2E7D6B"/>
-          </a:solidFill>
-          <a:ln>
-            <a:noFill/>
-          </a:ln>
-          <a:effectLst/>
-        </p:spPr>
-        <p:style>
-          <a:lnRef idx="1">
-            <a:schemeClr val="accent1"/>
-          </a:lnRef>
-          <a:fillRef idx="3">
-            <a:schemeClr val="accent1"/>
-          </a:fillRef>
-          <a:effectRef idx="2">
-            <a:schemeClr val="accent1"/>
-          </a:effectRef>
-          <a:fontRef idx="minor">
-            <a:schemeClr val="lt1"/>
-          </a:fontRef>
-        </p:style>
-        <p:txBody>
-          <a:bodyPr rtlCol="0" anchor="ctr"/>
-          <a:lstStyle/>
-          <a:p>
-            <a:pPr algn="ctr"/>
-          </a:p>
-        </p:txBody>
-      </p:sp>
-      <p:sp>
-        <p:nvSpPr>
-          <p:cNvPr id="15" name="TextBox 14"/>
+              <a:t>群文比较法</a:t>
+            </a:r>
+          </a:p>
+        </p:txBody>
+      </p:sp>
+      <p:sp>
+        <p:nvSpPr>
+          <p:cNvPr id="25" name="TextBox 24"/>
           <p:cNvSpPr txBox="1"/>
           <p:nvPr/>
         </p:nvSpPr>
         <p:spPr>
           <a:xfrm>
-            <a:off x="804672" y="3236976"/>
-            <a:ext cx="457200" cy="384048"/>
+            <a:off x="9326651" y="3154680"/>
+            <a:ext cx="1996363" cy="2788920"/>
           </a:xfrm>
           <a:prstGeom prst="rect">
             <a:avLst/>
@@ -5894,569 +6840,31 @@
           </a:bodyPr>
           <a:lstStyle/>
           <a:p>
-            <a:pPr algn="ctr"/>
-            <a:r>
-              <a:rPr sz="1600" b="1">
-                <a:solidFill>
-                  <a:srgbClr val="FFFFFF"/>
-                </a:solidFill>
-                <a:latin typeface="微软雅黑"/>
-                <a:ea typeface="微软雅黑"/>
-                <a:cs typeface="微软雅黑"/>
-              </a:rPr>
-              <a:t>3</a:t>
-            </a:r>
-          </a:p>
-        </p:txBody>
-      </p:sp>
-      <p:sp>
-        <p:nvSpPr>
-          <p:cNvPr id="16" name="TextBox 15"/>
-          <p:cNvSpPr txBox="1"/>
-          <p:nvPr/>
-        </p:nvSpPr>
-        <p:spPr>
-          <a:xfrm>
-            <a:off x="1371600" y="3127248"/>
-            <a:ext cx="9997135" cy="484632"/>
-          </a:xfrm>
-          <a:prstGeom prst="rect">
-            <a:avLst/>
-          </a:prstGeom>
-          <a:noFill/>
-        </p:spPr>
-        <p:txBody>
-          <a:bodyPr wrap="square" anchor="t" lIns="0" rIns="0" tIns="0" bIns="0">
-            <a:spAutoFit/>
-          </a:bodyPr>
-          <a:lstStyle/>
-          <a:p>
             <a:pPr algn="l">
               <a:lnSpc>
-                <a:spcPct val="110000"/>
+                <a:spcPct val="145000"/>
               </a:lnSpc>
+              <a:spcAft>
+                <a:spcPts val="400"/>
+              </a:spcAft>
             </a:pPr>
             <a:r>
-              <a:rPr sz="1600" b="1">
+              <a:rPr sz="1300" b="0">
                 <a:solidFill>
                   <a:srgbClr val="1C2A33"/>
                 </a:solidFill>
-                <a:latin typeface="微软雅黑"/>
-                <a:ea typeface="微软雅黑"/>
-                <a:cs typeface="微软雅黑"/>
-              </a:rPr>
-              <a:t>Step 3 声声慢</a:t>
-            </a:r>
-          </a:p>
-        </p:txBody>
-      </p:sp>
-      <p:sp>
-        <p:nvSpPr>
-          <p:cNvPr id="17" name="Rounded Rectangle 16"/>
-          <p:cNvSpPr/>
-          <p:nvPr/>
-        </p:nvSpPr>
-        <p:spPr>
-          <a:xfrm>
-            <a:off x="640080" y="3840480"/>
-            <a:ext cx="10911535" cy="685800"/>
-          </a:xfrm>
-          <a:prstGeom prst="roundRect">
-            <a:avLst/>
-          </a:prstGeom>
-          <a:solidFill>
-            <a:srgbClr val="FFFFFF"/>
-          </a:solidFill>
-          <a:ln w="22860">
-            <a:solidFill>
-              <a:srgbClr val="2E7D6B"/>
-            </a:solidFill>
-          </a:ln>
-          <a:effectLst/>
-        </p:spPr>
-        <p:style>
-          <a:lnRef idx="1">
-            <a:schemeClr val="accent1"/>
-          </a:lnRef>
-          <a:fillRef idx="3">
-            <a:schemeClr val="accent1"/>
-          </a:fillRef>
-          <a:effectRef idx="2">
-            <a:schemeClr val="accent1"/>
-          </a:effectRef>
-          <a:fontRef idx="minor">
-            <a:schemeClr val="lt1"/>
-          </a:fontRef>
-        </p:style>
-        <p:txBody>
-          <a:bodyPr rtlCol="0" anchor="ctr"/>
-          <a:lstStyle/>
-          <a:p>
-            <a:pPr algn="ctr"/>
-          </a:p>
-        </p:txBody>
-      </p:sp>
-      <p:sp>
-        <p:nvSpPr>
-          <p:cNvPr id="18" name="Oval 17"/>
-          <p:cNvSpPr/>
-          <p:nvPr/>
-        </p:nvSpPr>
-        <p:spPr>
-          <a:xfrm>
-            <a:off x="804672" y="4005072"/>
-            <a:ext cx="457200" cy="457200"/>
-          </a:xfrm>
-          <a:prstGeom prst="ellipse">
-            <a:avLst/>
-          </a:prstGeom>
-          <a:solidFill>
-            <a:srgbClr val="2E7D6B"/>
-          </a:solidFill>
-          <a:ln>
-            <a:noFill/>
-          </a:ln>
-          <a:effectLst/>
-        </p:spPr>
-        <p:style>
-          <a:lnRef idx="1">
-            <a:schemeClr val="accent1"/>
-          </a:lnRef>
-          <a:fillRef idx="3">
-            <a:schemeClr val="accent1"/>
-          </a:fillRef>
-          <a:effectRef idx="2">
-            <a:schemeClr val="accent1"/>
-          </a:effectRef>
-          <a:fontRef idx="minor">
-            <a:schemeClr val="lt1"/>
-          </a:fontRef>
-        </p:style>
-        <p:txBody>
-          <a:bodyPr rtlCol="0" anchor="ctr"/>
-          <a:lstStyle/>
-          <a:p>
-            <a:pPr algn="ctr"/>
-          </a:p>
-        </p:txBody>
-      </p:sp>
-      <p:sp>
-        <p:nvSpPr>
-          <p:cNvPr id="19" name="TextBox 18"/>
-          <p:cNvSpPr txBox="1"/>
-          <p:nvPr/>
-        </p:nvSpPr>
-        <p:spPr>
-          <a:xfrm>
-            <a:off x="804672" y="4059936"/>
-            <a:ext cx="457200" cy="384048"/>
-          </a:xfrm>
-          <a:prstGeom prst="rect">
-            <a:avLst/>
-          </a:prstGeom>
-          <a:noFill/>
-        </p:spPr>
-        <p:txBody>
-          <a:bodyPr wrap="square" anchor="t" lIns="0" rIns="0" tIns="0" bIns="0">
-            <a:spAutoFit/>
-          </a:bodyPr>
-          <a:lstStyle/>
-          <a:p>
-            <a:pPr algn="ctr"/>
-            <a:r>
-              <a:rPr sz="1600" b="1">
-                <a:solidFill>
-                  <a:srgbClr val="FFFFFF"/>
-                </a:solidFill>
-                <a:latin typeface="微软雅黑"/>
-                <a:ea typeface="微软雅黑"/>
-                <a:cs typeface="微软雅黑"/>
-              </a:rPr>
-              <a:t>4</a:t>
-            </a:r>
-          </a:p>
-        </p:txBody>
-      </p:sp>
-      <p:sp>
-        <p:nvSpPr>
-          <p:cNvPr id="20" name="TextBox 19"/>
-          <p:cNvSpPr txBox="1"/>
-          <p:nvPr/>
-        </p:nvSpPr>
-        <p:spPr>
-          <a:xfrm>
-            <a:off x="1371600" y="3950208"/>
-            <a:ext cx="9997135" cy="484632"/>
-          </a:xfrm>
-          <a:prstGeom prst="rect">
-            <a:avLst/>
-          </a:prstGeom>
-          <a:noFill/>
-        </p:spPr>
-        <p:txBody>
-          <a:bodyPr wrap="square" anchor="t" lIns="0" rIns="0" tIns="0" bIns="0">
-            <a:spAutoFit/>
-          </a:bodyPr>
-          <a:lstStyle/>
-          <a:p>
-            <a:pPr algn="l">
-              <a:lnSpc>
-                <a:spcPct val="110000"/>
-              </a:lnSpc>
-            </a:pPr>
-            <a:r>
-              <a:rPr sz="1600" b="1">
-                <a:solidFill>
-                  <a:srgbClr val="1C2A33"/>
-                </a:solidFill>
-                <a:latin typeface="微软雅黑"/>
-                <a:ea typeface="微软雅黑"/>
-                <a:cs typeface="微软雅黑"/>
-              </a:rPr>
-              <a:t>Step 4 群文比较</a:t>
-            </a:r>
-          </a:p>
-        </p:txBody>
-      </p:sp>
-      <p:sp>
-        <p:nvSpPr>
-          <p:cNvPr id="21" name="Rounded Rectangle 20"/>
-          <p:cNvSpPr/>
-          <p:nvPr/>
-        </p:nvSpPr>
-        <p:spPr>
-          <a:xfrm>
-            <a:off x="640080" y="4663440"/>
-            <a:ext cx="10911535" cy="685800"/>
-          </a:xfrm>
-          <a:prstGeom prst="roundRect">
-            <a:avLst/>
-          </a:prstGeom>
-          <a:solidFill>
-            <a:srgbClr val="FFFFFF"/>
-          </a:solidFill>
-          <a:ln w="22860">
-            <a:solidFill>
-              <a:srgbClr val="2E7D6B"/>
-            </a:solidFill>
-          </a:ln>
-          <a:effectLst/>
-        </p:spPr>
-        <p:style>
-          <a:lnRef idx="1">
-            <a:schemeClr val="accent1"/>
-          </a:lnRef>
-          <a:fillRef idx="3">
-            <a:schemeClr val="accent1"/>
-          </a:fillRef>
-          <a:effectRef idx="2">
-            <a:schemeClr val="accent1"/>
-          </a:effectRef>
-          <a:fontRef idx="minor">
-            <a:schemeClr val="lt1"/>
-          </a:fontRef>
-        </p:style>
-        <p:txBody>
-          <a:bodyPr rtlCol="0" anchor="ctr"/>
-          <a:lstStyle/>
-          <a:p>
-            <a:pPr algn="ctr"/>
-          </a:p>
-        </p:txBody>
-      </p:sp>
-      <p:sp>
-        <p:nvSpPr>
-          <p:cNvPr id="22" name="Oval 21"/>
-          <p:cNvSpPr/>
-          <p:nvPr/>
-        </p:nvSpPr>
-        <p:spPr>
-          <a:xfrm>
-            <a:off x="804672" y="4828032"/>
-            <a:ext cx="457200" cy="457200"/>
-          </a:xfrm>
-          <a:prstGeom prst="ellipse">
-            <a:avLst/>
-          </a:prstGeom>
-          <a:solidFill>
-            <a:srgbClr val="2E7D6B"/>
-          </a:solidFill>
-          <a:ln>
-            <a:noFill/>
-          </a:ln>
-          <a:effectLst/>
-        </p:spPr>
-        <p:style>
-          <a:lnRef idx="1">
-            <a:schemeClr val="accent1"/>
-          </a:lnRef>
-          <a:fillRef idx="3">
-            <a:schemeClr val="accent1"/>
-          </a:fillRef>
-          <a:effectRef idx="2">
-            <a:schemeClr val="accent1"/>
-          </a:effectRef>
-          <a:fontRef idx="minor">
-            <a:schemeClr val="lt1"/>
-          </a:fontRef>
-        </p:style>
-        <p:txBody>
-          <a:bodyPr rtlCol="0" anchor="ctr"/>
-          <a:lstStyle/>
-          <a:p>
-            <a:pPr algn="ctr"/>
-          </a:p>
-        </p:txBody>
-      </p:sp>
-      <p:sp>
-        <p:nvSpPr>
-          <p:cNvPr id="23" name="TextBox 22"/>
-          <p:cNvSpPr txBox="1"/>
-          <p:nvPr/>
-        </p:nvSpPr>
-        <p:spPr>
-          <a:xfrm>
-            <a:off x="804672" y="4882896"/>
-            <a:ext cx="457200" cy="384048"/>
-          </a:xfrm>
-          <a:prstGeom prst="rect">
-            <a:avLst/>
-          </a:prstGeom>
-          <a:noFill/>
-        </p:spPr>
-        <p:txBody>
-          <a:bodyPr wrap="square" anchor="t" lIns="0" rIns="0" tIns="0" bIns="0">
-            <a:spAutoFit/>
-          </a:bodyPr>
-          <a:lstStyle/>
-          <a:p>
-            <a:pPr algn="ctr"/>
-            <a:r>
-              <a:rPr sz="1600" b="1">
-                <a:solidFill>
-                  <a:srgbClr val="FFFFFF"/>
-                </a:solidFill>
-                <a:latin typeface="微软雅黑"/>
-                <a:ea typeface="微软雅黑"/>
-                <a:cs typeface="微软雅黑"/>
-              </a:rPr>
-              <a:t>5</a:t>
-            </a:r>
-          </a:p>
-        </p:txBody>
-      </p:sp>
-      <p:sp>
-        <p:nvSpPr>
-          <p:cNvPr id="24" name="TextBox 23"/>
-          <p:cNvSpPr txBox="1"/>
-          <p:nvPr/>
-        </p:nvSpPr>
-        <p:spPr>
-          <a:xfrm>
-            <a:off x="1371600" y="4773168"/>
-            <a:ext cx="9997135" cy="484632"/>
-          </a:xfrm>
-          <a:prstGeom prst="rect">
-            <a:avLst/>
-          </a:prstGeom>
-          <a:noFill/>
-        </p:spPr>
-        <p:txBody>
-          <a:bodyPr wrap="square" anchor="t" lIns="0" rIns="0" tIns="0" bIns="0">
-            <a:spAutoFit/>
-          </a:bodyPr>
-          <a:lstStyle/>
-          <a:p>
-            <a:pPr algn="l">
-              <a:lnSpc>
-                <a:spcPct val="110000"/>
-              </a:lnSpc>
-            </a:pPr>
-            <a:r>
-              <a:rPr sz="1400" b="1">
-                <a:solidFill>
-                  <a:srgbClr val="1C2A33"/>
-                </a:solidFill>
-                <a:latin typeface="微软雅黑"/>
-                <a:ea typeface="微软雅黑"/>
-                <a:cs typeface="微软雅黑"/>
-              </a:rPr>
-              <a:t>Step 5 意象对照+小结</a:t>
-            </a:r>
-          </a:p>
-        </p:txBody>
-      </p:sp>
-      <p:sp>
-        <p:nvSpPr>
-          <p:cNvPr id="25" name="Rounded Rectangle 24"/>
-          <p:cNvSpPr/>
-          <p:nvPr/>
-        </p:nvSpPr>
-        <p:spPr>
-          <a:xfrm>
-            <a:off x="640080" y="5486400"/>
-            <a:ext cx="10911535" cy="685800"/>
-          </a:xfrm>
-          <a:prstGeom prst="roundRect">
-            <a:avLst/>
-          </a:prstGeom>
-          <a:solidFill>
-            <a:srgbClr val="FFFFFF"/>
-          </a:solidFill>
-          <a:ln w="22860">
-            <a:solidFill>
-              <a:srgbClr val="2E7D6B"/>
-            </a:solidFill>
-          </a:ln>
-          <a:effectLst/>
-        </p:spPr>
-        <p:style>
-          <a:lnRef idx="1">
-            <a:schemeClr val="accent1"/>
-          </a:lnRef>
-          <a:fillRef idx="3">
-            <a:schemeClr val="accent1"/>
-          </a:fillRef>
-          <a:effectRef idx="2">
-            <a:schemeClr val="accent1"/>
-          </a:effectRef>
-          <a:fontRef idx="minor">
-            <a:schemeClr val="lt1"/>
-          </a:fontRef>
-        </p:style>
-        <p:txBody>
-          <a:bodyPr rtlCol="0" anchor="ctr"/>
-          <a:lstStyle/>
-          <a:p>
-            <a:pPr algn="ctr"/>
-          </a:p>
-        </p:txBody>
-      </p:sp>
-      <p:sp>
-        <p:nvSpPr>
-          <p:cNvPr id="26" name="Oval 25"/>
-          <p:cNvSpPr/>
-          <p:nvPr/>
-        </p:nvSpPr>
-        <p:spPr>
-          <a:xfrm>
-            <a:off x="804672" y="5650992"/>
-            <a:ext cx="457200" cy="457200"/>
-          </a:xfrm>
-          <a:prstGeom prst="ellipse">
-            <a:avLst/>
-          </a:prstGeom>
-          <a:solidFill>
-            <a:srgbClr val="2E7D6B"/>
-          </a:solidFill>
-          <a:ln>
-            <a:noFill/>
-          </a:ln>
-          <a:effectLst/>
-        </p:spPr>
-        <p:style>
-          <a:lnRef idx="1">
-            <a:schemeClr val="accent1"/>
-          </a:lnRef>
-          <a:fillRef idx="3">
-            <a:schemeClr val="accent1"/>
-          </a:fillRef>
-          <a:effectRef idx="2">
-            <a:schemeClr val="accent1"/>
-          </a:effectRef>
-          <a:fontRef idx="minor">
-            <a:schemeClr val="lt1"/>
-          </a:fontRef>
-        </p:style>
-        <p:txBody>
-          <a:bodyPr rtlCol="0" anchor="ctr"/>
-          <a:lstStyle/>
-          <a:p>
-            <a:pPr algn="ctr"/>
-          </a:p>
-        </p:txBody>
-      </p:sp>
-      <p:sp>
-        <p:nvSpPr>
-          <p:cNvPr id="27" name="TextBox 26"/>
-          <p:cNvSpPr txBox="1"/>
-          <p:nvPr/>
-        </p:nvSpPr>
-        <p:spPr>
-          <a:xfrm>
-            <a:off x="804672" y="5705856"/>
-            <a:ext cx="457200" cy="384048"/>
-          </a:xfrm>
-          <a:prstGeom prst="rect">
-            <a:avLst/>
-          </a:prstGeom>
-          <a:noFill/>
-        </p:spPr>
-        <p:txBody>
-          <a:bodyPr wrap="square" anchor="t" lIns="0" rIns="0" tIns="0" bIns="0">
-            <a:spAutoFit/>
-          </a:bodyPr>
-          <a:lstStyle/>
-          <a:p>
-            <a:pPr algn="ctr"/>
-            <a:r>
-              <a:rPr sz="1600" b="1">
-                <a:solidFill>
-                  <a:srgbClr val="FFFFFF"/>
-                </a:solidFill>
-                <a:latin typeface="微软雅黑"/>
-                <a:ea typeface="微软雅黑"/>
-                <a:cs typeface="微软雅黑"/>
-              </a:rPr>
-              <a:t>6</a:t>
-            </a:r>
-          </a:p>
-        </p:txBody>
-      </p:sp>
-      <p:sp>
-        <p:nvSpPr>
-          <p:cNvPr id="28" name="TextBox 27"/>
-          <p:cNvSpPr txBox="1"/>
-          <p:nvPr/>
-        </p:nvSpPr>
-        <p:spPr>
-          <a:xfrm>
-            <a:off x="1371600" y="5596128"/>
-            <a:ext cx="9997135" cy="484632"/>
-          </a:xfrm>
-          <a:prstGeom prst="rect">
-            <a:avLst/>
-          </a:prstGeom>
-          <a:noFill/>
-        </p:spPr>
-        <p:txBody>
-          <a:bodyPr wrap="square" anchor="t" lIns="0" rIns="0" tIns="0" bIns="0">
-            <a:spAutoFit/>
-          </a:bodyPr>
-          <a:lstStyle/>
-          <a:p>
-            <a:pPr algn="l">
-              <a:lnSpc>
-                <a:spcPct val="110000"/>
-              </a:lnSpc>
-            </a:pPr>
-            <a:r>
-              <a:rPr sz="1600" b="1">
-                <a:solidFill>
-                  <a:srgbClr val="1C2A33"/>
-                </a:solidFill>
-                <a:latin typeface="微软雅黑"/>
-                <a:ea typeface="微软雅黑"/>
-                <a:cs typeface="微软雅黑"/>
-              </a:rPr>
-              <a:t>Step 6 作业布置</a:t>
-            </a:r>
-          </a:p>
-        </p:txBody>
-      </p:sp>
-      <p:sp>
-        <p:nvSpPr>
-          <p:cNvPr id="29" name="TextBox 28"/>
+                <a:latin typeface="楷体"/>
+                <a:ea typeface="楷体"/>
+                <a:cs typeface="楷体"/>
+              </a:rPr>
+              <a:t>双栏对照（题材/手法/情感/风格）。</a:t>
+            </a:r>
+          </a:p>
+        </p:txBody>
+      </p:sp>
+      <p:sp>
+        <p:nvSpPr>
+          <p:cNvPr id="26" name="TextBox 25"/>
           <p:cNvSpPr txBox="1"/>
           <p:nvPr/>
         </p:nvSpPr>
@@ -6589,7 +6997,7 @@
                 <a:ea typeface="微软雅黑"/>
                 <a:cs typeface="微软雅黑"/>
               </a:rPr>
-              <a:t>易混易错</a:t>
+              <a:t>难点</a:t>
             </a:r>
           </a:p>
         </p:txBody>
@@ -6640,14 +7048,58 @@
       </p:sp>
       <p:sp>
         <p:nvSpPr>
-          <p:cNvPr id="5" name="Rounded Rectangle 4"/>
+          <p:cNvPr id="5" name="TextBox 4"/>
+          <p:cNvSpPr txBox="1"/>
+          <p:nvPr/>
+        </p:nvSpPr>
+        <p:spPr>
+          <a:xfrm>
+            <a:off x="640080" y="1325880"/>
+            <a:ext cx="10911535" cy="548640"/>
+          </a:xfrm>
+          <a:prstGeom prst="rect">
+            <a:avLst/>
+          </a:prstGeom>
+          <a:noFill/>
+        </p:spPr>
+        <p:txBody>
+          <a:bodyPr wrap="square" anchor="t" lIns="0" rIns="0" tIns="0" bIns="0">
+            <a:spAutoFit/>
+          </a:bodyPr>
+          <a:lstStyle/>
+          <a:p>
+            <a:pPr algn="l">
+              <a:lnSpc>
+                <a:spcPct val="145000"/>
+              </a:lnSpc>
+              <a:spcAft>
+                <a:spcPts val="400"/>
+              </a:spcAft>
+            </a:pPr>
+            <a:r>
+              <a:rPr sz="2600" b="1">
+                <a:solidFill>
+                  <a:srgbClr val="1C2A33"/>
+                </a:solidFill>
+                <a:latin typeface="楷体"/>
+                <a:ea typeface="楷体"/>
+                <a:cs typeface="楷体"/>
+              </a:rPr>
+              <a:t>本课难点 · 怎么破</a:t>
+            </a:r>
+          </a:p>
+        </p:txBody>
+      </p:sp>
+      <p:sp>
+        <p:nvSpPr>
+          <p:cNvPr id="6" name="Rounded Rectangle 5"/>
           <p:cNvSpPr/>
           <p:nvPr/>
         </p:nvSpPr>
         <p:spPr>
           <a:xfrm>
-            <a:off x="640080" y="1417320"/>
-            <a:ext cx="5349240" cy="2057400"/>
+            <a:off x="640080" y="2194560"/>
+            <a:ext cx="3393338" cy="3931920"/>
           </a:xfrm>
           <a:prstGeom prst="roundRect">
             <a:avLst/>
@@ -6655,7 +7107,7 @@
           <a:solidFill>
             <a:srgbClr val="FFFFFF"/>
           </a:solidFill>
-          <a:ln w="22860">
+          <a:ln w="20320">
             <a:solidFill>
               <a:srgbClr val="B23A2A"/>
             </a:solidFill>
@@ -6686,14 +7138,14 @@
       </p:sp>
       <p:sp>
         <p:nvSpPr>
-          <p:cNvPr id="6" name="Oval 5"/>
+          <p:cNvPr id="7" name="Oval 6"/>
           <p:cNvSpPr/>
           <p:nvPr/>
         </p:nvSpPr>
         <p:spPr>
           <a:xfrm>
-            <a:off x="804672" y="1581912"/>
-            <a:ext cx="457200" cy="457200"/>
+            <a:off x="822960" y="2377440"/>
+            <a:ext cx="502920" cy="502920"/>
           </a:xfrm>
           <a:prstGeom prst="ellipse">
             <a:avLst/>
@@ -6730,14 +7182,14 @@
       </p:sp>
       <p:sp>
         <p:nvSpPr>
-          <p:cNvPr id="7" name="TextBox 6"/>
+          <p:cNvPr id="8" name="TextBox 7"/>
           <p:cNvSpPr txBox="1"/>
           <p:nvPr/>
         </p:nvSpPr>
         <p:spPr>
           <a:xfrm>
-            <a:off x="804672" y="1636776"/>
-            <a:ext cx="457200" cy="384048"/>
+            <a:off x="822960" y="2450592"/>
+            <a:ext cx="502920" cy="384048"/>
           </a:xfrm>
           <a:prstGeom prst="rect">
             <a:avLst/>
@@ -6750,9 +7202,16 @@
           </a:bodyPr>
           <a:lstStyle/>
           <a:p>
-            <a:pPr algn="ctr"/>
-            <a:r>
-              <a:rPr sz="1600" b="1">
+            <a:pPr algn="ctr">
+              <a:lnSpc>
+                <a:spcPct val="145000"/>
+              </a:lnSpc>
+              <a:spcAft>
+                <a:spcPts val="400"/>
+              </a:spcAft>
+            </a:pPr>
+            <a:r>
+              <a:rPr sz="1800" b="1">
                 <a:solidFill>
                   <a:srgbClr val="FFFFFF"/>
                 </a:solidFill>
@@ -6760,21 +7219,21 @@
                 <a:ea typeface="微软雅黑"/>
                 <a:cs typeface="微软雅黑"/>
               </a:rPr>
-              <a:t>!</a:t>
-            </a:r>
-          </a:p>
-        </p:txBody>
-      </p:sp>
-      <p:sp>
-        <p:nvSpPr>
-          <p:cNvPr id="8" name="TextBox 7"/>
+              <a:t>①</a:t>
+            </a:r>
+          </a:p>
+        </p:txBody>
+      </p:sp>
+      <p:sp>
+        <p:nvSpPr>
+          <p:cNvPr id="9" name="TextBox 8"/>
           <p:cNvSpPr txBox="1"/>
           <p:nvPr/>
         </p:nvSpPr>
         <p:spPr>
           <a:xfrm>
-            <a:off x="1371600" y="1527048"/>
-            <a:ext cx="4434840" cy="457200"/>
+            <a:off x="1508760" y="2395728"/>
+            <a:ext cx="2296058" cy="822960"/>
           </a:xfrm>
           <a:prstGeom prst="rect">
             <a:avLst/>
@@ -6789,33 +7248,36 @@
           <a:p>
             <a:pPr algn="l">
               <a:lnSpc>
-                <a:spcPct val="110000"/>
+                <a:spcPct val="130000"/>
               </a:lnSpc>
+              <a:spcAft>
+                <a:spcPts val="400"/>
+              </a:spcAft>
             </a:pPr>
             <a:r>
               <a:rPr sz="1600" b="1">
                 <a:solidFill>
-                  <a:srgbClr val="1C2A33"/>
+                  <a:srgbClr val="B23A2A"/>
                 </a:solidFill>
                 <a:latin typeface="微软雅黑"/>
                 <a:ea typeface="微软雅黑"/>
                 <a:cs typeface="微软雅黑"/>
               </a:rPr>
-              <a:t/>
-            </a:r>
-          </a:p>
-        </p:txBody>
-      </p:sp>
-      <p:sp>
-        <p:nvSpPr>
-          <p:cNvPr id="9" name="TextBox 8"/>
+              <a:t>《永遇乐》用典密集。原因</a:t>
+            </a:r>
+          </a:p>
+        </p:txBody>
+      </p:sp>
+      <p:sp>
+        <p:nvSpPr>
+          <p:cNvPr id="10" name="TextBox 9"/>
           <p:cNvSpPr txBox="1"/>
           <p:nvPr/>
         </p:nvSpPr>
         <p:spPr>
           <a:xfrm>
-            <a:off x="1371600" y="1965960"/>
-            <a:ext cx="4434840" cy="1417320"/>
+            <a:off x="868680" y="3154680"/>
+            <a:ext cx="2936138" cy="2788920"/>
           </a:xfrm>
           <a:prstGeom prst="rect">
             <a:avLst/>
@@ -6830,11 +7292,14 @@
           <a:p>
             <a:pPr algn="l">
               <a:lnSpc>
-                <a:spcPct val="128000"/>
+                <a:spcPct val="145000"/>
               </a:lnSpc>
+              <a:spcAft>
+                <a:spcPts val="400"/>
+              </a:spcAft>
             </a:pPr>
             <a:r>
-              <a:rPr sz="1400" b="0">
+              <a:rPr sz="1350" b="0">
                 <a:solidFill>
                   <a:srgbClr val="1C2A33"/>
                 </a:solidFill>
@@ -6842,21 +7307,21 @@
                 <a:ea typeface="楷体"/>
                 <a:cs typeface="楷体"/>
               </a:rPr>
-              <a:t>① 《永遇乐》用典密集。原因：五处典故学生大多不熟，需逐一搭桥并点明讽谏用意。</a:t>
-            </a:r>
-          </a:p>
-        </p:txBody>
-      </p:sp>
-      <p:sp>
-        <p:nvSpPr>
-          <p:cNvPr id="10" name="Rounded Rectangle 9"/>
+              <a:t>五处典故学生大多不熟，需逐一搭桥并点明讽谏用意。</a:t>
+            </a:r>
+          </a:p>
+        </p:txBody>
+      </p:sp>
+      <p:sp>
+        <p:nvSpPr>
+          <p:cNvPr id="11" name="Rounded Rectangle 10"/>
           <p:cNvSpPr/>
           <p:nvPr/>
         </p:nvSpPr>
         <p:spPr>
           <a:xfrm>
-            <a:off x="6263640" y="1417320"/>
-            <a:ext cx="5349240" cy="2057400"/>
+            <a:off x="4399178" y="2194560"/>
+            <a:ext cx="3393338" cy="3931920"/>
           </a:xfrm>
           <a:prstGeom prst="roundRect">
             <a:avLst/>
@@ -6864,9 +7329,9 @@
           <a:solidFill>
             <a:srgbClr val="FFFFFF"/>
           </a:solidFill>
-          <a:ln w="22860">
+          <a:ln w="20320">
             <a:solidFill>
-              <a:srgbClr val="B23A2A"/>
+              <a:srgbClr val="2E7D6B"/>
             </a:solidFill>
           </a:ln>
           <a:effectLst/>
@@ -6895,20 +7360,20 @@
       </p:sp>
       <p:sp>
         <p:nvSpPr>
-          <p:cNvPr id="11" name="Oval 10"/>
+          <p:cNvPr id="12" name="Oval 11"/>
           <p:cNvSpPr/>
           <p:nvPr/>
         </p:nvSpPr>
         <p:spPr>
           <a:xfrm>
-            <a:off x="6428232" y="1581912"/>
-            <a:ext cx="457200" cy="457200"/>
+            <a:off x="4582058" y="2377440"/>
+            <a:ext cx="502920" cy="502920"/>
           </a:xfrm>
           <a:prstGeom prst="ellipse">
             <a:avLst/>
           </a:prstGeom>
           <a:solidFill>
-            <a:srgbClr val="B23A2A"/>
+            <a:srgbClr val="2E7D6B"/>
           </a:solidFill>
           <a:ln>
             <a:noFill/>
@@ -6939,14 +7404,14 @@
       </p:sp>
       <p:sp>
         <p:nvSpPr>
-          <p:cNvPr id="12" name="TextBox 11"/>
+          <p:cNvPr id="13" name="TextBox 12"/>
           <p:cNvSpPr txBox="1"/>
           <p:nvPr/>
         </p:nvSpPr>
         <p:spPr>
           <a:xfrm>
-            <a:off x="6428232" y="1636776"/>
-            <a:ext cx="457200" cy="384048"/>
+            <a:off x="4582058" y="2450592"/>
+            <a:ext cx="502920" cy="384048"/>
           </a:xfrm>
           <a:prstGeom prst="rect">
             <a:avLst/>
@@ -6959,9 +7424,16 @@
           </a:bodyPr>
           <a:lstStyle/>
           <a:p>
-            <a:pPr algn="ctr"/>
-            <a:r>
-              <a:rPr sz="1600" b="1">
+            <a:pPr algn="ctr">
+              <a:lnSpc>
+                <a:spcPct val="145000"/>
+              </a:lnSpc>
+              <a:spcAft>
+                <a:spcPts val="400"/>
+              </a:spcAft>
+            </a:pPr>
+            <a:r>
+              <a:rPr sz="1800" b="1">
                 <a:solidFill>
                   <a:srgbClr val="FFFFFF"/>
                 </a:solidFill>
@@ -6969,21 +7441,21 @@
                 <a:ea typeface="微软雅黑"/>
                 <a:cs typeface="微软雅黑"/>
               </a:rPr>
-              <a:t>!</a:t>
-            </a:r>
-          </a:p>
-        </p:txBody>
-      </p:sp>
-      <p:sp>
-        <p:nvSpPr>
-          <p:cNvPr id="13" name="TextBox 12"/>
+              <a:t>②</a:t>
+            </a:r>
+          </a:p>
+        </p:txBody>
+      </p:sp>
+      <p:sp>
+        <p:nvSpPr>
+          <p:cNvPr id="14" name="TextBox 13"/>
           <p:cNvSpPr txBox="1"/>
           <p:nvPr/>
         </p:nvSpPr>
         <p:spPr>
           <a:xfrm>
-            <a:off x="6995160" y="1527048"/>
-            <a:ext cx="4434840" cy="457200"/>
+            <a:off x="5267858" y="2395728"/>
+            <a:ext cx="2296058" cy="822960"/>
           </a:xfrm>
           <a:prstGeom prst="rect">
             <a:avLst/>
@@ -6998,33 +7470,36 @@
           <a:p>
             <a:pPr algn="l">
               <a:lnSpc>
-                <a:spcPct val="110000"/>
+                <a:spcPct val="130000"/>
               </a:lnSpc>
+              <a:spcAft>
+                <a:spcPts val="400"/>
+              </a:spcAft>
             </a:pPr>
             <a:r>
               <a:rPr sz="1600" b="1">
                 <a:solidFill>
-                  <a:srgbClr val="1C2A33"/>
+                  <a:srgbClr val="2E7D6B"/>
                 </a:solidFill>
                 <a:latin typeface="微软雅黑"/>
                 <a:ea typeface="微软雅黑"/>
                 <a:cs typeface="微软雅黑"/>
               </a:rPr>
-              <a:t/>
-            </a:r>
-          </a:p>
-        </p:txBody>
-      </p:sp>
-      <p:sp>
-        <p:nvSpPr>
-          <p:cNvPr id="14" name="TextBox 13"/>
+              <a:t>《声声慢》叠字之妙。原因</a:t>
+            </a:r>
+          </a:p>
+        </p:txBody>
+      </p:sp>
+      <p:sp>
+        <p:nvSpPr>
+          <p:cNvPr id="15" name="TextBox 14"/>
           <p:cNvSpPr txBox="1"/>
           <p:nvPr/>
         </p:nvSpPr>
         <p:spPr>
           <a:xfrm>
-            <a:off x="6995160" y="1965960"/>
-            <a:ext cx="4434840" cy="1417320"/>
+            <a:off x="4627778" y="3154680"/>
+            <a:ext cx="2936138" cy="2788920"/>
           </a:xfrm>
           <a:prstGeom prst="rect">
             <a:avLst/>
@@ -7039,11 +7514,14 @@
           <a:p>
             <a:pPr algn="l">
               <a:lnSpc>
-                <a:spcPct val="128000"/>
+                <a:spcPct val="145000"/>
               </a:lnSpc>
+              <a:spcAft>
+                <a:spcPts val="400"/>
+              </a:spcAft>
             </a:pPr>
             <a:r>
-              <a:rPr sz="1400" b="0">
+              <a:rPr sz="1350" b="0">
                 <a:solidFill>
                   <a:srgbClr val="1C2A33"/>
                 </a:solidFill>
@@ -7051,21 +7529,21 @@
                 <a:ea typeface="楷体"/>
                 <a:cs typeface="楷体"/>
               </a:rPr>
-              <a:t>② 《声声慢》叠字之妙。原因：学生感受得到悲，说不清「叠字如何层层加深」。</a:t>
-            </a:r>
-          </a:p>
-        </p:txBody>
-      </p:sp>
-      <p:sp>
-        <p:nvSpPr>
-          <p:cNvPr id="15" name="Rounded Rectangle 14"/>
+              <a:t>学生感受得到悲，说不清「叠字如何层层加深」。</a:t>
+            </a:r>
+          </a:p>
+        </p:txBody>
+      </p:sp>
+      <p:sp>
+        <p:nvSpPr>
+          <p:cNvPr id="16" name="Rounded Rectangle 15"/>
           <p:cNvSpPr/>
           <p:nvPr/>
         </p:nvSpPr>
         <p:spPr>
           <a:xfrm>
-            <a:off x="640080" y="3703320"/>
-            <a:ext cx="5349240" cy="2057400"/>
+            <a:off x="8158276" y="2194560"/>
+            <a:ext cx="3393338" cy="3931920"/>
           </a:xfrm>
           <a:prstGeom prst="roundRect">
             <a:avLst/>
@@ -7073,9 +7551,9 @@
           <a:solidFill>
             <a:srgbClr val="FFFFFF"/>
           </a:solidFill>
-          <a:ln w="22860">
+          <a:ln w="20320">
             <a:solidFill>
-              <a:srgbClr val="B23A2A"/>
+              <a:srgbClr val="C8A86B"/>
             </a:solidFill>
           </a:ln>
           <a:effectLst/>
@@ -7104,20 +7582,20 @@
       </p:sp>
       <p:sp>
         <p:nvSpPr>
-          <p:cNvPr id="16" name="Oval 15"/>
+          <p:cNvPr id="17" name="Oval 16"/>
           <p:cNvSpPr/>
           <p:nvPr/>
         </p:nvSpPr>
         <p:spPr>
           <a:xfrm>
-            <a:off x="804672" y="3867912"/>
-            <a:ext cx="457200" cy="457200"/>
+            <a:off x="8341156" y="2377440"/>
+            <a:ext cx="502920" cy="502920"/>
           </a:xfrm>
           <a:prstGeom prst="ellipse">
             <a:avLst/>
           </a:prstGeom>
           <a:solidFill>
-            <a:srgbClr val="B23A2A"/>
+            <a:srgbClr val="C8A86B"/>
           </a:solidFill>
           <a:ln>
             <a:noFill/>
@@ -7148,14 +7626,14 @@
       </p:sp>
       <p:sp>
         <p:nvSpPr>
-          <p:cNvPr id="17" name="TextBox 16"/>
+          <p:cNvPr id="18" name="TextBox 17"/>
           <p:cNvSpPr txBox="1"/>
           <p:nvPr/>
         </p:nvSpPr>
         <p:spPr>
           <a:xfrm>
-            <a:off x="804672" y="3922776"/>
-            <a:ext cx="457200" cy="384048"/>
+            <a:off x="8341156" y="2450592"/>
+            <a:ext cx="502920" cy="384048"/>
           </a:xfrm>
           <a:prstGeom prst="rect">
             <a:avLst/>
@@ -7168,9 +7646,16 @@
           </a:bodyPr>
           <a:lstStyle/>
           <a:p>
-            <a:pPr algn="ctr"/>
-            <a:r>
-              <a:rPr sz="1600" b="1">
+            <a:pPr algn="ctr">
+              <a:lnSpc>
+                <a:spcPct val="145000"/>
+              </a:lnSpc>
+              <a:spcAft>
+                <a:spcPts val="400"/>
+              </a:spcAft>
+            </a:pPr>
+            <a:r>
+              <a:rPr sz="1800" b="1">
                 <a:solidFill>
                   <a:srgbClr val="FFFFFF"/>
                 </a:solidFill>
@@ -7178,21 +7663,21 @@
                 <a:ea typeface="微软雅黑"/>
                 <a:cs typeface="微软雅黑"/>
               </a:rPr>
-              <a:t>!</a:t>
-            </a:r>
-          </a:p>
-        </p:txBody>
-      </p:sp>
-      <p:sp>
-        <p:nvSpPr>
-          <p:cNvPr id="18" name="TextBox 17"/>
+              <a:t>③</a:t>
+            </a:r>
+          </a:p>
+        </p:txBody>
+      </p:sp>
+      <p:sp>
+        <p:nvSpPr>
+          <p:cNvPr id="19" name="TextBox 18"/>
           <p:cNvSpPr txBox="1"/>
           <p:nvPr/>
         </p:nvSpPr>
         <p:spPr>
           <a:xfrm>
-            <a:off x="1371600" y="3813048"/>
-            <a:ext cx="4434840" cy="457200"/>
+            <a:off x="9026956" y="2395728"/>
+            <a:ext cx="2296058" cy="822960"/>
           </a:xfrm>
           <a:prstGeom prst="rect">
             <a:avLst/>
@@ -7207,33 +7692,36 @@
           <a:p>
             <a:pPr algn="l">
               <a:lnSpc>
-                <a:spcPct val="110000"/>
+                <a:spcPct val="130000"/>
               </a:lnSpc>
+              <a:spcAft>
+                <a:spcPts val="400"/>
+              </a:spcAft>
             </a:pPr>
             <a:r>
               <a:rPr sz="1600" b="1">
                 <a:solidFill>
-                  <a:srgbClr val="1C2A33"/>
+                  <a:srgbClr val="C8A86B"/>
                 </a:solidFill>
                 <a:latin typeface="微软雅黑"/>
                 <a:ea typeface="微软雅黑"/>
                 <a:cs typeface="微软雅黑"/>
               </a:rPr>
-              <a:t/>
-            </a:r>
-          </a:p>
-        </p:txBody>
-      </p:sp>
-      <p:sp>
-        <p:nvSpPr>
-          <p:cNvPr id="19" name="TextBox 18"/>
+              <a:t>风格辩证。原因</a:t>
+            </a:r>
+          </a:p>
+        </p:txBody>
+      </p:sp>
+      <p:sp>
+        <p:nvSpPr>
+          <p:cNvPr id="20" name="TextBox 19"/>
           <p:cNvSpPr txBox="1"/>
           <p:nvPr/>
         </p:nvSpPr>
         <p:spPr>
           <a:xfrm>
-            <a:off x="1371600" y="4251960"/>
-            <a:ext cx="4434840" cy="1417320"/>
+            <a:off x="8386876" y="3154680"/>
+            <a:ext cx="2936138" cy="2788920"/>
           </a:xfrm>
           <a:prstGeom prst="rect">
             <a:avLst/>
@@ -7248,11 +7736,14 @@
           <a:p>
             <a:pPr algn="l">
               <a:lnSpc>
-                <a:spcPct val="128000"/>
+                <a:spcPct val="145000"/>
               </a:lnSpc>
+              <a:spcAft>
+                <a:spcPts val="400"/>
+              </a:spcAft>
             </a:pPr>
             <a:r>
-              <a:rPr sz="1400" b="0">
+              <a:rPr sz="1350" b="0">
                 <a:solidFill>
                   <a:srgbClr val="1C2A33"/>
                 </a:solidFill>
@@ -7260,14 +7751,14 @@
                 <a:ea typeface="楷体"/>
                 <a:cs typeface="楷体"/>
               </a:rPr>
-              <a:t>③ 风格辩证。原因：学生易贴标签，需引导发现豪放中的个人悲与婉约中的骨力。</a:t>
-            </a:r>
-          </a:p>
-        </p:txBody>
-      </p:sp>
-      <p:sp>
-        <p:nvSpPr>
-          <p:cNvPr id="20" name="TextBox 19"/>
+              <a:t>学生易贴标签，需引导发现豪放中的个人悲与婉约中的骨力。</a:t>
+            </a:r>
+          </a:p>
+        </p:txBody>
+      </p:sp>
+      <p:sp>
+        <p:nvSpPr>
+          <p:cNvPr id="21" name="TextBox 20"/>
           <p:cNvSpPr txBox="1"/>
           <p:nvPr/>
         </p:nvSpPr>
@@ -7394,13 +7885,13 @@
             <a:r>
               <a:rPr sz="1300" b="1">
                 <a:solidFill>
-                  <a:srgbClr val="C8A86B"/>
+                  <a:srgbClr val="B23A2A"/>
                 </a:solidFill>
                 <a:latin typeface="微软雅黑"/>
                 <a:ea typeface="微软雅黑"/>
                 <a:cs typeface="微软雅黑"/>
               </a:rPr>
-              <a:t>要点板书</a:t>
+              <a:t>板书精华</a:t>
             </a:r>
           </a:p>
         </p:txBody>
@@ -7420,7 +7911,7 @@
             <a:avLst/>
           </a:prstGeom>
           <a:solidFill>
-            <a:srgbClr val="C8A86B"/>
+            <a:srgbClr val="B23A2A"/>
           </a:solidFill>
           <a:ln>
             <a:noFill/>
@@ -7451,24 +7942,68 @@
       </p:sp>
       <p:sp>
         <p:nvSpPr>
-          <p:cNvPr id="5" name="Rounded Rectangle 4"/>
+          <p:cNvPr id="5" name="TextBox 4"/>
+          <p:cNvSpPr txBox="1"/>
+          <p:nvPr/>
+        </p:nvSpPr>
+        <p:spPr>
+          <a:xfrm>
+            <a:off x="640080" y="1325880"/>
+            <a:ext cx="10911535" cy="548640"/>
+          </a:xfrm>
+          <a:prstGeom prst="rect">
+            <a:avLst/>
+          </a:prstGeom>
+          <a:noFill/>
+        </p:spPr>
+        <p:txBody>
+          <a:bodyPr wrap="square" anchor="t" lIns="0" rIns="0" tIns="0" bIns="0">
+            <a:spAutoFit/>
+          </a:bodyPr>
+          <a:lstStyle/>
+          <a:p>
+            <a:pPr algn="l">
+              <a:lnSpc>
+                <a:spcPct val="145000"/>
+              </a:lnSpc>
+              <a:spcAft>
+                <a:spcPts val="400"/>
+              </a:spcAft>
+            </a:pPr>
+            <a:r>
+              <a:rPr sz="2600" b="1">
+                <a:solidFill>
+                  <a:srgbClr val="1C2A33"/>
+                </a:solidFill>
+                <a:latin typeface="楷体"/>
+                <a:ea typeface="楷体"/>
+                <a:cs typeface="楷体"/>
+              </a:rPr>
+              <a:t>本课结构精华</a:t>
+            </a:r>
+          </a:p>
+        </p:txBody>
+      </p:sp>
+      <p:sp>
+        <p:nvSpPr>
+          <p:cNvPr id="6" name="Rounded Rectangle 5"/>
           <p:cNvSpPr/>
           <p:nvPr/>
         </p:nvSpPr>
         <p:spPr>
           <a:xfrm>
-            <a:off x="640080" y="1417320"/>
-            <a:ext cx="10911535" cy="5394960"/>
+            <a:off x="640080" y="2011680"/>
+            <a:ext cx="10911535" cy="4480560"/>
           </a:xfrm>
           <a:prstGeom prst="roundRect">
             <a:avLst/>
           </a:prstGeom>
           <a:solidFill>
-            <a:srgbClr val="FFFFFF"/>
+            <a:srgbClr val="E7DFD2"/>
           </a:solidFill>
-          <a:ln w="25400">
+          <a:ln w="12700">
             <a:solidFill>
-              <a:srgbClr val="C8A86B"/>
+              <a:srgbClr val="6B6258"/>
             </a:solidFill>
           </a:ln>
           <a:effectLst/>
@@ -7497,14 +8032,14 @@
       </p:sp>
       <p:sp>
         <p:nvSpPr>
-          <p:cNvPr id="6" name="TextBox 5"/>
+          <p:cNvPr id="7" name="TextBox 6"/>
           <p:cNvSpPr txBox="1"/>
           <p:nvPr/>
         </p:nvSpPr>
         <p:spPr>
           <a:xfrm>
-            <a:off x="914400" y="1554480"/>
-            <a:ext cx="10362895" cy="5120640"/>
+            <a:off x="914400" y="2148840"/>
+            <a:ext cx="4907127" cy="4206240"/>
           </a:xfrm>
           <a:prstGeom prst="rect">
             <a:avLst/>
@@ -7519,50 +8054,409 @@
           <a:p>
             <a:pPr algn="l">
               <a:lnSpc>
-                <a:spcPct val="110000"/>
+                <a:spcPct val="135000"/>
               </a:lnSpc>
               <a:spcAft>
-                <a:spcPts val="100"/>
+                <a:spcPts val="300"/>
               </a:spcAft>
             </a:pPr>
             <a:r>
-              <a:rPr sz="1300" b="0">
+              <a:rPr sz="1250" b="0">
                 <a:solidFill>
                   <a:srgbClr val="1C2A33"/>
                 </a:solidFill>
-                <a:latin typeface="微软雅黑"/>
-                <a:ea typeface="微软雅黑"/>
-                <a:cs typeface="微软雅黑"/>
-              </a:rPr>
-              <a:t>┌── 永遇乐·声声慢 ──┐
-│ 豪放 婉约 │
-│ │
-│ 【永遇乐】五典 │
-│ 孙权(英雄) │
-│ 刘裕(北伐) │
-│ 刘义隆(草率败) │
-│ 佛狸祠(敌踪) │
-│ 廉颇(自比老) │
-│ →借古讽今 │
-│ │
-│ 【声声慢】七叠字 │
-│ 寻觅→冷清→凄惨 │
-│ 动作→环境→心理 │
-│ →愁递进 │
-│ │
-│ 【比较】 │
-│ 题材:家国/自我 │
-│ 手法:用典/白描 │
-│ 风格:豪放/婉约 │
-│ 交融(非二分) │
-└────────────────────┘</a:t>
-            </a:r>
-          </a:p>
-        </p:txBody>
-      </p:sp>
-      <p:sp>
-        <p:nvSpPr>
-          <p:cNvPr id="7" name="TextBox 6"/>
+                <a:latin typeface="楷体"/>
+                <a:ea typeface="楷体"/>
+                <a:cs typeface="楷体"/>
+              </a:rPr>
+              <a:t>永遇乐·声声慢</a:t>
+            </a:r>
+          </a:p>
+          <a:p>
+            <a:pPr algn="l">
+              <a:lnSpc>
+                <a:spcPct val="135000"/>
+              </a:lnSpc>
+              <a:spcAft>
+                <a:spcPts val="300"/>
+              </a:spcAft>
+            </a:pPr>
+            <a:r>
+              <a:rPr sz="1250" b="0">
+                <a:solidFill>
+                  <a:srgbClr val="1C2A33"/>
+                </a:solidFill>
+                <a:latin typeface="楷体"/>
+                <a:ea typeface="楷体"/>
+                <a:cs typeface="楷体"/>
+              </a:rPr>
+              <a:t>豪放 婉约</a:t>
+            </a:r>
+          </a:p>
+          <a:p>
+            <a:pPr algn="l">
+              <a:lnSpc>
+                <a:spcPct val="135000"/>
+              </a:lnSpc>
+              <a:spcAft>
+                <a:spcPts val="300"/>
+              </a:spcAft>
+            </a:pPr>
+            <a:r>
+              <a:rPr sz="1250" b="0">
+                <a:solidFill>
+                  <a:srgbClr val="1C2A33"/>
+                </a:solidFill>
+                <a:latin typeface="楷体"/>
+                <a:ea typeface="楷体"/>
+                <a:cs typeface="楷体"/>
+              </a:rPr>
+              <a:t>【永遇乐】五典</a:t>
+            </a:r>
+          </a:p>
+          <a:p>
+            <a:pPr algn="l">
+              <a:lnSpc>
+                <a:spcPct val="135000"/>
+              </a:lnSpc>
+              <a:spcAft>
+                <a:spcPts val="300"/>
+              </a:spcAft>
+            </a:pPr>
+            <a:r>
+              <a:rPr sz="1250" b="0">
+                <a:solidFill>
+                  <a:srgbClr val="1C2A33"/>
+                </a:solidFill>
+                <a:latin typeface="楷体"/>
+                <a:ea typeface="楷体"/>
+                <a:cs typeface="楷体"/>
+              </a:rPr>
+              <a:t>孙权(英雄)</a:t>
+            </a:r>
+          </a:p>
+          <a:p>
+            <a:pPr algn="l">
+              <a:lnSpc>
+                <a:spcPct val="135000"/>
+              </a:lnSpc>
+              <a:spcAft>
+                <a:spcPts val="300"/>
+              </a:spcAft>
+            </a:pPr>
+            <a:r>
+              <a:rPr sz="1250" b="0">
+                <a:solidFill>
+                  <a:srgbClr val="1C2A33"/>
+                </a:solidFill>
+                <a:latin typeface="楷体"/>
+                <a:ea typeface="楷体"/>
+                <a:cs typeface="楷体"/>
+              </a:rPr>
+              <a:t>刘裕(北伐)</a:t>
+            </a:r>
+          </a:p>
+          <a:p>
+            <a:pPr algn="l">
+              <a:lnSpc>
+                <a:spcPct val="135000"/>
+              </a:lnSpc>
+              <a:spcAft>
+                <a:spcPts val="300"/>
+              </a:spcAft>
+            </a:pPr>
+            <a:r>
+              <a:rPr sz="1250" b="0">
+                <a:solidFill>
+                  <a:srgbClr val="1C2A33"/>
+                </a:solidFill>
+                <a:latin typeface="楷体"/>
+                <a:ea typeface="楷体"/>
+                <a:cs typeface="楷体"/>
+              </a:rPr>
+              <a:t>刘义隆(草率败)</a:t>
+            </a:r>
+          </a:p>
+          <a:p>
+            <a:pPr algn="l">
+              <a:lnSpc>
+                <a:spcPct val="135000"/>
+              </a:lnSpc>
+              <a:spcAft>
+                <a:spcPts val="300"/>
+              </a:spcAft>
+            </a:pPr>
+            <a:r>
+              <a:rPr sz="1250" b="0">
+                <a:solidFill>
+                  <a:srgbClr val="1C2A33"/>
+                </a:solidFill>
+                <a:latin typeface="楷体"/>
+                <a:ea typeface="楷体"/>
+                <a:cs typeface="楷体"/>
+              </a:rPr>
+              <a:t>佛狸祠(敌踪)</a:t>
+            </a:r>
+          </a:p>
+          <a:p>
+            <a:pPr algn="l">
+              <a:lnSpc>
+                <a:spcPct val="135000"/>
+              </a:lnSpc>
+              <a:spcAft>
+                <a:spcPts val="300"/>
+              </a:spcAft>
+            </a:pPr>
+            <a:r>
+              <a:rPr sz="1250" b="0">
+                <a:solidFill>
+                  <a:srgbClr val="1C2A33"/>
+                </a:solidFill>
+                <a:latin typeface="楷体"/>
+                <a:ea typeface="楷体"/>
+                <a:cs typeface="楷体"/>
+              </a:rPr>
+              <a:t>廉颇(自比老)</a:t>
+            </a:r>
+          </a:p>
+          <a:p>
+            <a:pPr algn="l">
+              <a:lnSpc>
+                <a:spcPct val="135000"/>
+              </a:lnSpc>
+              <a:spcAft>
+                <a:spcPts val="300"/>
+              </a:spcAft>
+            </a:pPr>
+            <a:r>
+              <a:rPr sz="1250" b="0">
+                <a:solidFill>
+                  <a:srgbClr val="1C2A33"/>
+                </a:solidFill>
+                <a:latin typeface="楷体"/>
+                <a:ea typeface="楷体"/>
+                <a:cs typeface="楷体"/>
+              </a:rPr>
+              <a:t>→借古讽今</a:t>
+            </a:r>
+          </a:p>
+        </p:txBody>
+      </p:sp>
+      <p:sp>
+        <p:nvSpPr>
+          <p:cNvPr id="8" name="TextBox 7"/>
+          <p:cNvSpPr txBox="1"/>
+          <p:nvPr/>
+        </p:nvSpPr>
+        <p:spPr>
+          <a:xfrm>
+            <a:off x="6095847" y="2148840"/>
+            <a:ext cx="4907127" cy="4206240"/>
+          </a:xfrm>
+          <a:prstGeom prst="rect">
+            <a:avLst/>
+          </a:prstGeom>
+          <a:noFill/>
+        </p:spPr>
+        <p:txBody>
+          <a:bodyPr wrap="square" anchor="t" lIns="0" rIns="0" tIns="0" bIns="0">
+            <a:spAutoFit/>
+          </a:bodyPr>
+          <a:lstStyle/>
+          <a:p>
+            <a:pPr algn="l">
+              <a:lnSpc>
+                <a:spcPct val="135000"/>
+              </a:lnSpc>
+              <a:spcAft>
+                <a:spcPts val="300"/>
+              </a:spcAft>
+            </a:pPr>
+            <a:r>
+              <a:rPr sz="1250" b="0">
+                <a:solidFill>
+                  <a:srgbClr val="1C2A33"/>
+                </a:solidFill>
+                <a:latin typeface="楷体"/>
+                <a:ea typeface="楷体"/>
+                <a:cs typeface="楷体"/>
+              </a:rPr>
+              <a:t>【声声慢】七叠字</a:t>
+            </a:r>
+          </a:p>
+          <a:p>
+            <a:pPr algn="l">
+              <a:lnSpc>
+                <a:spcPct val="135000"/>
+              </a:lnSpc>
+              <a:spcAft>
+                <a:spcPts val="300"/>
+              </a:spcAft>
+            </a:pPr>
+            <a:r>
+              <a:rPr sz="1250" b="0">
+                <a:solidFill>
+                  <a:srgbClr val="1C2A33"/>
+                </a:solidFill>
+                <a:latin typeface="楷体"/>
+                <a:ea typeface="楷体"/>
+                <a:cs typeface="楷体"/>
+              </a:rPr>
+              <a:t>寻觅→冷清→凄惨</a:t>
+            </a:r>
+          </a:p>
+          <a:p>
+            <a:pPr algn="l">
+              <a:lnSpc>
+                <a:spcPct val="135000"/>
+              </a:lnSpc>
+              <a:spcAft>
+                <a:spcPts val="300"/>
+              </a:spcAft>
+            </a:pPr>
+            <a:r>
+              <a:rPr sz="1250" b="0">
+                <a:solidFill>
+                  <a:srgbClr val="1C2A33"/>
+                </a:solidFill>
+                <a:latin typeface="楷体"/>
+                <a:ea typeface="楷体"/>
+                <a:cs typeface="楷体"/>
+              </a:rPr>
+              <a:t>动作→环境→心理</a:t>
+            </a:r>
+          </a:p>
+          <a:p>
+            <a:pPr algn="l">
+              <a:lnSpc>
+                <a:spcPct val="135000"/>
+              </a:lnSpc>
+              <a:spcAft>
+                <a:spcPts val="300"/>
+              </a:spcAft>
+            </a:pPr>
+            <a:r>
+              <a:rPr sz="1250" b="0">
+                <a:solidFill>
+                  <a:srgbClr val="1C2A33"/>
+                </a:solidFill>
+                <a:latin typeface="楷体"/>
+                <a:ea typeface="楷体"/>
+                <a:cs typeface="楷体"/>
+              </a:rPr>
+              <a:t>→愁递进</a:t>
+            </a:r>
+          </a:p>
+          <a:p>
+            <a:pPr algn="l">
+              <a:lnSpc>
+                <a:spcPct val="135000"/>
+              </a:lnSpc>
+              <a:spcAft>
+                <a:spcPts val="300"/>
+              </a:spcAft>
+            </a:pPr>
+            <a:r>
+              <a:rPr sz="1250" b="0">
+                <a:solidFill>
+                  <a:srgbClr val="1C2A33"/>
+                </a:solidFill>
+                <a:latin typeface="楷体"/>
+                <a:ea typeface="楷体"/>
+                <a:cs typeface="楷体"/>
+              </a:rPr>
+              <a:t>【比较】</a:t>
+            </a:r>
+          </a:p>
+          <a:p>
+            <a:pPr algn="l">
+              <a:lnSpc>
+                <a:spcPct val="135000"/>
+              </a:lnSpc>
+              <a:spcAft>
+                <a:spcPts val="300"/>
+              </a:spcAft>
+            </a:pPr>
+            <a:r>
+              <a:rPr sz="1250" b="0">
+                <a:solidFill>
+                  <a:srgbClr val="1C2A33"/>
+                </a:solidFill>
+                <a:latin typeface="楷体"/>
+                <a:ea typeface="楷体"/>
+                <a:cs typeface="楷体"/>
+              </a:rPr>
+              <a:t>题材:家国/自我</a:t>
+            </a:r>
+          </a:p>
+          <a:p>
+            <a:pPr algn="l">
+              <a:lnSpc>
+                <a:spcPct val="135000"/>
+              </a:lnSpc>
+              <a:spcAft>
+                <a:spcPts val="300"/>
+              </a:spcAft>
+            </a:pPr>
+            <a:r>
+              <a:rPr sz="1250" b="0">
+                <a:solidFill>
+                  <a:srgbClr val="1C2A33"/>
+                </a:solidFill>
+                <a:latin typeface="楷体"/>
+                <a:ea typeface="楷体"/>
+                <a:cs typeface="楷体"/>
+              </a:rPr>
+              <a:t>手法:用典/白描</a:t>
+            </a:r>
+          </a:p>
+          <a:p>
+            <a:pPr algn="l">
+              <a:lnSpc>
+                <a:spcPct val="135000"/>
+              </a:lnSpc>
+              <a:spcAft>
+                <a:spcPts val="300"/>
+              </a:spcAft>
+            </a:pPr>
+            <a:r>
+              <a:rPr sz="1250" b="0">
+                <a:solidFill>
+                  <a:srgbClr val="1C2A33"/>
+                </a:solidFill>
+                <a:latin typeface="楷体"/>
+                <a:ea typeface="楷体"/>
+                <a:cs typeface="楷体"/>
+              </a:rPr>
+              <a:t>风格:豪放/婉约</a:t>
+            </a:r>
+          </a:p>
+          <a:p>
+            <a:pPr algn="l">
+              <a:lnSpc>
+                <a:spcPct val="135000"/>
+              </a:lnSpc>
+              <a:spcAft>
+                <a:spcPts val="300"/>
+              </a:spcAft>
+            </a:pPr>
+            <a:r>
+              <a:rPr sz="1250" b="0">
+                <a:solidFill>
+                  <a:srgbClr val="1C2A33"/>
+                </a:solidFill>
+                <a:latin typeface="楷体"/>
+                <a:ea typeface="楷体"/>
+                <a:cs typeface="楷体"/>
+              </a:rPr>
+              <a:t>交融(非二分)</a:t>
+            </a:r>
+          </a:p>
+        </p:txBody>
+      </p:sp>
+      <p:sp>
+        <p:nvSpPr>
+          <p:cNvPr id="9" name="TextBox 8"/>
           <p:cNvSpPr txBox="1"/>
           <p:nvPr/>
         </p:nvSpPr>
@@ -7689,13 +8583,13 @@
             <a:r>
               <a:rPr sz="1300" b="1">
                 <a:solidFill>
-                  <a:srgbClr val="2E7D6B"/>
+                  <a:srgbClr val="B23A2A"/>
                 </a:solidFill>
                 <a:latin typeface="微软雅黑"/>
                 <a:ea typeface="微软雅黑"/>
                 <a:cs typeface="微软雅黑"/>
               </a:rPr>
-              <a:t>分层作业</a:t>
+              <a:t>作业 · 分层</a:t>
             </a:r>
           </a:p>
         </p:txBody>
@@ -7710,6 +8604,318 @@
           <a:xfrm>
             <a:off x="640080" y="1097280"/>
             <a:ext cx="822960" cy="30480"/>
+          </a:xfrm>
+          <a:prstGeom prst="rect">
+            <a:avLst/>
+          </a:prstGeom>
+          <a:solidFill>
+            <a:srgbClr val="B23A2A"/>
+          </a:solidFill>
+          <a:ln>
+            <a:noFill/>
+          </a:ln>
+          <a:effectLst/>
+        </p:spPr>
+        <p:style>
+          <a:lnRef idx="1">
+            <a:schemeClr val="accent1"/>
+          </a:lnRef>
+          <a:fillRef idx="3">
+            <a:schemeClr val="accent1"/>
+          </a:fillRef>
+          <a:effectRef idx="2">
+            <a:schemeClr val="accent1"/>
+          </a:effectRef>
+          <a:fontRef idx="minor">
+            <a:schemeClr val="lt1"/>
+          </a:fontRef>
+        </p:style>
+        <p:txBody>
+          <a:bodyPr rtlCol="0" anchor="ctr"/>
+          <a:lstStyle/>
+          <a:p>
+            <a:pPr algn="ctr"/>
+          </a:p>
+        </p:txBody>
+      </p:sp>
+      <p:sp>
+        <p:nvSpPr>
+          <p:cNvPr id="5" name="TextBox 4"/>
+          <p:cNvSpPr txBox="1"/>
+          <p:nvPr/>
+        </p:nvSpPr>
+        <p:spPr>
+          <a:xfrm>
+            <a:off x="640080" y="1325880"/>
+            <a:ext cx="10911535" cy="548640"/>
+          </a:xfrm>
+          <a:prstGeom prst="rect">
+            <a:avLst/>
+          </a:prstGeom>
+          <a:noFill/>
+        </p:spPr>
+        <p:txBody>
+          <a:bodyPr wrap="square" anchor="t" lIns="0" rIns="0" tIns="0" bIns="0">
+            <a:spAutoFit/>
+          </a:bodyPr>
+          <a:lstStyle/>
+          <a:p>
+            <a:pPr algn="l">
+              <a:lnSpc>
+                <a:spcPct val="145000"/>
+              </a:lnSpc>
+              <a:spcAft>
+                <a:spcPts val="400"/>
+              </a:spcAft>
+            </a:pPr>
+            <a:r>
+              <a:rPr sz="2600" b="1">
+                <a:solidFill>
+                  <a:srgbClr val="1C2A33"/>
+                </a:solidFill>
+                <a:latin typeface="楷体"/>
+                <a:ea typeface="楷体"/>
+                <a:cs typeface="楷体"/>
+              </a:rPr>
+              <a:t>基础 · 提升</a:t>
+            </a:r>
+          </a:p>
+        </p:txBody>
+      </p:sp>
+      <p:sp>
+        <p:nvSpPr>
+          <p:cNvPr id="6" name="Rounded Rectangle 5"/>
+          <p:cNvSpPr/>
+          <p:nvPr/>
+        </p:nvSpPr>
+        <p:spPr>
+          <a:xfrm>
+            <a:off x="640080" y="2194560"/>
+            <a:ext cx="5272887" cy="4023360"/>
+          </a:xfrm>
+          <a:prstGeom prst="roundRect">
+            <a:avLst/>
+          </a:prstGeom>
+          <a:solidFill>
+            <a:srgbClr val="FFFFFF"/>
+          </a:solidFill>
+          <a:ln w="20320">
+            <a:solidFill>
+              <a:srgbClr val="B23A2A"/>
+            </a:solidFill>
+          </a:ln>
+          <a:effectLst/>
+        </p:spPr>
+        <p:style>
+          <a:lnRef idx="1">
+            <a:schemeClr val="accent1"/>
+          </a:lnRef>
+          <a:fillRef idx="3">
+            <a:schemeClr val="accent1"/>
+          </a:fillRef>
+          <a:effectRef idx="2">
+            <a:schemeClr val="accent1"/>
+          </a:effectRef>
+          <a:fontRef idx="minor">
+            <a:schemeClr val="lt1"/>
+          </a:fontRef>
+        </p:style>
+        <p:txBody>
+          <a:bodyPr rtlCol="0" anchor="ctr"/>
+          <a:lstStyle/>
+          <a:p>
+            <a:pPr algn="ctr"/>
+          </a:p>
+        </p:txBody>
+      </p:sp>
+      <p:sp>
+        <p:nvSpPr>
+          <p:cNvPr id="7" name="Rectangle 6"/>
+          <p:cNvSpPr/>
+          <p:nvPr/>
+        </p:nvSpPr>
+        <p:spPr>
+          <a:xfrm>
+            <a:off x="640080" y="2194560"/>
+            <a:ext cx="5272887" cy="548640"/>
+          </a:xfrm>
+          <a:prstGeom prst="rect">
+            <a:avLst/>
+          </a:prstGeom>
+          <a:solidFill>
+            <a:srgbClr val="B23A2A"/>
+          </a:solidFill>
+          <a:ln>
+            <a:noFill/>
+          </a:ln>
+          <a:effectLst/>
+        </p:spPr>
+        <p:style>
+          <a:lnRef idx="1">
+            <a:schemeClr val="accent1"/>
+          </a:lnRef>
+          <a:fillRef idx="3">
+            <a:schemeClr val="accent1"/>
+          </a:fillRef>
+          <a:effectRef idx="2">
+            <a:schemeClr val="accent1"/>
+          </a:effectRef>
+          <a:fontRef idx="minor">
+            <a:schemeClr val="lt1"/>
+          </a:fontRef>
+        </p:style>
+        <p:txBody>
+          <a:bodyPr rtlCol="0" anchor="ctr"/>
+          <a:lstStyle/>
+          <a:p>
+            <a:pPr algn="ctr"/>
+          </a:p>
+        </p:txBody>
+      </p:sp>
+      <p:sp>
+        <p:nvSpPr>
+          <p:cNvPr id="8" name="TextBox 7"/>
+          <p:cNvSpPr txBox="1"/>
+          <p:nvPr/>
+        </p:nvSpPr>
+        <p:spPr>
+          <a:xfrm>
+            <a:off x="640080" y="2304288"/>
+            <a:ext cx="5272887" cy="365760"/>
+          </a:xfrm>
+          <a:prstGeom prst="rect">
+            <a:avLst/>
+          </a:prstGeom>
+          <a:noFill/>
+        </p:spPr>
+        <p:txBody>
+          <a:bodyPr wrap="square" anchor="t" lIns="0" rIns="0" tIns="0" bIns="0">
+            <a:spAutoFit/>
+          </a:bodyPr>
+          <a:lstStyle/>
+          <a:p>
+            <a:pPr algn="ctr">
+              <a:lnSpc>
+                <a:spcPct val="145000"/>
+              </a:lnSpc>
+              <a:spcAft>
+                <a:spcPts val="400"/>
+              </a:spcAft>
+            </a:pPr>
+            <a:r>
+              <a:rPr sz="1600" b="1">
+                <a:solidFill>
+                  <a:srgbClr val="FFFFFF"/>
+                </a:solidFill>
+                <a:latin typeface="微软雅黑"/>
+                <a:ea typeface="微软雅黑"/>
+                <a:cs typeface="微软雅黑"/>
+              </a:rPr>
+              <a:t>基础 · 必做</a:t>
+            </a:r>
+          </a:p>
+        </p:txBody>
+      </p:sp>
+      <p:sp>
+        <p:nvSpPr>
+          <p:cNvPr id="9" name="TextBox 8"/>
+          <p:cNvSpPr txBox="1"/>
+          <p:nvPr/>
+        </p:nvSpPr>
+        <p:spPr>
+          <a:xfrm>
+            <a:off x="914400" y="2971800"/>
+            <a:ext cx="4724247" cy="3063240"/>
+          </a:xfrm>
+          <a:prstGeom prst="rect">
+            <a:avLst/>
+          </a:prstGeom>
+          <a:noFill/>
+        </p:spPr>
+        <p:txBody>
+          <a:bodyPr wrap="square" anchor="t" lIns="0" rIns="0" tIns="0" bIns="0">
+            <a:spAutoFit/>
+          </a:bodyPr>
+          <a:lstStyle/>
+          <a:p>
+            <a:pPr algn="l">
+              <a:lnSpc>
+                <a:spcPct val="150000"/>
+              </a:lnSpc>
+              <a:spcAft>
+                <a:spcPts val="400"/>
+              </a:spcAft>
+            </a:pPr>
+            <a:r>
+              <a:rPr sz="1300" b="0">
+                <a:solidFill>
+                  <a:srgbClr val="1C2A33"/>
+                </a:solidFill>
+                <a:latin typeface="楷体"/>
+                <a:ea typeface="楷体"/>
+                <a:cs typeface="楷体"/>
+              </a:rPr>
+              <a:t>1. 背诵《声声慢》。2. 写出《永遇乐》中你理解的三个典故及其用意。</a:t>
+            </a:r>
+          </a:p>
+        </p:txBody>
+      </p:sp>
+      <p:sp>
+        <p:nvSpPr>
+          <p:cNvPr id="10" name="Rounded Rectangle 9"/>
+          <p:cNvSpPr/>
+          <p:nvPr/>
+        </p:nvSpPr>
+        <p:spPr>
+          <a:xfrm>
+            <a:off x="6278727" y="2194560"/>
+            <a:ext cx="5272887" cy="4023360"/>
+          </a:xfrm>
+          <a:prstGeom prst="roundRect">
+            <a:avLst/>
+          </a:prstGeom>
+          <a:solidFill>
+            <a:srgbClr val="FFFFFF"/>
+          </a:solidFill>
+          <a:ln w="20320">
+            <a:solidFill>
+              <a:srgbClr val="2E7D6B"/>
+            </a:solidFill>
+          </a:ln>
+          <a:effectLst/>
+        </p:spPr>
+        <p:style>
+          <a:lnRef idx="1">
+            <a:schemeClr val="accent1"/>
+          </a:lnRef>
+          <a:fillRef idx="3">
+            <a:schemeClr val="accent1"/>
+          </a:fillRef>
+          <a:effectRef idx="2">
+            <a:schemeClr val="accent1"/>
+          </a:effectRef>
+          <a:fontRef idx="minor">
+            <a:schemeClr val="lt1"/>
+          </a:fontRef>
+        </p:style>
+        <p:txBody>
+          <a:bodyPr rtlCol="0" anchor="ctr"/>
+          <a:lstStyle/>
+          <a:p>
+            <a:pPr algn="ctr"/>
+          </a:p>
+        </p:txBody>
+      </p:sp>
+      <p:sp>
+        <p:nvSpPr>
+          <p:cNvPr id="11" name="Rectangle 10"/>
+          <p:cNvSpPr/>
+          <p:nvPr/>
+        </p:nvSpPr>
+        <p:spPr>
+          <a:xfrm>
+            <a:off x="6278727" y="2194560"/>
+            <a:ext cx="5272887" cy="548640"/>
           </a:xfrm>
           <a:prstGeom prst="rect">
             <a:avLst/>
@@ -7746,60 +8952,14 @@
       </p:sp>
       <p:sp>
         <p:nvSpPr>
-          <p:cNvPr id="5" name="Rounded Rectangle 4"/>
-          <p:cNvSpPr/>
-          <p:nvPr/>
-        </p:nvSpPr>
-        <p:spPr>
-          <a:xfrm>
-            <a:off x="640080" y="1417320"/>
-            <a:ext cx="10911535" cy="1417320"/>
-          </a:xfrm>
-          <a:prstGeom prst="roundRect">
-            <a:avLst/>
-          </a:prstGeom>
-          <a:solidFill>
-            <a:srgbClr val="FFFFFF"/>
-          </a:solidFill>
-          <a:ln w="22860">
-            <a:solidFill>
-              <a:srgbClr val="2E7D6B"/>
-            </a:solidFill>
-          </a:ln>
-          <a:effectLst/>
-        </p:spPr>
-        <p:style>
-          <a:lnRef idx="1">
-            <a:schemeClr val="accent1"/>
-          </a:lnRef>
-          <a:fillRef idx="3">
-            <a:schemeClr val="accent1"/>
-          </a:fillRef>
-          <a:effectRef idx="2">
-            <a:schemeClr val="accent1"/>
-          </a:effectRef>
-          <a:fontRef idx="minor">
-            <a:schemeClr val="lt1"/>
-          </a:fontRef>
-        </p:style>
-        <p:txBody>
-          <a:bodyPr rtlCol="0" anchor="ctr"/>
-          <a:lstStyle/>
-          <a:p>
-            <a:pPr algn="ctr"/>
-          </a:p>
-        </p:txBody>
-      </p:sp>
-      <p:sp>
-        <p:nvSpPr>
-          <p:cNvPr id="6" name="TextBox 5"/>
+          <p:cNvPr id="12" name="TextBox 11"/>
           <p:cNvSpPr txBox="1"/>
           <p:nvPr/>
         </p:nvSpPr>
         <p:spPr>
           <a:xfrm>
-            <a:off x="1371600" y="1527048"/>
-            <a:ext cx="9997135" cy="457200"/>
+            <a:off x="6278727" y="2304288"/>
+            <a:ext cx="5272887" cy="365760"/>
           </a:xfrm>
           <a:prstGeom prst="rect">
             <a:avLst/>
@@ -7812,35 +8972,38 @@
           </a:bodyPr>
           <a:lstStyle/>
           <a:p>
-            <a:pPr algn="l">
+            <a:pPr algn="ctr">
               <a:lnSpc>
-                <a:spcPct val="110000"/>
+                <a:spcPct val="145000"/>
               </a:lnSpc>
+              <a:spcAft>
+                <a:spcPts val="400"/>
+              </a:spcAft>
             </a:pPr>
             <a:r>
               <a:rPr sz="1600" b="1">
                 <a:solidFill>
-                  <a:srgbClr val="1C2A33"/>
+                  <a:srgbClr val="FFFFFF"/>
                 </a:solidFill>
                 <a:latin typeface="微软雅黑"/>
                 <a:ea typeface="微软雅黑"/>
                 <a:cs typeface="微软雅黑"/>
               </a:rPr>
-              <a:t/>
-            </a:r>
-          </a:p>
-        </p:txBody>
-      </p:sp>
-      <p:sp>
-        <p:nvSpPr>
-          <p:cNvPr id="7" name="TextBox 6"/>
+              <a:t>提升 · 选做</a:t>
+            </a:r>
+          </a:p>
+        </p:txBody>
+      </p:sp>
+      <p:sp>
+        <p:nvSpPr>
+          <p:cNvPr id="13" name="TextBox 12"/>
           <p:cNvSpPr txBox="1"/>
           <p:nvPr/>
         </p:nvSpPr>
         <p:spPr>
           <a:xfrm>
-            <a:off x="1371600" y="1965960"/>
-            <a:ext cx="9997135" cy="777240"/>
+            <a:off x="6553047" y="2971800"/>
+            <a:ext cx="4724247" cy="3063240"/>
           </a:xfrm>
           <a:prstGeom prst="rect">
             <a:avLst/>
@@ -7855,11 +9018,14 @@
           <a:p>
             <a:pPr algn="l">
               <a:lnSpc>
-                <a:spcPct val="128000"/>
+                <a:spcPct val="150000"/>
               </a:lnSpc>
+              <a:spcAft>
+                <a:spcPts val="400"/>
+              </a:spcAft>
             </a:pPr>
             <a:r>
-              <a:rPr sz="1200" b="0">
+              <a:rPr sz="1300" b="0">
                 <a:solidFill>
                   <a:srgbClr val="1C2A33"/>
                 </a:solidFill>
@@ -7867,142 +9033,14 @@
                 <a:ea typeface="楷体"/>
                 <a:cs typeface="楷体"/>
               </a:rPr>
-              <a:t>【基础作业】1. 背诵《声声慢》。2. 写出《永遇乐》中你理解的三个典故及其用意。</a:t>
-            </a:r>
-          </a:p>
-        </p:txBody>
-      </p:sp>
-      <p:sp>
-        <p:nvSpPr>
-          <p:cNvPr id="8" name="Rounded Rectangle 7"/>
-          <p:cNvSpPr/>
-          <p:nvPr/>
-        </p:nvSpPr>
-        <p:spPr>
-          <a:xfrm>
-            <a:off x="640080" y="2971800"/>
-            <a:ext cx="10911535" cy="1417320"/>
-          </a:xfrm>
-          <a:prstGeom prst="roundRect">
-            <a:avLst/>
-          </a:prstGeom>
-          <a:solidFill>
-            <a:srgbClr val="FFFFFF"/>
-          </a:solidFill>
-          <a:ln w="22860">
-            <a:solidFill>
-              <a:srgbClr val="2E7D6B"/>
-            </a:solidFill>
-          </a:ln>
-          <a:effectLst/>
-        </p:spPr>
-        <p:style>
-          <a:lnRef idx="1">
-            <a:schemeClr val="accent1"/>
-          </a:lnRef>
-          <a:fillRef idx="3">
-            <a:schemeClr val="accent1"/>
-          </a:fillRef>
-          <a:effectRef idx="2">
-            <a:schemeClr val="accent1"/>
-          </a:effectRef>
-          <a:fontRef idx="minor">
-            <a:schemeClr val="lt1"/>
-          </a:fontRef>
-        </p:style>
-        <p:txBody>
-          <a:bodyPr rtlCol="0" anchor="ctr"/>
-          <a:lstStyle/>
-          <a:p>
-            <a:pPr algn="ctr"/>
-          </a:p>
-        </p:txBody>
-      </p:sp>
-      <p:sp>
-        <p:nvSpPr>
-          <p:cNvPr id="9" name="TextBox 8"/>
-          <p:cNvSpPr txBox="1"/>
-          <p:nvPr/>
-        </p:nvSpPr>
-        <p:spPr>
-          <a:xfrm>
-            <a:off x="1371600" y="3081528"/>
-            <a:ext cx="9997135" cy="457200"/>
-          </a:xfrm>
-          <a:prstGeom prst="rect">
-            <a:avLst/>
-          </a:prstGeom>
-          <a:noFill/>
-        </p:spPr>
-        <p:txBody>
-          <a:bodyPr wrap="square" anchor="t" lIns="0" rIns="0" tIns="0" bIns="0">
-            <a:spAutoFit/>
-          </a:bodyPr>
-          <a:lstStyle/>
-          <a:p>
-            <a:pPr algn="l">
-              <a:lnSpc>
-                <a:spcPct val="110000"/>
-              </a:lnSpc>
-            </a:pPr>
-            <a:r>
-              <a:rPr sz="1600" b="1">
-                <a:solidFill>
-                  <a:srgbClr val="1C2A33"/>
-                </a:solidFill>
-                <a:latin typeface="微软雅黑"/>
-                <a:ea typeface="微软雅黑"/>
-                <a:cs typeface="微软雅黑"/>
-              </a:rPr>
-              <a:t/>
-            </a:r>
-          </a:p>
-        </p:txBody>
-      </p:sp>
-      <p:sp>
-        <p:nvSpPr>
-          <p:cNvPr id="10" name="TextBox 9"/>
-          <p:cNvSpPr txBox="1"/>
-          <p:nvPr/>
-        </p:nvSpPr>
-        <p:spPr>
-          <a:xfrm>
-            <a:off x="1371600" y="3520440"/>
-            <a:ext cx="9997135" cy="777240"/>
-          </a:xfrm>
-          <a:prstGeom prst="rect">
-            <a:avLst/>
-          </a:prstGeom>
-          <a:noFill/>
-        </p:spPr>
-        <p:txBody>
-          <a:bodyPr wrap="square" anchor="t" lIns="0" rIns="0" tIns="0" bIns="0">
-            <a:spAutoFit/>
-          </a:bodyPr>
-          <a:lstStyle/>
-          <a:p>
-            <a:pPr algn="l">
-              <a:lnSpc>
-                <a:spcPct val="128000"/>
-              </a:lnSpc>
-            </a:pPr>
-            <a:r>
-              <a:rPr sz="1200" b="0">
-                <a:solidFill>
-                  <a:srgbClr val="1C2A33"/>
-                </a:solidFill>
-                <a:latin typeface="楷体"/>
-                <a:ea typeface="楷体"/>
-                <a:cs typeface="楷体"/>
-              </a:rPr>
-              <a:t>【提高作业】写一段200字「豪放与婉约的对话」，要求：①各引一句原词；②点明风格差异；③说一处风格交融。</a:t>
-            </a:r>
-          </a:p>
-        </p:txBody>
-      </p:sp>
-      <p:sp>
-        <p:nvSpPr>
-          <p:cNvPr id="11" name="TextBox 10"/>
+              <a:t>写一段200字「豪放与婉约的对话」，要求：①各引一句原词；②点明风格差异；③说一处风格交融。 【——用】基础2示例：孙权——在京口抗曹的英雄，慨叹当世无英雄；刘裕——北伐功业，向往收复；廉颇——老当益壮，自比报国无门。提高作业评价：引原句+差异=合格；指出交融=良好；能辩证风格光谱=优秀。</a:t>
+            </a:r>
+          </a:p>
+        </p:txBody>
+      </p:sp>
+      <p:sp>
+        <p:nvSpPr>
+          <p:cNvPr id="14" name="TextBox 13"/>
           <p:cNvSpPr txBox="1"/>
           <p:nvPr/>
         </p:nvSpPr>
@@ -8129,13 +9167,13 @@
             <a:r>
               <a:rPr sz="1300" b="1">
                 <a:solidFill>
-                  <a:srgbClr val="C8A86B"/>
+                  <a:srgbClr val="B23A2A"/>
                 </a:solidFill>
                 <a:latin typeface="微软雅黑"/>
                 <a:ea typeface="微软雅黑"/>
                 <a:cs typeface="微软雅黑"/>
               </a:rPr>
-              <a:t>本课小结</a:t>
+              <a:t>单元小结 · 反思引导</a:t>
             </a:r>
           </a:p>
         </p:txBody>
@@ -8150,6 +9188,550 @@
           <a:xfrm>
             <a:off x="640080" y="1097280"/>
             <a:ext cx="822960" cy="30480"/>
+          </a:xfrm>
+          <a:prstGeom prst="rect">
+            <a:avLst/>
+          </a:prstGeom>
+          <a:solidFill>
+            <a:srgbClr val="B23A2A"/>
+          </a:solidFill>
+          <a:ln>
+            <a:noFill/>
+          </a:ln>
+          <a:effectLst/>
+        </p:spPr>
+        <p:style>
+          <a:lnRef idx="1">
+            <a:schemeClr val="accent1"/>
+          </a:lnRef>
+          <a:fillRef idx="3">
+            <a:schemeClr val="accent1"/>
+          </a:fillRef>
+          <a:effectRef idx="2">
+            <a:schemeClr val="accent1"/>
+          </a:effectRef>
+          <a:fontRef idx="minor">
+            <a:schemeClr val="lt1"/>
+          </a:fontRef>
+        </p:style>
+        <p:txBody>
+          <a:bodyPr rtlCol="0" anchor="ctr"/>
+          <a:lstStyle/>
+          <a:p>
+            <a:pPr algn="ctr"/>
+          </a:p>
+        </p:txBody>
+      </p:sp>
+      <p:sp>
+        <p:nvSpPr>
+          <p:cNvPr id="5" name="TextBox 4"/>
+          <p:cNvSpPr txBox="1"/>
+          <p:nvPr/>
+        </p:nvSpPr>
+        <p:spPr>
+          <a:xfrm>
+            <a:off x="640080" y="1325880"/>
+            <a:ext cx="10911535" cy="640080"/>
+          </a:xfrm>
+          <a:prstGeom prst="rect">
+            <a:avLst/>
+          </a:prstGeom>
+          <a:noFill/>
+        </p:spPr>
+        <p:txBody>
+          <a:bodyPr wrap="square" anchor="t" lIns="0" rIns="0" tIns="0" bIns="0">
+            <a:spAutoFit/>
+          </a:bodyPr>
+          <a:lstStyle/>
+          <a:p>
+            <a:pPr algn="l">
+              <a:lnSpc>
+                <a:spcPct val="145000"/>
+              </a:lnSpc>
+              <a:spcAft>
+                <a:spcPts val="400"/>
+              </a:spcAft>
+            </a:pPr>
+            <a:r>
+              <a:rPr sz="2600" b="1">
+                <a:solidFill>
+                  <a:srgbClr val="1C2A33"/>
+                </a:solidFill>
+                <a:latin typeface="楷体"/>
+                <a:ea typeface="楷体"/>
+                <a:cs typeface="楷体"/>
+              </a:rPr>
+              <a:t>回望本单元：生命的诗意</a:t>
+            </a:r>
+          </a:p>
+        </p:txBody>
+      </p:sp>
+      <p:sp>
+        <p:nvSpPr>
+          <p:cNvPr id="6" name="Rounded Rectangle 5"/>
+          <p:cNvSpPr/>
+          <p:nvPr/>
+        </p:nvSpPr>
+        <p:spPr>
+          <a:xfrm>
+            <a:off x="640080" y="2057400"/>
+            <a:ext cx="5227167" cy="4206240"/>
+          </a:xfrm>
+          <a:prstGeom prst="roundRect">
+            <a:avLst/>
+          </a:prstGeom>
+          <a:solidFill>
+            <a:srgbClr val="FFFFFF"/>
+          </a:solidFill>
+          <a:ln w="20320">
+            <a:solidFill>
+              <a:srgbClr val="2E7D6B"/>
+            </a:solidFill>
+          </a:ln>
+          <a:effectLst/>
+        </p:spPr>
+        <p:style>
+          <a:lnRef idx="1">
+            <a:schemeClr val="accent1"/>
+          </a:lnRef>
+          <a:fillRef idx="3">
+            <a:schemeClr val="accent1"/>
+          </a:fillRef>
+          <a:effectRef idx="2">
+            <a:schemeClr val="accent1"/>
+          </a:effectRef>
+          <a:fontRef idx="minor">
+            <a:schemeClr val="lt1"/>
+          </a:fontRef>
+        </p:style>
+        <p:txBody>
+          <a:bodyPr rtlCol="0" anchor="ctr"/>
+          <a:lstStyle/>
+          <a:p>
+            <a:pPr algn="ctr"/>
+          </a:p>
+        </p:txBody>
+      </p:sp>
+      <p:sp>
+        <p:nvSpPr>
+          <p:cNvPr id="7" name="TextBox 6"/>
+          <p:cNvSpPr txBox="1"/>
+          <p:nvPr/>
+        </p:nvSpPr>
+        <p:spPr>
+          <a:xfrm>
+            <a:off x="914400" y="2212848"/>
+            <a:ext cx="4678527" cy="457200"/>
+          </a:xfrm>
+          <a:prstGeom prst="rect">
+            <a:avLst/>
+          </a:prstGeom>
+          <a:noFill/>
+        </p:spPr>
+        <p:txBody>
+          <a:bodyPr wrap="square" anchor="t" lIns="0" rIns="0" tIns="0" bIns="0">
+            <a:spAutoFit/>
+          </a:bodyPr>
+          <a:lstStyle/>
+          <a:p>
+            <a:pPr algn="l">
+              <a:lnSpc>
+                <a:spcPct val="145000"/>
+              </a:lnSpc>
+              <a:spcAft>
+                <a:spcPts val="400"/>
+              </a:spcAft>
+            </a:pPr>
+            <a:r>
+              <a:rPr sz="1600" b="1">
+                <a:solidFill>
+                  <a:srgbClr val="2E7D6B"/>
+                </a:solidFill>
+                <a:latin typeface="楷体"/>
+                <a:ea typeface="楷体"/>
+                <a:cs typeface="楷体"/>
+              </a:rPr>
+              <a:t>反思引导</a:t>
+            </a:r>
+          </a:p>
+        </p:txBody>
+      </p:sp>
+      <p:sp>
+        <p:nvSpPr>
+          <p:cNvPr id="8" name="TextBox 7"/>
+          <p:cNvSpPr txBox="1"/>
+          <p:nvPr/>
+        </p:nvSpPr>
+        <p:spPr>
+          <a:xfrm>
+            <a:off x="914400" y="2743200"/>
+            <a:ext cx="4678527" cy="3383280"/>
+          </a:xfrm>
+          <a:prstGeom prst="rect">
+            <a:avLst/>
+          </a:prstGeom>
+          <a:noFill/>
+        </p:spPr>
+        <p:txBody>
+          <a:bodyPr wrap="square" anchor="t" lIns="0" rIns="0" tIns="0" bIns="0">
+            <a:spAutoFit/>
+          </a:bodyPr>
+          <a:lstStyle/>
+          <a:p>
+            <a:pPr algn="l">
+              <a:lnSpc>
+                <a:spcPct val="150000"/>
+              </a:lnSpc>
+              <a:spcAft>
+                <a:spcPts val="1200"/>
+              </a:spcAft>
+            </a:pPr>
+            <a:r>
+              <a:rPr sz="1450" b="0">
+                <a:solidFill>
+                  <a:srgbClr val="1C2A33"/>
+                </a:solidFill>
+                <a:latin typeface="楷体"/>
+                <a:ea typeface="楷体"/>
+                <a:cs typeface="楷体"/>
+              </a:rPr>
+              <a:t>八首诗词里，哪一种生命姿态最让你共鸣？为什么？</a:t>
+            </a:r>
+          </a:p>
+          <a:p>
+            <a:pPr algn="l">
+              <a:lnSpc>
+                <a:spcPct val="150000"/>
+              </a:lnSpc>
+              <a:spcAft>
+                <a:spcPts val="1200"/>
+              </a:spcAft>
+            </a:pPr>
+            <a:r>
+              <a:rPr sz="1450" b="0">
+                <a:solidFill>
+                  <a:srgbClr val="1C2A33"/>
+                </a:solidFill>
+                <a:latin typeface="楷体"/>
+                <a:ea typeface="楷体"/>
+                <a:cs typeface="楷体"/>
+              </a:rPr>
+              <a:t>选一句原诗，说说它如何写尽一种心境。</a:t>
+            </a:r>
+          </a:p>
+          <a:p>
+            <a:pPr algn="l">
+              <a:lnSpc>
+                <a:spcPct val="150000"/>
+              </a:lnSpc>
+              <a:spcAft>
+                <a:spcPts val="1200"/>
+              </a:spcAft>
+            </a:pPr>
+            <a:r>
+              <a:rPr sz="1450" b="0">
+                <a:solidFill>
+                  <a:srgbClr val="1C2A33"/>
+                </a:solidFill>
+                <a:latin typeface="楷体"/>
+                <a:ea typeface="楷体"/>
+                <a:cs typeface="楷体"/>
+              </a:rPr>
+              <a:t>把「知人论世」的方法，用到课外的古诗词里。</a:t>
+            </a:r>
+          </a:p>
+        </p:txBody>
+      </p:sp>
+      <p:sp>
+        <p:nvSpPr>
+          <p:cNvPr id="9" name="Rounded Rectangle 8"/>
+          <p:cNvSpPr/>
+          <p:nvPr/>
+        </p:nvSpPr>
+        <p:spPr>
+          <a:xfrm>
+            <a:off x="6324447" y="2057400"/>
+            <a:ext cx="5227167" cy="4206240"/>
+          </a:xfrm>
+          <a:prstGeom prst="roundRect">
+            <a:avLst/>
+          </a:prstGeom>
+          <a:solidFill>
+            <a:srgbClr val="FFFFFF"/>
+          </a:solidFill>
+          <a:ln w="20320">
+            <a:solidFill>
+              <a:srgbClr val="C8A86B"/>
+            </a:solidFill>
+          </a:ln>
+          <a:effectLst/>
+        </p:spPr>
+        <p:style>
+          <a:lnRef idx="1">
+            <a:schemeClr val="accent1"/>
+          </a:lnRef>
+          <a:fillRef idx="3">
+            <a:schemeClr val="accent1"/>
+          </a:fillRef>
+          <a:effectRef idx="2">
+            <a:schemeClr val="accent1"/>
+          </a:effectRef>
+          <a:fontRef idx="minor">
+            <a:schemeClr val="lt1"/>
+          </a:fontRef>
+        </p:style>
+        <p:txBody>
+          <a:bodyPr rtlCol="0" anchor="ctr"/>
+          <a:lstStyle/>
+          <a:p>
+            <a:pPr algn="ctr"/>
+          </a:p>
+        </p:txBody>
+      </p:sp>
+      <p:sp>
+        <p:nvSpPr>
+          <p:cNvPr id="10" name="TextBox 9"/>
+          <p:cNvSpPr txBox="1"/>
+          <p:nvPr/>
+        </p:nvSpPr>
+        <p:spPr>
+          <a:xfrm>
+            <a:off x="6598767" y="2212848"/>
+            <a:ext cx="4678527" cy="457200"/>
+          </a:xfrm>
+          <a:prstGeom prst="rect">
+            <a:avLst/>
+          </a:prstGeom>
+          <a:noFill/>
+        </p:spPr>
+        <p:txBody>
+          <a:bodyPr wrap="square" anchor="t" lIns="0" rIns="0" tIns="0" bIns="0">
+            <a:spAutoFit/>
+          </a:bodyPr>
+          <a:lstStyle/>
+          <a:p>
+            <a:pPr algn="l">
+              <a:lnSpc>
+                <a:spcPct val="145000"/>
+              </a:lnSpc>
+              <a:spcAft>
+                <a:spcPts val="400"/>
+              </a:spcAft>
+            </a:pPr>
+            <a:r>
+              <a:rPr sz="1600" b="1">
+                <a:solidFill>
+                  <a:srgbClr val="C8A86B"/>
+                </a:solidFill>
+                <a:latin typeface="楷体"/>
+                <a:ea typeface="楷体"/>
+                <a:cs typeface="楷体"/>
+              </a:rPr>
+              <a:t>本单元核心</a:t>
+            </a:r>
+          </a:p>
+        </p:txBody>
+      </p:sp>
+      <p:sp>
+        <p:nvSpPr>
+          <p:cNvPr id="11" name="TextBox 10"/>
+          <p:cNvSpPr txBox="1"/>
+          <p:nvPr/>
+        </p:nvSpPr>
+        <p:spPr>
+          <a:xfrm>
+            <a:off x="6598767" y="2743200"/>
+            <a:ext cx="4678527" cy="3383280"/>
+          </a:xfrm>
+          <a:prstGeom prst="rect">
+            <a:avLst/>
+          </a:prstGeom>
+          <a:noFill/>
+        </p:spPr>
+        <p:txBody>
+          <a:bodyPr wrap="square" anchor="t" lIns="0" rIns="0" tIns="0" bIns="0">
+            <a:spAutoFit/>
+          </a:bodyPr>
+          <a:lstStyle/>
+          <a:p>
+            <a:pPr algn="l">
+              <a:lnSpc>
+                <a:spcPct val="140000"/>
+              </a:lnSpc>
+              <a:spcAft>
+                <a:spcPts val="200"/>
+              </a:spcAft>
+            </a:pPr>
+            <a:r>
+              <a:rPr sz="1450" b="1">
+                <a:solidFill>
+                  <a:srgbClr val="B23A2A"/>
+                </a:solidFill>
+                <a:latin typeface="微软雅黑"/>
+                <a:ea typeface="微软雅黑"/>
+                <a:cs typeface="微软雅黑"/>
+              </a:rPr>
+              <a:t>① 《永遇乐》五典</a:t>
+            </a:r>
+          </a:p>
+          <a:p>
+            <a:pPr algn="l">
+              <a:lnSpc>
+                <a:spcPct val="140000"/>
+              </a:lnSpc>
+              <a:spcAft>
+                <a:spcPts val="1000"/>
+              </a:spcAft>
+            </a:pPr>
+            <a:r>
+              <a:rPr sz="1300" b="0">
+                <a:solidFill>
+                  <a:srgbClr val="1C2A33"/>
+                </a:solidFill>
+                <a:latin typeface="楷体"/>
+                <a:ea typeface="楷体"/>
+                <a:cs typeface="楷体"/>
+              </a:rPr>
+              <a:t>孙权（英雄）、刘裕（北伐功业）、刘义隆（草率败北）、拓跋焘（敌踪）、廉颇（老当益壮）——借古讽今。</a:t>
+            </a:r>
+          </a:p>
+          <a:p>
+            <a:pPr algn="l">
+              <a:lnSpc>
+                <a:spcPct val="140000"/>
+              </a:lnSpc>
+              <a:spcAft>
+                <a:spcPts val="200"/>
+              </a:spcAft>
+            </a:pPr>
+            <a:r>
+              <a:rPr sz="1450" b="1">
+                <a:solidFill>
+                  <a:srgbClr val="B23A2A"/>
+                </a:solidFill>
+                <a:latin typeface="微软雅黑"/>
+                <a:ea typeface="微软雅黑"/>
+                <a:cs typeface="微软雅黑"/>
+              </a:rPr>
+              <a:t>② 《声声慢》叠字</a:t>
+            </a:r>
+          </a:p>
+          <a:p>
+            <a:pPr algn="l">
+              <a:lnSpc>
+                <a:spcPct val="140000"/>
+              </a:lnSpc>
+              <a:spcAft>
+                <a:spcPts val="1000"/>
+              </a:spcAft>
+            </a:pPr>
+            <a:r>
+              <a:rPr sz="1300" b="0">
+                <a:solidFill>
+                  <a:srgbClr val="1C2A33"/>
+                </a:solidFill>
+                <a:latin typeface="楷体"/>
+                <a:ea typeface="楷体"/>
+                <a:cs typeface="楷体"/>
+              </a:rPr>
+              <a:t>寻寻觅觅/冷冷清清/凄凄惨惨戚戚——七组叠字写愁之递进。</a:t>
+            </a:r>
+          </a:p>
+          <a:p>
+            <a:pPr algn="l">
+              <a:lnSpc>
+                <a:spcPct val="140000"/>
+              </a:lnSpc>
+              <a:spcAft>
+                <a:spcPts val="200"/>
+              </a:spcAft>
+            </a:pPr>
+            <a:r>
+              <a:rPr sz="1450" b="1">
+                <a:solidFill>
+                  <a:srgbClr val="B23A2A"/>
+                </a:solidFill>
+                <a:latin typeface="微软雅黑"/>
+                <a:ea typeface="微软雅黑"/>
+                <a:cs typeface="微软雅黑"/>
+              </a:rPr>
+              <a:t>③ 风格对话</a:t>
+            </a:r>
+          </a:p>
+          <a:p>
+            <a:pPr algn="l">
+              <a:lnSpc>
+                <a:spcPct val="140000"/>
+              </a:lnSpc>
+              <a:spcAft>
+                <a:spcPts val="1000"/>
+              </a:spcAft>
+            </a:pPr>
+            <a:r>
+              <a:rPr sz="1300" b="0">
+                <a:solidFill>
+                  <a:srgbClr val="1C2A33"/>
+                </a:solidFill>
+                <a:latin typeface="楷体"/>
+                <a:ea typeface="楷体"/>
+                <a:cs typeface="楷体"/>
+              </a:rPr>
+              <a:t>豪放（家国·用典·悲凉）vs婉约（自我·白描·凄婉）；但并非绝对对立。</a:t>
+            </a:r>
+          </a:p>
+        </p:txBody>
+      </p:sp>
+      <p:sp>
+        <p:nvSpPr>
+          <p:cNvPr id="12" name="Rounded Rectangle 11"/>
+          <p:cNvSpPr/>
+          <p:nvPr/>
+        </p:nvSpPr>
+        <p:spPr>
+          <a:xfrm>
+            <a:off x="640080" y="5806440"/>
+            <a:ext cx="10911535" cy="640080"/>
+          </a:xfrm>
+          <a:prstGeom prst="roundRect">
+            <a:avLst/>
+          </a:prstGeom>
+          <a:solidFill>
+            <a:srgbClr val="1C2A33"/>
+          </a:solidFill>
+          <a:effectLst/>
+        </p:spPr>
+        <p:style>
+          <a:lnRef idx="1">
+            <a:schemeClr val="accent1"/>
+          </a:lnRef>
+          <a:fillRef idx="3">
+            <a:schemeClr val="accent1"/>
+          </a:fillRef>
+          <a:effectRef idx="2">
+            <a:schemeClr val="accent1"/>
+          </a:effectRef>
+          <a:fontRef idx="minor">
+            <a:schemeClr val="lt1"/>
+          </a:fontRef>
+        </p:style>
+        <p:txBody>
+          <a:bodyPr rtlCol="0" anchor="ctr"/>
+          <a:lstStyle/>
+          <a:p>
+            <a:pPr algn="ctr"/>
+          </a:p>
+        </p:txBody>
+      </p:sp>
+      <p:sp>
+        <p:nvSpPr>
+          <p:cNvPr id="13" name="Rectangle 12"/>
+          <p:cNvSpPr/>
+          <p:nvPr/>
+        </p:nvSpPr>
+        <p:spPr>
+          <a:xfrm>
+            <a:off x="914400" y="6035040"/>
+            <a:ext cx="54864" cy="279400"/>
           </a:xfrm>
           <a:prstGeom prst="rect">
             <a:avLst/>
@@ -8186,58 +9768,14 @@
       </p:sp>
       <p:sp>
         <p:nvSpPr>
-          <p:cNvPr id="5" name="Rectangle 4"/>
-          <p:cNvSpPr/>
-          <p:nvPr/>
-        </p:nvSpPr>
-        <p:spPr>
-          <a:xfrm>
-            <a:off x="640080" y="1737360"/>
-            <a:ext cx="54864" cy="431800"/>
-          </a:xfrm>
-          <a:prstGeom prst="rect">
-            <a:avLst/>
-          </a:prstGeom>
-          <a:solidFill>
-            <a:srgbClr val="C8A86B"/>
-          </a:solidFill>
-          <a:ln>
-            <a:noFill/>
-          </a:ln>
-          <a:effectLst/>
-        </p:spPr>
-        <p:style>
-          <a:lnRef idx="1">
-            <a:schemeClr val="accent1"/>
-          </a:lnRef>
-          <a:fillRef idx="3">
-            <a:schemeClr val="accent1"/>
-          </a:fillRef>
-          <a:effectRef idx="2">
-            <a:schemeClr val="accent1"/>
-          </a:effectRef>
-          <a:fontRef idx="minor">
-            <a:schemeClr val="lt1"/>
-          </a:fontRef>
-        </p:style>
-        <p:txBody>
-          <a:bodyPr rtlCol="0" anchor="ctr"/>
-          <a:lstStyle/>
-          <a:p>
-            <a:pPr algn="ctr"/>
-          </a:p>
-        </p:txBody>
-      </p:sp>
-      <p:sp>
-        <p:nvSpPr>
-          <p:cNvPr id="6" name="TextBox 5"/>
+          <p:cNvPr id="14" name="TextBox 13"/>
           <p:cNvSpPr txBox="1"/>
           <p:nvPr/>
         </p:nvSpPr>
         <p:spPr>
           <a:xfrm>
-            <a:off x="868680" y="1645920"/>
-            <a:ext cx="10682935" cy="2194560"/>
+            <a:off x="1143000" y="5943600"/>
+            <a:ext cx="10180015" cy="457200"/>
           </a:xfrm>
           <a:prstGeom prst="rect">
             <a:avLst/>
@@ -8252,43 +9790,29 @@
           <a:p>
             <a:pPr algn="l">
               <a:lnSpc>
-                <a:spcPct val="150000"/>
+                <a:spcPct val="140000"/>
               </a:lnSpc>
               <a:spcAft>
-                <a:spcPts val="1000"/>
+                <a:spcPts val="400"/>
               </a:spcAft>
             </a:pPr>
             <a:r>
-              <a:rPr sz="2200" b="0">
-                <a:solidFill>
-                  <a:srgbClr val="1C2A33"/>
+              <a:rPr sz="1350" b="0">
+                <a:solidFill>
+                  <a:srgbClr val="FFFFFF"/>
                 </a:solidFill>
                 <a:latin typeface="楷体"/>
                 <a:ea typeface="楷体"/>
                 <a:cs typeface="楷体"/>
               </a:rPr>
-              <a:t>本单元主题：生命的诗意。把今天学到的方法带进下一篇——自己读、自己想、自己写。</a:t>
-            </a:r>
-          </a:p>
-          <a:p>
-            <a:pPr algn="l"/>
-            <a:r>
-              <a:rPr sz="1600" b="1">
-                <a:solidFill>
-                  <a:srgbClr val="B23A2A"/>
-                </a:solidFill>
-                <a:latin typeface="微软雅黑"/>
-                <a:ea typeface="微软雅黑"/>
-                <a:cs typeface="微软雅黑"/>
-              </a:rPr>
-              <a:t>方法迁移：圈关键信息 → 理事件脉络 → 析人物精神</a:t>
-            </a:r>
-          </a:p>
-        </p:txBody>
-      </p:sp>
-      <p:sp>
-        <p:nvSpPr>
-          <p:cNvPr id="7" name="TextBox 6"/>
+              <a:t>从曹陶到苏辛，诗词写尽生命的姿态；带着方法，去读更多。</a:t>
+            </a:r>
+          </a:p>
+        </p:txBody>
+      </p:sp>
+      <p:sp>
+        <p:nvSpPr>
+          <p:cNvPr id="15" name="TextBox 14"/>
           <p:cNvSpPr txBox="1"/>
           <p:nvPr/>
         </p:nvSpPr>
